--- a/powerpoint/NSX_WORKFLOW_OVERVIEW.pptx
+++ b/powerpoint/NSX_WORKFLOW_OVERVIEW.pptx
@@ -10,7 +10,13 @@
     <p:sldId id="258" r:id="rId4"/>
     <p:sldId id="259" r:id="rId5"/>
     <p:sldId id="260" r:id="rId6"/>
-    <p:sldId id="261" r:id="rId7"/>
+    <p:sldId id="262" r:id="rId13"/>
+    <p:sldId id="263" r:id="rId14"/>
+    <p:sldId id="264" r:id="rId15"/>
+    <p:sldId id="265" r:id="rId16"/>
+    <p:sldId id="266" r:id="rId17"/>
+    <p:sldId id="267" r:id="rId18"/>
+    <p:sldId id="268" r:id="rId19"/>
   </p:sldIdLst>
   <p:notesMasterIdLst>
     <p:notesMasterId r:id="rId8"/>
@@ -883,94 +889,6 @@
             <a:fld id="{F7021451-1387-4CA6-816F-3879F97B5CBC}" type="slidenum">
               <a:rPr lang="en-US"/>
               <a:t>5</a:t>
-            </a:fld>
-            <a:endParaRPr lang="en-US"/>
-          </a:p>
-        </p:txBody>
-      </p:sp>
-    </p:spTree>
-    <p:extLst>
-      <p:ext uri="{BB962C8B-B14F-4D97-AF65-F5344CB8AC3E}">
-        <p14:creationId xmlns:p14="http://schemas.microsoft.com/office/powerpoint/2010/main" val="1024086991"/>
-      </p:ext>
-    </p:extLst>
-  </p:cSld>
-  <p:clrMapOvr>
-    <a:masterClrMapping/>
-  </p:clrMapOvr>
-</p:notes>
-</file>
-
-<file path=ppt/notesSlides/notesSlide6.xml><?xml version="1.0" encoding="utf-8"?>
-<p:notes xmlns:a="http://schemas.openxmlformats.org/drawingml/2006/main" xmlns:r="http://schemas.openxmlformats.org/officeDocument/2006/relationships" xmlns:p="http://schemas.openxmlformats.org/presentationml/2006/main">
-  <p:cSld>
-    <p:spTree>
-      <p:nvGrpSpPr>
-        <p:cNvPr id="1" name=""/>
-        <p:cNvGrpSpPr/>
-        <p:nvPr/>
-      </p:nvGrpSpPr>
-      <p:grpSpPr>
-        <a:xfrm>
-          <a:off x="0" y="0"/>
-          <a:ext cx="0" cy="0"/>
-          <a:chOff x="0" y="0"/>
-          <a:chExt cx="0" cy="0"/>
-        </a:xfrm>
-      </p:grpSpPr>
-      <p:sp>
-        <p:nvSpPr>
-          <p:cNvPr id="2" name="Slide Image Placeholder 1"/>
-          <p:cNvSpPr>
-            <a:spLocks noGrp="1" noRot="1" noChangeAspect="1"/>
-          </p:cNvSpPr>
-          <p:nvPr>
-            <p:ph type="sldImg"/>
-          </p:nvPr>
-        </p:nvSpPr>
-        <p:spPr/>
-      </p:sp>
-      <p:sp>
-        <p:nvSpPr>
-          <p:cNvPr id="3" name="Notes Placeholder 2"/>
-          <p:cNvSpPr>
-            <a:spLocks noGrp="1"/>
-          </p:cNvSpPr>
-          <p:nvPr>
-            <p:ph type="body" idx="1"/>
-          </p:nvPr>
-        </p:nvSpPr>
-        <p:spPr/>
-        <p:txBody>
-          <a:bodyPr/>
-          <a:lstStyle/>
-          <a:p>
-            <a:r>
-              <a:rPr lang="en-US" dirty="0"/>
-              <a:t/>
-            </a:r>
-            <a:endParaRPr lang="en-US" dirty="0"/>
-          </a:p>
-        </p:txBody>
-      </p:sp>
-      <p:sp>
-        <p:nvSpPr>
-          <p:cNvPr id="4" name="Slide Number Placeholder 3"/>
-          <p:cNvSpPr>
-            <a:spLocks noGrp="1"/>
-          </p:cNvSpPr>
-          <p:nvPr>
-            <p:ph type="sldNum" sz="quarter" idx="10"/>
-          </p:nvPr>
-        </p:nvSpPr>
-        <p:spPr/>
-        <p:txBody>
-          <a:bodyPr/>
-          <a:lstStyle/>
-          <a:p>
-            <a:fld id="{F7021451-1387-4CA6-816F-3879F97B5CBC}" type="slidenum">
-              <a:rPr lang="en-US"/>
-              <a:t>6</a:t>
             </a:fld>
             <a:endParaRPr lang="en-US"/>
           </a:p>
@@ -1353,7 +1271,7 @@
                 <a:ea typeface="Calibri" pitchFamily="34" charset="-122"/>
                 <a:cs typeface="Calibri" pitchFamily="34" charset="-120"/>
               </a:rPr>
-              <a:t>NSX Workflow</a:t>
+              <a:t>NSX + Palo Alto Workflow</a:t>
             </a:r>
             <a:endParaRPr lang="en-US" sz="4800" dirty="0"/>
           </a:p>
@@ -1392,7 +1310,7 @@
                 <a:ea typeface="Calibri" pitchFamily="34" charset="-122"/>
                 <a:cs typeface="Calibri" pitchFamily="34" charset="-120"/>
               </a:rPr>
-              <a:t>Move NSX firewall policy between managers without breaking traffic</a:t>
+              <a:t>Three NSX sites and the Palo Alto between them, without breaking traffic</a:t>
             </a:r>
             <a:endParaRPr lang="en-US" sz="2200" dirty="0"/>
           </a:p>
@@ -1407,7 +1325,7 @@
         <p:spPr>
           <a:xfrm>
             <a:off x="548640" y="3383280"/>
-            <a:ext cx="2560320" cy="1554480"/>
+            <a:ext cx="2029968" cy="1554480"/>
           </a:xfrm>
           <a:prstGeom prst="roundRect">
             <a:avLst>
@@ -1424,6 +1342,10 @@
             <a:prstDash val="solid"/>
           </a:ln>
         </p:spPr>
+        <p:txBody>
+          <a:bodyPr/>
+          <a:p/>
+        </p:txBody>
       </p:sp>
       <p:sp>
         <p:nvSpPr>
@@ -1433,8 +1355,8 @@
         </p:nvSpPr>
         <p:spPr>
           <a:xfrm>
-            <a:off x="777240" y="3611880"/>
-            <a:ext cx="594360" cy="594360"/>
+            <a:off x="731520" y="3611880"/>
+            <a:ext cx="530352" cy="530352"/>
           </a:xfrm>
           <a:prstGeom prst="ellipse">
             <a:avLst/>
@@ -1449,6 +1371,10 @@
             <a:prstDash val="solid"/>
           </a:ln>
         </p:spPr>
+        <p:txBody>
+          <a:bodyPr/>
+          <a:p/>
+        </p:txBody>
       </p:sp>
       <p:sp>
         <p:nvSpPr>
@@ -1458,8 +1384,8 @@
         </p:nvSpPr>
         <p:spPr>
           <a:xfrm>
-            <a:off x="777240" y="3611880"/>
-            <a:ext cx="594360" cy="594360"/>
+            <a:off x="731520" y="3611880"/>
+            <a:ext cx="530352" cy="530352"/>
           </a:xfrm>
           <a:prstGeom prst="rect">
             <a:avLst/>
@@ -1497,8 +1423,8 @@
         </p:nvSpPr>
         <p:spPr>
           <a:xfrm>
-            <a:off x="1508760" y="3611880"/>
-            <a:ext cx="1508760" cy="594360"/>
+            <a:off x="1371600" y="3611880"/>
+            <a:ext cx="1115568" cy="594360"/>
           </a:xfrm>
           <a:prstGeom prst="rect">
             <a:avLst/>
@@ -1514,7 +1440,7 @@
               <a:buNone/>
             </a:pPr>
             <a:r>
-              <a:rPr lang="en-US" sz="1700" b="1" dirty="0">
+              <a:rPr lang="en-US" sz="1600" b="1" dirty="0">
                 <a:solidFill>
                   <a:srgbClr val="FFFFFF"/>
                 </a:solidFill>
@@ -1536,8 +1462,8 @@
         </p:nvSpPr>
         <p:spPr>
           <a:xfrm>
-            <a:off x="777240" y="4343400"/>
-            <a:ext cx="2194560" cy="457200"/>
+            <a:off x="731520" y="4343400"/>
+            <a:ext cx="1709928" cy="457200"/>
           </a:xfrm>
           <a:prstGeom prst="rect">
             <a:avLst/>
@@ -1575,8 +1501,8 @@
         </p:nvSpPr>
         <p:spPr>
           <a:xfrm>
-            <a:off x="3337560" y="3383280"/>
-            <a:ext cx="2560320" cy="1554480"/>
+            <a:off x="2811780" y="3383280"/>
+            <a:ext cx="2029968" cy="1554480"/>
           </a:xfrm>
           <a:prstGeom prst="roundRect">
             <a:avLst>
@@ -1593,6 +1519,10 @@
             <a:prstDash val="solid"/>
           </a:ln>
         </p:spPr>
+        <p:txBody>
+          <a:bodyPr/>
+          <a:p/>
+        </p:txBody>
       </p:sp>
       <p:sp>
         <p:nvSpPr>
@@ -1602,8 +1532,8 @@
         </p:nvSpPr>
         <p:spPr>
           <a:xfrm>
-            <a:off x="3566160" y="3611880"/>
-            <a:ext cx="594360" cy="594360"/>
+            <a:off x="2994660" y="3611880"/>
+            <a:ext cx="530352" cy="530352"/>
           </a:xfrm>
           <a:prstGeom prst="ellipse">
             <a:avLst/>
@@ -1618,6 +1548,10 @@
             <a:prstDash val="solid"/>
           </a:ln>
         </p:spPr>
+        <p:txBody>
+          <a:bodyPr/>
+          <a:p/>
+        </p:txBody>
       </p:sp>
       <p:sp>
         <p:nvSpPr>
@@ -1627,8 +1561,8 @@
         </p:nvSpPr>
         <p:spPr>
           <a:xfrm>
-            <a:off x="3566160" y="3611880"/>
-            <a:ext cx="594360" cy="594360"/>
+            <a:off x="2994660" y="3611880"/>
+            <a:ext cx="530352" cy="530352"/>
           </a:xfrm>
           <a:prstGeom prst="rect">
             <a:avLst/>
@@ -1666,8 +1600,8 @@
         </p:nvSpPr>
         <p:spPr>
           <a:xfrm>
-            <a:off x="4297680" y="3611880"/>
-            <a:ext cx="1508760" cy="594360"/>
+            <a:off x="3634740" y="3611880"/>
+            <a:ext cx="1115568" cy="594360"/>
           </a:xfrm>
           <a:prstGeom prst="rect">
             <a:avLst/>
@@ -1683,7 +1617,7 @@
               <a:buNone/>
             </a:pPr>
             <a:r>
-              <a:rPr lang="en-US" sz="1700" b="1" dirty="0">
+              <a:rPr lang="en-US" sz="1600" b="1" dirty="0">
                 <a:solidFill>
                   <a:srgbClr val="FFFFFF"/>
                 </a:solidFill>
@@ -1705,8 +1639,8 @@
         </p:nvSpPr>
         <p:spPr>
           <a:xfrm>
-            <a:off x="3566160" y="4343400"/>
-            <a:ext cx="2194560" cy="457200"/>
+            <a:off x="2994660" y="4343400"/>
+            <a:ext cx="1709928" cy="457200"/>
           </a:xfrm>
           <a:prstGeom prst="rect">
             <a:avLst/>
@@ -1744,8 +1678,8 @@
         </p:nvSpPr>
         <p:spPr>
           <a:xfrm>
-            <a:off x="6126480" y="3383280"/>
-            <a:ext cx="2560320" cy="1554480"/>
+            <a:off x="5074920" y="3383280"/>
+            <a:ext cx="2029968" cy="1554480"/>
           </a:xfrm>
           <a:prstGeom prst="roundRect">
             <a:avLst>
@@ -1762,6 +1696,10 @@
             <a:prstDash val="solid"/>
           </a:ln>
         </p:spPr>
+        <p:txBody>
+          <a:bodyPr/>
+          <a:p/>
+        </p:txBody>
       </p:sp>
       <p:sp>
         <p:nvSpPr>
@@ -1771,8 +1709,8 @@
         </p:nvSpPr>
         <p:spPr>
           <a:xfrm>
-            <a:off x="6355080" y="3611880"/>
-            <a:ext cx="594360" cy="594360"/>
+            <a:off x="5257800" y="3611880"/>
+            <a:ext cx="530352" cy="530352"/>
           </a:xfrm>
           <a:prstGeom prst="ellipse">
             <a:avLst/>
@@ -1787,6 +1725,10 @@
             <a:prstDash val="solid"/>
           </a:ln>
         </p:spPr>
+        <p:txBody>
+          <a:bodyPr/>
+          <a:p/>
+        </p:txBody>
       </p:sp>
       <p:sp>
         <p:nvSpPr>
@@ -1796,8 +1738,8 @@
         </p:nvSpPr>
         <p:spPr>
           <a:xfrm>
-            <a:off x="6355080" y="3611880"/>
-            <a:ext cx="594360" cy="594360"/>
+            <a:off x="5257800" y="3611880"/>
+            <a:ext cx="530352" cy="530352"/>
           </a:xfrm>
           <a:prstGeom prst="rect">
             <a:avLst/>
@@ -1835,8 +1777,8 @@
         </p:nvSpPr>
         <p:spPr>
           <a:xfrm>
-            <a:off x="7086600" y="3611880"/>
-            <a:ext cx="1508760" cy="594360"/>
+            <a:off x="5897880" y="3611880"/>
+            <a:ext cx="1115568" cy="594360"/>
           </a:xfrm>
           <a:prstGeom prst="rect">
             <a:avLst/>
@@ -1852,7 +1794,7 @@
               <a:buNone/>
             </a:pPr>
             <a:r>
-              <a:rPr lang="en-US" sz="1700" b="1" dirty="0">
+              <a:rPr lang="en-US" sz="1600" b="1" dirty="0">
                 <a:solidFill>
                   <a:srgbClr val="FFFFFF"/>
                 </a:solidFill>
@@ -1874,8 +1816,8 @@
         </p:nvSpPr>
         <p:spPr>
           <a:xfrm>
-            <a:off x="6355080" y="4343400"/>
-            <a:ext cx="2194560" cy="457200"/>
+            <a:off x="5257800" y="4343400"/>
+            <a:ext cx="1709928" cy="457200"/>
           </a:xfrm>
           <a:prstGeom prst="rect">
             <a:avLst/>
@@ -1913,8 +1855,8 @@
         </p:nvSpPr>
         <p:spPr>
           <a:xfrm>
-            <a:off x="8915400" y="3383280"/>
-            <a:ext cx="2560320" cy="1554480"/>
+            <a:off x="7338060" y="3383280"/>
+            <a:ext cx="2029968" cy="1554480"/>
           </a:xfrm>
           <a:prstGeom prst="roundRect">
             <a:avLst>
@@ -1931,6 +1873,10 @@
             <a:prstDash val="solid"/>
           </a:ln>
         </p:spPr>
+        <p:txBody>
+          <a:bodyPr/>
+          <a:p/>
+        </p:txBody>
       </p:sp>
       <p:sp>
         <p:nvSpPr>
@@ -1940,8 +1886,8 @@
         </p:nvSpPr>
         <p:spPr>
           <a:xfrm>
-            <a:off x="9144000" y="3611880"/>
-            <a:ext cx="594360" cy="594360"/>
+            <a:off x="7520940" y="3611880"/>
+            <a:ext cx="530352" cy="530352"/>
           </a:xfrm>
           <a:prstGeom prst="ellipse">
             <a:avLst/>
@@ -1956,6 +1902,10 @@
             <a:prstDash val="solid"/>
           </a:ln>
         </p:spPr>
+        <p:txBody>
+          <a:bodyPr/>
+          <a:p/>
+        </p:txBody>
       </p:sp>
       <p:sp>
         <p:nvSpPr>
@@ -1965,8 +1915,8 @@
         </p:nvSpPr>
         <p:spPr>
           <a:xfrm>
-            <a:off x="9144000" y="3611880"/>
-            <a:ext cx="594360" cy="594360"/>
+            <a:off x="7520940" y="3611880"/>
+            <a:ext cx="530352" cy="530352"/>
           </a:xfrm>
           <a:prstGeom prst="rect">
             <a:avLst/>
@@ -2004,8 +1954,8 @@
         </p:nvSpPr>
         <p:spPr>
           <a:xfrm>
-            <a:off x="9875520" y="3611880"/>
-            <a:ext cx="1508760" cy="594360"/>
+            <a:off x="8161020" y="3611880"/>
+            <a:ext cx="1115568" cy="594360"/>
           </a:xfrm>
           <a:prstGeom prst="rect">
             <a:avLst/>
@@ -2021,7 +1971,7 @@
               <a:buNone/>
             </a:pPr>
             <a:r>
-              <a:rPr lang="en-US" sz="1700" b="1" dirty="0">
+              <a:rPr lang="en-US" sz="1600" b="1" dirty="0">
                 <a:solidFill>
                   <a:srgbClr val="FFFFFF"/>
                 </a:solidFill>
@@ -2043,8 +1993,8 @@
         </p:nvSpPr>
         <p:spPr>
           <a:xfrm>
-            <a:off x="9144000" y="4343400"/>
-            <a:ext cx="2194560" cy="457200"/>
+            <a:off x="7520940" y="4343400"/>
+            <a:ext cx="1709928" cy="457200"/>
           </a:xfrm>
           <a:prstGeom prst="rect">
             <a:avLst/>
@@ -2107,7 +2057,7 @@
                 <a:ea typeface="Calibri" pitchFamily="34" charset="-122"/>
                 <a:cs typeface="Calibri" pitchFamily="34" charset="-120"/>
               </a:rPr>
-              <a:t>Lab-validated 2026-09-28 on nsx-lm1 and nsx-lm2</a:t>
+              <a:t>Lab-validated 2026-09-28 to 2026-10-05 on nsx-lm1, nsx-lm2, nsx-lm3 and Panorama pano4</a:t>
             </a:r>
             <a:endParaRPr lang="en-US" sz="1400" dirty="0"/>
           </a:p>
@@ -2146,9 +2096,4485 @@
                 <a:ea typeface="Calibri" pitchFamily="34" charset="-122"/>
                 <a:cs typeface="Calibri" pitchFamily="34" charset="-120"/>
               </a:rPr>
-              <a:t>NSX migration workflow  •  1/6</a:t>
+              <a:t>NSX + Palo Alto migration workflow  •  1/12</a:t>
             </a:r>
             <a:endParaRPr lang="en-US" sz="1000" dirty="0"/>
+          </a:p>
+        </p:txBody>
+      </p:sp>
+      <p:sp>
+        <p:nvSpPr>
+          <p:cNvPr id="26" name="Rounded Rectangle 25"/>
+          <p:cNvSpPr/>
+          <p:nvPr/>
+        </p:nvSpPr>
+        <p:spPr>
+          <a:xfrm>
+            <a:off x="9601200" y="3383280"/>
+            <a:ext cx="2029968" cy="1554480"/>
+          </a:xfrm>
+          <a:prstGeom prst="roundRect">
+            <a:avLst>
+              <a:gd name="adj" fmla="val 8333"/>
+            </a:avLst>
+          </a:prstGeom>
+          <a:solidFill>
+            <a:srgbClr val="1B3354"/>
+          </a:solidFill>
+          <a:ln w="12700">
+            <a:solidFill>
+              <a:srgbClr val="1B3354"/>
+            </a:solidFill>
+          </a:ln>
+          <a:effectLst/>
+        </p:spPr>
+        <p:style>
+          <a:lnRef idx="1">
+            <a:schemeClr val="accent1"/>
+          </a:lnRef>
+          <a:fillRef idx="3">
+            <a:schemeClr val="accent1"/>
+          </a:fillRef>
+          <a:effectRef idx="2">
+            <a:schemeClr val="accent1"/>
+          </a:effectRef>
+          <a:fontRef idx="minor">
+            <a:schemeClr val="lt1"/>
+          </a:fontRef>
+        </p:style>
+        <p:txBody>
+          <a:bodyPr rtlCol="0" anchor="ctr"/>
+          <a:lstStyle/>
+          <a:p>
+            <a:pPr algn="ctr"/>
+          </a:p>
+        </p:txBody>
+      </p:sp>
+      <p:sp>
+        <p:nvSpPr>
+          <p:cNvPr id="27" name="Oval 26"/>
+          <p:cNvSpPr/>
+          <p:nvPr/>
+        </p:nvSpPr>
+        <p:spPr>
+          <a:xfrm>
+            <a:off x="9784080" y="3611880"/>
+            <a:ext cx="530352" cy="530352"/>
+          </a:xfrm>
+          <a:prstGeom prst="ellipse">
+            <a:avLst/>
+          </a:prstGeom>
+          <a:solidFill>
+            <a:srgbClr val="6B4FA8"/>
+          </a:solidFill>
+          <a:ln w="12700">
+            <a:solidFill>
+              <a:srgbClr val="6B4FA8"/>
+            </a:solidFill>
+          </a:ln>
+          <a:effectLst/>
+        </p:spPr>
+        <p:style>
+          <a:lnRef idx="1">
+            <a:schemeClr val="accent1"/>
+          </a:lnRef>
+          <a:fillRef idx="3">
+            <a:schemeClr val="accent1"/>
+          </a:fillRef>
+          <a:effectRef idx="2">
+            <a:schemeClr val="accent1"/>
+          </a:effectRef>
+          <a:fontRef idx="minor">
+            <a:schemeClr val="lt1"/>
+          </a:fontRef>
+        </p:style>
+        <p:txBody>
+          <a:bodyPr rtlCol="0" anchor="ctr"/>
+          <a:lstStyle/>
+          <a:p>
+            <a:pPr algn="ctr"/>
+          </a:p>
+        </p:txBody>
+      </p:sp>
+      <p:sp>
+        <p:nvSpPr>
+          <p:cNvPr id="28" name="TextBox 27"/>
+          <p:cNvSpPr txBox="1"/>
+          <p:nvPr/>
+        </p:nvSpPr>
+        <p:spPr>
+          <a:xfrm>
+            <a:off x="9784080" y="3611880"/>
+            <a:ext cx="530352" cy="530352"/>
+          </a:xfrm>
+          <a:prstGeom prst="rect">
+            <a:avLst/>
+          </a:prstGeom>
+          <a:noFill/>
+        </p:spPr>
+        <p:txBody>
+          <a:bodyPr wrap="square" lIns="0" rIns="0" tIns="0" bIns="0" anchor="ctr">
+            <a:spAutoFit/>
+          </a:bodyPr>
+          <a:lstStyle/>
+          <a:p>
+            <a:pPr algn="ctr"/>
+            <a:r>
+              <a:rPr sz="2100" b="1" i="0">
+                <a:solidFill>
+                  <a:srgbClr val="FFFFFF"/>
+                </a:solidFill>
+                <a:latin typeface="Calibri"/>
+              </a:rPr>
+              <a:t>P</a:t>
+            </a:r>
+          </a:p>
+        </p:txBody>
+      </p:sp>
+      <p:sp>
+        <p:nvSpPr>
+          <p:cNvPr id="29" name="TextBox 28"/>
+          <p:cNvSpPr txBox="1"/>
+          <p:nvPr/>
+        </p:nvSpPr>
+        <p:spPr>
+          <a:xfrm>
+            <a:off x="10424160" y="3611880"/>
+            <a:ext cx="1115568" cy="594360"/>
+          </a:xfrm>
+          <a:prstGeom prst="rect">
+            <a:avLst/>
+          </a:prstGeom>
+          <a:noFill/>
+        </p:spPr>
+        <p:txBody>
+          <a:bodyPr wrap="square" lIns="0" rIns="0" tIns="0" bIns="0" anchor="ctr">
+            <a:spAutoFit/>
+          </a:bodyPr>
+          <a:lstStyle/>
+          <a:p>
+            <a:pPr algn="l"/>
+            <a:r>
+              <a:rPr sz="1600" b="1" i="0">
+                <a:solidFill>
+                  <a:srgbClr val="FFFFFF"/>
+                </a:solidFill>
+                <a:latin typeface="Calibri"/>
+              </a:rPr>
+              <a:t>Palo mirror</a:t>
+            </a:r>
+          </a:p>
+        </p:txBody>
+      </p:sp>
+      <p:sp>
+        <p:nvSpPr>
+          <p:cNvPr id="30" name="TextBox 29"/>
+          <p:cNvSpPr txBox="1"/>
+          <p:nvPr/>
+        </p:nvSpPr>
+        <p:spPr>
+          <a:xfrm>
+            <a:off x="9784080" y="4343400"/>
+            <a:ext cx="1709928" cy="457200"/>
+          </a:xfrm>
+          <a:prstGeom prst="rect">
+            <a:avLst/>
+          </a:prstGeom>
+          <a:noFill/>
+        </p:spPr>
+        <p:txBody>
+          <a:bodyPr wrap="square" lIns="0" rIns="0" tIns="0" bIns="0" anchor="t">
+            <a:spAutoFit/>
+          </a:bodyPr>
+          <a:lstStyle/>
+          <a:p>
+            <a:pPr algn="l"/>
+            <a:r>
+              <a:rPr sz="1400" b="0" i="0">
+                <a:solidFill>
+                  <a:srgbClr val="BEDCE6"/>
+                </a:solidFill>
+                <a:latin typeface="Calibri"/>
+              </a:rPr>
+              <a:t>same groups and tags on dg-5</a:t>
+            </a:r>
+          </a:p>
+        </p:txBody>
+      </p:sp>
+    </p:spTree>
+  </p:cSld>
+  <p:clrMapOvr>
+    <a:masterClrMapping/>
+  </p:clrMapOvr>
+</p:sld>
+</file>
+
+<file path=ppt/slides/slide10.xml><?xml version="1.0" encoding="utf-8"?>
+<p:sld xmlns:a="http://schemas.openxmlformats.org/drawingml/2006/main" xmlns:p="http://schemas.openxmlformats.org/presentationml/2006/main" xmlns:r="http://schemas.openxmlformats.org/officeDocument/2006/relationships">
+  <p:cSld>
+    <p:bg>
+      <p:bgPr>
+        <a:solidFill>
+          <a:srgbClr val="FFFFFF"/>
+        </a:solidFill>
+        <a:effectLst/>
+      </p:bgPr>
+    </p:bg>
+    <p:spTree>
+      <p:nvGrpSpPr>
+        <p:cNvPr id="1" name=""/>
+        <p:cNvGrpSpPr/>
+        <p:nvPr/>
+      </p:nvGrpSpPr>
+      <p:grpSpPr/>
+      <p:sp>
+        <p:nvSpPr>
+          <p:cNvPr id="2" name="TextBox 1"/>
+          <p:cNvSpPr txBox="1"/>
+          <p:nvPr/>
+        </p:nvSpPr>
+        <p:spPr>
+          <a:xfrm>
+            <a:off x="548640" y="365760"/>
+            <a:ext cx="11064240" cy="731520"/>
+          </a:xfrm>
+          <a:prstGeom prst="rect">
+            <a:avLst/>
+          </a:prstGeom>
+          <a:noFill/>
+        </p:spPr>
+        <p:txBody>
+          <a:bodyPr wrap="square" lIns="0" rIns="0" tIns="0" bIns="0" anchor="t">
+            <a:spAutoFit/>
+          </a:bodyPr>
+          <a:lstStyle/>
+          <a:p>
+            <a:pPr algn="l"/>
+            <a:r>
+              <a:rPr sz="3600" b="1" i="0">
+                <a:solidFill>
+                  <a:srgbClr val="11233E"/>
+                </a:solidFill>
+                <a:latin typeface="Calibri"/>
+              </a:rPr>
+              <a:t>Palo Alto dg-5 mirrors NSX exactly</a:t>
+            </a:r>
+          </a:p>
+        </p:txBody>
+      </p:sp>
+      <p:sp>
+        <p:nvSpPr>
+          <p:cNvPr id="3" name="TextBox 2"/>
+          <p:cNvSpPr txBox="1"/>
+          <p:nvPr/>
+        </p:nvSpPr>
+        <p:spPr>
+          <a:xfrm>
+            <a:off x="548640" y="1051560"/>
+            <a:ext cx="11064240" cy="411480"/>
+          </a:xfrm>
+          <a:prstGeom prst="rect">
+            <a:avLst/>
+          </a:prstGeom>
+          <a:noFill/>
+        </p:spPr>
+        <p:txBody>
+          <a:bodyPr wrap="square" lIns="0" rIns="0" tIns="0" bIns="0" anchor="t">
+            <a:spAutoFit/>
+          </a:bodyPr>
+          <a:lstStyle/>
+          <a:p>
+            <a:pPr algn="l"/>
+            <a:r>
+              <a:rPr sz="1700" b="0" i="0">
+                <a:solidFill>
+                  <a:srgbClr val="5C6C7E"/>
+                </a:solidFill>
+                <a:latin typeface="Calibri"/>
+              </a:rPr>
+              <a:t>Same group types, same tags  ·  REST API only  ·  candidate config, never committed by the tool</a:t>
+            </a:r>
+          </a:p>
+        </p:txBody>
+      </p:sp>
+      <p:sp>
+        <p:nvSpPr>
+          <p:cNvPr id="4" name="TextBox 3"/>
+          <p:cNvSpPr txBox="1"/>
+          <p:nvPr/>
+        </p:nvSpPr>
+        <p:spPr>
+          <a:xfrm>
+            <a:off x="548640" y="1645920"/>
+            <a:ext cx="4206240" cy="320040"/>
+          </a:xfrm>
+          <a:prstGeom prst="rect">
+            <a:avLst/>
+          </a:prstGeom>
+          <a:noFill/>
+        </p:spPr>
+        <p:txBody>
+          <a:bodyPr wrap="square" lIns="0" rIns="0" tIns="0" bIns="0" anchor="ctr">
+            <a:spAutoFit/>
+          </a:bodyPr>
+          <a:lstStyle/>
+          <a:p>
+            <a:pPr algn="l"/>
+            <a:r>
+              <a:rPr sz="1400" b="1" i="0">
+                <a:solidFill>
+                  <a:srgbClr val="5C6C7E"/>
+                </a:solidFill>
+                <a:latin typeface="Calibri"/>
+              </a:rPr>
+              <a:t>On NSX</a:t>
+            </a:r>
+          </a:p>
+        </p:txBody>
+      </p:sp>
+      <p:sp>
+        <p:nvSpPr>
+          <p:cNvPr id="5" name="TextBox 4"/>
+          <p:cNvSpPr txBox="1"/>
+          <p:nvPr/>
+        </p:nvSpPr>
+        <p:spPr>
+          <a:xfrm>
+            <a:off x="5623560" y="1645920"/>
+            <a:ext cx="5989320" cy="320040"/>
+          </a:xfrm>
+          <a:prstGeom prst="rect">
+            <a:avLst/>
+          </a:prstGeom>
+          <a:noFill/>
+        </p:spPr>
+        <p:txBody>
+          <a:bodyPr wrap="square" lIns="0" rIns="0" tIns="0" bIns="0" anchor="ctr">
+            <a:spAutoFit/>
+          </a:bodyPr>
+          <a:lstStyle/>
+          <a:p>
+            <a:pPr algn="l"/>
+            <a:r>
+              <a:rPr sz="1400" b="1" i="0">
+                <a:solidFill>
+                  <a:srgbClr val="27965B"/>
+                </a:solidFill>
+                <a:latin typeface="Calibri"/>
+              </a:rPr>
+              <a:t>On Panorama (dg-5)</a:t>
+            </a:r>
+          </a:p>
+        </p:txBody>
+      </p:sp>
+      <p:sp>
+        <p:nvSpPr>
+          <p:cNvPr id="6" name="Rounded Rectangle 5"/>
+          <p:cNvSpPr/>
+          <p:nvPr/>
+        </p:nvSpPr>
+        <p:spPr>
+          <a:xfrm>
+            <a:off x="548640" y="2011680"/>
+            <a:ext cx="4206240" cy="530352"/>
+          </a:xfrm>
+          <a:prstGeom prst="roundRect">
+            <a:avLst>
+              <a:gd name="adj" fmla="val 8333"/>
+            </a:avLst>
+          </a:prstGeom>
+          <a:solidFill>
+            <a:srgbClr val="F2F6FA"/>
+          </a:solidFill>
+          <a:ln w="12700">
+            <a:solidFill>
+              <a:srgbClr val="F2F6FA"/>
+            </a:solidFill>
+          </a:ln>
+          <a:effectLst/>
+        </p:spPr>
+        <p:style>
+          <a:lnRef idx="1">
+            <a:schemeClr val="accent1"/>
+          </a:lnRef>
+          <a:fillRef idx="3">
+            <a:schemeClr val="accent1"/>
+          </a:fillRef>
+          <a:effectRef idx="2">
+            <a:schemeClr val="accent1"/>
+          </a:effectRef>
+          <a:fontRef idx="minor">
+            <a:schemeClr val="lt1"/>
+          </a:fontRef>
+        </p:style>
+        <p:txBody>
+          <a:bodyPr rtlCol="0" anchor="ctr"/>
+          <a:lstStyle/>
+          <a:p>
+            <a:pPr algn="ctr"/>
+          </a:p>
+        </p:txBody>
+      </p:sp>
+      <p:sp>
+        <p:nvSpPr>
+          <p:cNvPr id="7" name="TextBox 6"/>
+          <p:cNvSpPr txBox="1"/>
+          <p:nvPr/>
+        </p:nvSpPr>
+        <p:spPr>
+          <a:xfrm>
+            <a:off x="731520" y="2011680"/>
+            <a:ext cx="3931920" cy="530352"/>
+          </a:xfrm>
+          <a:prstGeom prst="rect">
+            <a:avLst/>
+          </a:prstGeom>
+          <a:noFill/>
+        </p:spPr>
+        <p:txBody>
+          <a:bodyPr wrap="square" lIns="0" rIns="0" tIns="0" bIns="0" anchor="ctr">
+            <a:spAutoFit/>
+          </a:bodyPr>
+          <a:lstStyle/>
+          <a:p>
+            <a:pPr algn="l"/>
+            <a:r>
+              <a:rPr sz="1500" b="1" i="0">
+                <a:solidFill>
+                  <a:srgbClr val="11233E"/>
+                </a:solidFill>
+                <a:latin typeface="Calibri"/>
+              </a:rPr>
+              <a:t>VM with an IP</a:t>
+            </a:r>
+          </a:p>
+        </p:txBody>
+      </p:sp>
+      <p:cxnSp>
+        <p:nvCxnSpPr>
+          <p:cNvPr id="8" name="Connector 7"/>
+          <p:cNvCxnSpPr/>
+          <p:nvPr/>
+        </p:nvCxnSpPr>
+        <p:spPr>
+          <a:xfrm>
+            <a:off x="4846320" y="2276856"/>
+            <a:ext cx="685800" cy="0"/>
+          </a:xfrm>
+          <a:prstGeom prst="line">
+            <a:avLst/>
+          </a:prstGeom>
+          <a:ln w="25400">
+            <a:solidFill>
+              <a:srgbClr val="27965B"/>
+            </a:solidFill>
+            <a:tailEnd type="triangle"/>
+          </a:ln>
+        </p:spPr>
+        <p:style>
+          <a:lnRef idx="2">
+            <a:schemeClr val="accent1"/>
+          </a:lnRef>
+          <a:fillRef idx="0">
+            <a:schemeClr val="accent1"/>
+          </a:fillRef>
+          <a:effectRef idx="1">
+            <a:schemeClr val="accent1"/>
+          </a:effectRef>
+          <a:fontRef idx="minor">
+            <a:schemeClr val="tx1"/>
+          </a:fontRef>
+        </p:style>
+      </p:cxnSp>
+      <p:sp>
+        <p:nvSpPr>
+          <p:cNvPr id="9" name="Rounded Rectangle 8"/>
+          <p:cNvSpPr/>
+          <p:nvPr/>
+        </p:nvSpPr>
+        <p:spPr>
+          <a:xfrm>
+            <a:off x="5623560" y="2011680"/>
+            <a:ext cx="5989320" cy="530352"/>
+          </a:xfrm>
+          <a:prstGeom prst="roundRect">
+            <a:avLst>
+              <a:gd name="adj" fmla="val 8333"/>
+            </a:avLst>
+          </a:prstGeom>
+          <a:solidFill>
+            <a:srgbClr val="EAF5EE"/>
+          </a:solidFill>
+          <a:ln w="12700">
+            <a:solidFill>
+              <a:srgbClr val="EAF5EE"/>
+            </a:solidFill>
+          </a:ln>
+          <a:effectLst/>
+        </p:spPr>
+        <p:style>
+          <a:lnRef idx="1">
+            <a:schemeClr val="accent1"/>
+          </a:lnRef>
+          <a:fillRef idx="3">
+            <a:schemeClr val="accent1"/>
+          </a:fillRef>
+          <a:effectRef idx="2">
+            <a:schemeClr val="accent1"/>
+          </a:effectRef>
+          <a:fontRef idx="minor">
+            <a:schemeClr val="lt1"/>
+          </a:fontRef>
+        </p:style>
+        <p:txBody>
+          <a:bodyPr rtlCol="0" anchor="ctr"/>
+          <a:lstStyle/>
+          <a:p>
+            <a:pPr algn="ctr"/>
+          </a:p>
+        </p:txBody>
+      </p:sp>
+      <p:sp>
+        <p:nvSpPr>
+          <p:cNvPr id="10" name="TextBox 9"/>
+          <p:cNvSpPr txBox="1"/>
+          <p:nvPr/>
+        </p:nvSpPr>
+        <p:spPr>
+          <a:xfrm>
+            <a:off x="5806440" y="2011680"/>
+            <a:ext cx="5715000" cy="530352"/>
+          </a:xfrm>
+          <a:prstGeom prst="rect">
+            <a:avLst/>
+          </a:prstGeom>
+          <a:noFill/>
+        </p:spPr>
+        <p:txBody>
+          <a:bodyPr wrap="square" lIns="0" rIns="0" tIns="0" bIns="0" anchor="ctr">
+            <a:spAutoFit/>
+          </a:bodyPr>
+          <a:lstStyle/>
+          <a:p>
+            <a:pPr algn="l"/>
+            <a:r>
+              <a:rPr sz="1500" b="0" i="0">
+                <a:solidFill>
+                  <a:srgbClr val="11233E"/>
+                </a:solidFill>
+                <a:latin typeface="Calibri"/>
+              </a:rPr>
+              <a:t>address object named by its hostname, carrying all of its NSX tags</a:t>
+            </a:r>
+          </a:p>
+        </p:txBody>
+      </p:sp>
+      <p:sp>
+        <p:nvSpPr>
+          <p:cNvPr id="11" name="Rounded Rectangle 10"/>
+          <p:cNvSpPr/>
+          <p:nvPr/>
+        </p:nvSpPr>
+        <p:spPr>
+          <a:xfrm>
+            <a:off x="548640" y="2651760"/>
+            <a:ext cx="4206240" cy="530352"/>
+          </a:xfrm>
+          <a:prstGeom prst="roundRect">
+            <a:avLst>
+              <a:gd name="adj" fmla="val 8333"/>
+            </a:avLst>
+          </a:prstGeom>
+          <a:solidFill>
+            <a:srgbClr val="F2F6FA"/>
+          </a:solidFill>
+          <a:ln w="12700">
+            <a:solidFill>
+              <a:srgbClr val="F2F6FA"/>
+            </a:solidFill>
+          </a:ln>
+          <a:effectLst/>
+        </p:spPr>
+        <p:style>
+          <a:lnRef idx="1">
+            <a:schemeClr val="accent1"/>
+          </a:lnRef>
+          <a:fillRef idx="3">
+            <a:schemeClr val="accent1"/>
+          </a:fillRef>
+          <a:effectRef idx="2">
+            <a:schemeClr val="accent1"/>
+          </a:effectRef>
+          <a:fontRef idx="minor">
+            <a:schemeClr val="lt1"/>
+          </a:fontRef>
+        </p:style>
+        <p:txBody>
+          <a:bodyPr rtlCol="0" anchor="ctr"/>
+          <a:lstStyle/>
+          <a:p>
+            <a:pPr algn="ctr"/>
+          </a:p>
+        </p:txBody>
+      </p:sp>
+      <p:sp>
+        <p:nvSpPr>
+          <p:cNvPr id="12" name="TextBox 11"/>
+          <p:cNvSpPr txBox="1"/>
+          <p:nvPr/>
+        </p:nvSpPr>
+        <p:spPr>
+          <a:xfrm>
+            <a:off x="731520" y="2651760"/>
+            <a:ext cx="3931920" cy="530352"/>
+          </a:xfrm>
+          <a:prstGeom prst="rect">
+            <a:avLst/>
+          </a:prstGeom>
+          <a:noFill/>
+        </p:spPr>
+        <p:txBody>
+          <a:bodyPr wrap="square" lIns="0" rIns="0" tIns="0" bIns="0" anchor="ctr">
+            <a:spAutoFit/>
+          </a:bodyPr>
+          <a:lstStyle/>
+          <a:p>
+            <a:pPr algn="l"/>
+            <a:r>
+              <a:rPr sz="1500" b="1" i="0">
+                <a:solidFill>
+                  <a:srgbClr val="11233E"/>
+                </a:solidFill>
+                <a:latin typeface="Calibri"/>
+              </a:rPr>
+              <a:t>IP address entry</a:t>
+            </a:r>
+          </a:p>
+        </p:txBody>
+      </p:sp>
+      <p:cxnSp>
+        <p:nvCxnSpPr>
+          <p:cNvPr id="13" name="Connector 12"/>
+          <p:cNvCxnSpPr/>
+          <p:nvPr/>
+        </p:nvCxnSpPr>
+        <p:spPr>
+          <a:xfrm>
+            <a:off x="4846320" y="2916936"/>
+            <a:ext cx="685800" cy="0"/>
+          </a:xfrm>
+          <a:prstGeom prst="line">
+            <a:avLst/>
+          </a:prstGeom>
+          <a:ln w="25400">
+            <a:solidFill>
+              <a:srgbClr val="27965B"/>
+            </a:solidFill>
+            <a:tailEnd type="triangle"/>
+          </a:ln>
+        </p:spPr>
+        <p:style>
+          <a:lnRef idx="2">
+            <a:schemeClr val="accent1"/>
+          </a:lnRef>
+          <a:fillRef idx="0">
+            <a:schemeClr val="accent1"/>
+          </a:fillRef>
+          <a:effectRef idx="1">
+            <a:schemeClr val="accent1"/>
+          </a:effectRef>
+          <a:fontRef idx="minor">
+            <a:schemeClr val="tx1"/>
+          </a:fontRef>
+        </p:style>
+      </p:cxnSp>
+      <p:sp>
+        <p:nvSpPr>
+          <p:cNvPr id="14" name="Rounded Rectangle 13"/>
+          <p:cNvSpPr/>
+          <p:nvPr/>
+        </p:nvSpPr>
+        <p:spPr>
+          <a:xfrm>
+            <a:off x="5623560" y="2651760"/>
+            <a:ext cx="5989320" cy="530352"/>
+          </a:xfrm>
+          <a:prstGeom prst="roundRect">
+            <a:avLst>
+              <a:gd name="adj" fmla="val 8333"/>
+            </a:avLst>
+          </a:prstGeom>
+          <a:solidFill>
+            <a:srgbClr val="EAF5EE"/>
+          </a:solidFill>
+          <a:ln w="12700">
+            <a:solidFill>
+              <a:srgbClr val="EAF5EE"/>
+            </a:solidFill>
+          </a:ln>
+          <a:effectLst/>
+        </p:spPr>
+        <p:style>
+          <a:lnRef idx="1">
+            <a:schemeClr val="accent1"/>
+          </a:lnRef>
+          <a:fillRef idx="3">
+            <a:schemeClr val="accent1"/>
+          </a:fillRef>
+          <a:effectRef idx="2">
+            <a:schemeClr val="accent1"/>
+          </a:effectRef>
+          <a:fontRef idx="minor">
+            <a:schemeClr val="lt1"/>
+          </a:fontRef>
+        </p:style>
+        <p:txBody>
+          <a:bodyPr rtlCol="0" anchor="ctr"/>
+          <a:lstStyle/>
+          <a:p>
+            <a:pPr algn="ctr"/>
+          </a:p>
+        </p:txBody>
+      </p:sp>
+      <p:sp>
+        <p:nvSpPr>
+          <p:cNvPr id="15" name="TextBox 14"/>
+          <p:cNvSpPr txBox="1"/>
+          <p:nvPr/>
+        </p:nvSpPr>
+        <p:spPr>
+          <a:xfrm>
+            <a:off x="5806440" y="2651760"/>
+            <a:ext cx="5715000" cy="530352"/>
+          </a:xfrm>
+          <a:prstGeom prst="rect">
+            <a:avLst/>
+          </a:prstGeom>
+          <a:noFill/>
+        </p:spPr>
+        <p:txBody>
+          <a:bodyPr wrap="square" lIns="0" rIns="0" tIns="0" bIns="0" anchor="ctr">
+            <a:spAutoFit/>
+          </a:bodyPr>
+          <a:lstStyle/>
+          <a:p>
+            <a:pPr algn="l"/>
+            <a:r>
+              <a:rPr sz="1500" b="0" i="0">
+                <a:solidFill>
+                  <a:srgbClr val="11233E"/>
+                </a:solidFill>
+                <a:latin typeface="Calibri"/>
+              </a:rPr>
+              <a:t>address object named by the address: 10.6.0.50, 10.6.1.0_24</a:t>
+            </a:r>
+          </a:p>
+        </p:txBody>
+      </p:sp>
+      <p:sp>
+        <p:nvSpPr>
+          <p:cNvPr id="16" name="Rounded Rectangle 15"/>
+          <p:cNvSpPr/>
+          <p:nvPr/>
+        </p:nvSpPr>
+        <p:spPr>
+          <a:xfrm>
+            <a:off x="548640" y="3291840"/>
+            <a:ext cx="4206240" cy="530352"/>
+          </a:xfrm>
+          <a:prstGeom prst="roundRect">
+            <a:avLst>
+              <a:gd name="adj" fmla="val 8333"/>
+            </a:avLst>
+          </a:prstGeom>
+          <a:solidFill>
+            <a:srgbClr val="F2F6FA"/>
+          </a:solidFill>
+          <a:ln w="12700">
+            <a:solidFill>
+              <a:srgbClr val="F2F6FA"/>
+            </a:solidFill>
+          </a:ln>
+          <a:effectLst/>
+        </p:spPr>
+        <p:style>
+          <a:lnRef idx="1">
+            <a:schemeClr val="accent1"/>
+          </a:lnRef>
+          <a:fillRef idx="3">
+            <a:schemeClr val="accent1"/>
+          </a:fillRef>
+          <a:effectRef idx="2">
+            <a:schemeClr val="accent1"/>
+          </a:effectRef>
+          <a:fontRef idx="minor">
+            <a:schemeClr val="lt1"/>
+          </a:fontRef>
+        </p:style>
+        <p:txBody>
+          <a:bodyPr rtlCol="0" anchor="ctr"/>
+          <a:lstStyle/>
+          <a:p>
+            <a:pPr algn="ctr"/>
+          </a:p>
+        </p:txBody>
+      </p:sp>
+      <p:sp>
+        <p:nvSpPr>
+          <p:cNvPr id="17" name="TextBox 16"/>
+          <p:cNvSpPr txBox="1"/>
+          <p:nvPr/>
+        </p:nvSpPr>
+        <p:spPr>
+          <a:xfrm>
+            <a:off x="731520" y="3291840"/>
+            <a:ext cx="3931920" cy="530352"/>
+          </a:xfrm>
+          <a:prstGeom prst="rect">
+            <a:avLst/>
+          </a:prstGeom>
+          <a:noFill/>
+        </p:spPr>
+        <p:txBody>
+          <a:bodyPr wrap="square" lIns="0" rIns="0" tIns="0" bIns="0" anchor="ctr">
+            <a:spAutoFit/>
+          </a:bodyPr>
+          <a:lstStyle/>
+          <a:p>
+            <a:pPr algn="l"/>
+            <a:r>
+              <a:rPr sz="1500" b="1" i="0">
+                <a:solidFill>
+                  <a:srgbClr val="11233E"/>
+                </a:solidFill>
+                <a:latin typeface="Calibri"/>
+              </a:rPr>
+              <a:t>Tag  scope | value</a:t>
+            </a:r>
+          </a:p>
+        </p:txBody>
+      </p:sp>
+      <p:cxnSp>
+        <p:nvCxnSpPr>
+          <p:cNvPr id="18" name="Connector 17"/>
+          <p:cNvCxnSpPr/>
+          <p:nvPr/>
+        </p:nvCxnSpPr>
+        <p:spPr>
+          <a:xfrm>
+            <a:off x="4846320" y="3557016"/>
+            <a:ext cx="685800" cy="0"/>
+          </a:xfrm>
+          <a:prstGeom prst="line">
+            <a:avLst/>
+          </a:prstGeom>
+          <a:ln w="25400">
+            <a:solidFill>
+              <a:srgbClr val="27965B"/>
+            </a:solidFill>
+            <a:tailEnd type="triangle"/>
+          </a:ln>
+        </p:spPr>
+        <p:style>
+          <a:lnRef idx="2">
+            <a:schemeClr val="accent1"/>
+          </a:lnRef>
+          <a:fillRef idx="0">
+            <a:schemeClr val="accent1"/>
+          </a:fillRef>
+          <a:effectRef idx="1">
+            <a:schemeClr val="accent1"/>
+          </a:effectRef>
+          <a:fontRef idx="minor">
+            <a:schemeClr val="tx1"/>
+          </a:fontRef>
+        </p:style>
+      </p:cxnSp>
+      <p:sp>
+        <p:nvSpPr>
+          <p:cNvPr id="19" name="Rounded Rectangle 18"/>
+          <p:cNvSpPr/>
+          <p:nvPr/>
+        </p:nvSpPr>
+        <p:spPr>
+          <a:xfrm>
+            <a:off x="5623560" y="3291840"/>
+            <a:ext cx="5989320" cy="530352"/>
+          </a:xfrm>
+          <a:prstGeom prst="roundRect">
+            <a:avLst>
+              <a:gd name="adj" fmla="val 8333"/>
+            </a:avLst>
+          </a:prstGeom>
+          <a:solidFill>
+            <a:srgbClr val="EAF5EE"/>
+          </a:solidFill>
+          <a:ln w="12700">
+            <a:solidFill>
+              <a:srgbClr val="EAF5EE"/>
+            </a:solidFill>
+          </a:ln>
+          <a:effectLst/>
+        </p:spPr>
+        <p:style>
+          <a:lnRef idx="1">
+            <a:schemeClr val="accent1"/>
+          </a:lnRef>
+          <a:fillRef idx="3">
+            <a:schemeClr val="accent1"/>
+          </a:fillRef>
+          <a:effectRef idx="2">
+            <a:schemeClr val="accent1"/>
+          </a:effectRef>
+          <a:fontRef idx="minor">
+            <a:schemeClr val="lt1"/>
+          </a:fontRef>
+        </p:style>
+        <p:txBody>
+          <a:bodyPr rtlCol="0" anchor="ctr"/>
+          <a:lstStyle/>
+          <a:p>
+            <a:pPr algn="ctr"/>
+          </a:p>
+        </p:txBody>
+      </p:sp>
+      <p:sp>
+        <p:nvSpPr>
+          <p:cNvPr id="20" name="TextBox 19"/>
+          <p:cNvSpPr txBox="1"/>
+          <p:nvPr/>
+        </p:nvSpPr>
+        <p:spPr>
+          <a:xfrm>
+            <a:off x="5806440" y="3291840"/>
+            <a:ext cx="5715000" cy="530352"/>
+          </a:xfrm>
+          <a:prstGeom prst="rect">
+            <a:avLst/>
+          </a:prstGeom>
+          <a:noFill/>
+        </p:spPr>
+        <p:txBody>
+          <a:bodyPr wrap="square" lIns="0" rIns="0" tIns="0" bIns="0" anchor="ctr">
+            <a:spAutoFit/>
+          </a:bodyPr>
+          <a:lstStyle/>
+          <a:p>
+            <a:pPr algn="l"/>
+            <a:r>
+              <a:rPr sz="1500" b="0" i="0">
+                <a:solidFill>
+                  <a:srgbClr val="11233E"/>
+                </a:solidFill>
+                <a:latin typeface="Calibri"/>
+              </a:rPr>
+              <a:t>tag  scope.value  (for example network.10.6.0.0)</a:t>
+            </a:r>
+          </a:p>
+        </p:txBody>
+      </p:sp>
+      <p:sp>
+        <p:nvSpPr>
+          <p:cNvPr id="21" name="Rounded Rectangle 20"/>
+          <p:cNvSpPr/>
+          <p:nvPr/>
+        </p:nvSpPr>
+        <p:spPr>
+          <a:xfrm>
+            <a:off x="548640" y="3931920"/>
+            <a:ext cx="4206240" cy="530352"/>
+          </a:xfrm>
+          <a:prstGeom prst="roundRect">
+            <a:avLst>
+              <a:gd name="adj" fmla="val 8333"/>
+            </a:avLst>
+          </a:prstGeom>
+          <a:solidFill>
+            <a:srgbClr val="F2F6FA"/>
+          </a:solidFill>
+          <a:ln w="12700">
+            <a:solidFill>
+              <a:srgbClr val="F2F6FA"/>
+            </a:solidFill>
+          </a:ln>
+          <a:effectLst/>
+        </p:spPr>
+        <p:style>
+          <a:lnRef idx="1">
+            <a:schemeClr val="accent1"/>
+          </a:lnRef>
+          <a:fillRef idx="3">
+            <a:schemeClr val="accent1"/>
+          </a:fillRef>
+          <a:effectRef idx="2">
+            <a:schemeClr val="accent1"/>
+          </a:effectRef>
+          <a:fontRef idx="minor">
+            <a:schemeClr val="lt1"/>
+          </a:fontRef>
+        </p:style>
+        <p:txBody>
+          <a:bodyPr rtlCol="0" anchor="ctr"/>
+          <a:lstStyle/>
+          <a:p>
+            <a:pPr algn="ctr"/>
+          </a:p>
+        </p:txBody>
+      </p:sp>
+      <p:sp>
+        <p:nvSpPr>
+          <p:cNvPr id="22" name="TextBox 21"/>
+          <p:cNvSpPr txBox="1"/>
+          <p:nvPr/>
+        </p:nvSpPr>
+        <p:spPr>
+          <a:xfrm>
+            <a:off x="731520" y="3931920"/>
+            <a:ext cx="3931920" cy="530352"/>
+          </a:xfrm>
+          <a:prstGeom prst="rect">
+            <a:avLst/>
+          </a:prstGeom>
+          <a:noFill/>
+        </p:spPr>
+        <p:txBody>
+          <a:bodyPr wrap="square" lIns="0" rIns="0" tIns="0" bIns="0" anchor="ctr">
+            <a:spAutoFit/>
+          </a:bodyPr>
+          <a:lstStyle/>
+          <a:p>
+            <a:pPr algn="l"/>
+            <a:r>
+              <a:rPr sz="1500" b="1" i="0">
+                <a:solidFill>
+                  <a:srgbClr val="11233E"/>
+                </a:solidFill>
+                <a:latin typeface="Calibri"/>
+              </a:rPr>
+              <a:t>Tag group, AND / OR</a:t>
+            </a:r>
+          </a:p>
+        </p:txBody>
+      </p:sp>
+      <p:cxnSp>
+        <p:nvCxnSpPr>
+          <p:cNvPr id="23" name="Connector 22"/>
+          <p:cNvCxnSpPr/>
+          <p:nvPr/>
+        </p:nvCxnSpPr>
+        <p:spPr>
+          <a:xfrm>
+            <a:off x="4846320" y="4197096"/>
+            <a:ext cx="685800" cy="0"/>
+          </a:xfrm>
+          <a:prstGeom prst="line">
+            <a:avLst/>
+          </a:prstGeom>
+          <a:ln w="25400">
+            <a:solidFill>
+              <a:srgbClr val="27965B"/>
+            </a:solidFill>
+            <a:tailEnd type="triangle"/>
+          </a:ln>
+        </p:spPr>
+        <p:style>
+          <a:lnRef idx="2">
+            <a:schemeClr val="accent1"/>
+          </a:lnRef>
+          <a:fillRef idx="0">
+            <a:schemeClr val="accent1"/>
+          </a:fillRef>
+          <a:effectRef idx="1">
+            <a:schemeClr val="accent1"/>
+          </a:effectRef>
+          <a:fontRef idx="minor">
+            <a:schemeClr val="tx1"/>
+          </a:fontRef>
+        </p:style>
+      </p:cxnSp>
+      <p:sp>
+        <p:nvSpPr>
+          <p:cNvPr id="24" name="Rounded Rectangle 23"/>
+          <p:cNvSpPr/>
+          <p:nvPr/>
+        </p:nvSpPr>
+        <p:spPr>
+          <a:xfrm>
+            <a:off x="5623560" y="3931920"/>
+            <a:ext cx="5989320" cy="530352"/>
+          </a:xfrm>
+          <a:prstGeom prst="roundRect">
+            <a:avLst>
+              <a:gd name="adj" fmla="val 8333"/>
+            </a:avLst>
+          </a:prstGeom>
+          <a:solidFill>
+            <a:srgbClr val="EAF5EE"/>
+          </a:solidFill>
+          <a:ln w="12700">
+            <a:solidFill>
+              <a:srgbClr val="EAF5EE"/>
+            </a:solidFill>
+          </a:ln>
+          <a:effectLst/>
+        </p:spPr>
+        <p:style>
+          <a:lnRef idx="1">
+            <a:schemeClr val="accent1"/>
+          </a:lnRef>
+          <a:fillRef idx="3">
+            <a:schemeClr val="accent1"/>
+          </a:fillRef>
+          <a:effectRef idx="2">
+            <a:schemeClr val="accent1"/>
+          </a:effectRef>
+          <a:fontRef idx="minor">
+            <a:schemeClr val="lt1"/>
+          </a:fontRef>
+        </p:style>
+        <p:txBody>
+          <a:bodyPr rtlCol="0" anchor="ctr"/>
+          <a:lstStyle/>
+          <a:p>
+            <a:pPr algn="ctr"/>
+          </a:p>
+        </p:txBody>
+      </p:sp>
+      <p:sp>
+        <p:nvSpPr>
+          <p:cNvPr id="25" name="TextBox 24"/>
+          <p:cNvSpPr txBox="1"/>
+          <p:nvPr/>
+        </p:nvSpPr>
+        <p:spPr>
+          <a:xfrm>
+            <a:off x="5806440" y="3931920"/>
+            <a:ext cx="5715000" cy="530352"/>
+          </a:xfrm>
+          <a:prstGeom prst="rect">
+            <a:avLst/>
+          </a:prstGeom>
+          <a:noFill/>
+        </p:spPr>
+        <p:txBody>
+          <a:bodyPr wrap="square" lIns="0" rIns="0" tIns="0" bIns="0" anchor="ctr">
+            <a:spAutoFit/>
+          </a:bodyPr>
+          <a:lstStyle/>
+          <a:p>
+            <a:pPr algn="l"/>
+            <a:r>
+              <a:rPr sz="1500" b="0" i="0">
+                <a:solidFill>
+                  <a:srgbClr val="11233E"/>
+                </a:solidFill>
+                <a:latin typeface="Calibri"/>
+              </a:rPr>
+              <a:t>dynamic address group with the same name and the same filter</a:t>
+            </a:r>
+          </a:p>
+        </p:txBody>
+      </p:sp>
+      <p:sp>
+        <p:nvSpPr>
+          <p:cNvPr id="26" name="Rounded Rectangle 25"/>
+          <p:cNvSpPr/>
+          <p:nvPr/>
+        </p:nvSpPr>
+        <p:spPr>
+          <a:xfrm>
+            <a:off x="548640" y="4572000"/>
+            <a:ext cx="4206240" cy="530352"/>
+          </a:xfrm>
+          <a:prstGeom prst="roundRect">
+            <a:avLst>
+              <a:gd name="adj" fmla="val 8333"/>
+            </a:avLst>
+          </a:prstGeom>
+          <a:solidFill>
+            <a:srgbClr val="F2F6FA"/>
+          </a:solidFill>
+          <a:ln w="12700">
+            <a:solidFill>
+              <a:srgbClr val="F2F6FA"/>
+            </a:solidFill>
+          </a:ln>
+          <a:effectLst/>
+        </p:spPr>
+        <p:style>
+          <a:lnRef idx="1">
+            <a:schemeClr val="accent1"/>
+          </a:lnRef>
+          <a:fillRef idx="3">
+            <a:schemeClr val="accent1"/>
+          </a:fillRef>
+          <a:effectRef idx="2">
+            <a:schemeClr val="accent1"/>
+          </a:effectRef>
+          <a:fontRef idx="minor">
+            <a:schemeClr val="lt1"/>
+          </a:fontRef>
+        </p:style>
+        <p:txBody>
+          <a:bodyPr rtlCol="0" anchor="ctr"/>
+          <a:lstStyle/>
+          <a:p>
+            <a:pPr algn="ctr"/>
+          </a:p>
+        </p:txBody>
+      </p:sp>
+      <p:sp>
+        <p:nvSpPr>
+          <p:cNvPr id="27" name="TextBox 26"/>
+          <p:cNvSpPr txBox="1"/>
+          <p:nvPr/>
+        </p:nvSpPr>
+        <p:spPr>
+          <a:xfrm>
+            <a:off x="731520" y="4572000"/>
+            <a:ext cx="3931920" cy="530352"/>
+          </a:xfrm>
+          <a:prstGeom prst="rect">
+            <a:avLst/>
+          </a:prstGeom>
+          <a:noFill/>
+        </p:spPr>
+        <p:txBody>
+          <a:bodyPr wrap="square" lIns="0" rIns="0" tIns="0" bIns="0" anchor="ctr">
+            <a:spAutoFit/>
+          </a:bodyPr>
+          <a:lstStyle/>
+          <a:p>
+            <a:pPr algn="l"/>
+            <a:r>
+              <a:rPr sz="1500" b="1" i="0">
+                <a:solidFill>
+                  <a:srgbClr val="11233E"/>
+                </a:solidFill>
+                <a:latin typeface="Calibri"/>
+              </a:rPr>
+              <a:t>IP group, sibling group</a:t>
+            </a:r>
+          </a:p>
+        </p:txBody>
+      </p:sp>
+      <p:cxnSp>
+        <p:nvCxnSpPr>
+          <p:cNvPr id="28" name="Connector 27"/>
+          <p:cNvCxnSpPr/>
+          <p:nvPr/>
+        </p:nvCxnSpPr>
+        <p:spPr>
+          <a:xfrm>
+            <a:off x="4846320" y="4837176"/>
+            <a:ext cx="685800" cy="0"/>
+          </a:xfrm>
+          <a:prstGeom prst="line">
+            <a:avLst/>
+          </a:prstGeom>
+          <a:ln w="25400">
+            <a:solidFill>
+              <a:srgbClr val="27965B"/>
+            </a:solidFill>
+            <a:tailEnd type="triangle"/>
+          </a:ln>
+        </p:spPr>
+        <p:style>
+          <a:lnRef idx="2">
+            <a:schemeClr val="accent1"/>
+          </a:lnRef>
+          <a:fillRef idx="0">
+            <a:schemeClr val="accent1"/>
+          </a:fillRef>
+          <a:effectRef idx="1">
+            <a:schemeClr val="accent1"/>
+          </a:effectRef>
+          <a:fontRef idx="minor">
+            <a:schemeClr val="tx1"/>
+          </a:fontRef>
+        </p:style>
+      </p:cxnSp>
+      <p:sp>
+        <p:nvSpPr>
+          <p:cNvPr id="29" name="Rounded Rectangle 28"/>
+          <p:cNvSpPr/>
+          <p:nvPr/>
+        </p:nvSpPr>
+        <p:spPr>
+          <a:xfrm>
+            <a:off x="5623560" y="4572000"/>
+            <a:ext cx="5989320" cy="530352"/>
+          </a:xfrm>
+          <a:prstGeom prst="roundRect">
+            <a:avLst>
+              <a:gd name="adj" fmla="val 8333"/>
+            </a:avLst>
+          </a:prstGeom>
+          <a:solidFill>
+            <a:srgbClr val="EAF5EE"/>
+          </a:solidFill>
+          <a:ln w="12700">
+            <a:solidFill>
+              <a:srgbClr val="EAF5EE"/>
+            </a:solidFill>
+          </a:ln>
+          <a:effectLst/>
+        </p:spPr>
+        <p:style>
+          <a:lnRef idx="1">
+            <a:schemeClr val="accent1"/>
+          </a:lnRef>
+          <a:fillRef idx="3">
+            <a:schemeClr val="accent1"/>
+          </a:fillRef>
+          <a:effectRef idx="2">
+            <a:schemeClr val="accent1"/>
+          </a:effectRef>
+          <a:fontRef idx="minor">
+            <a:schemeClr val="lt1"/>
+          </a:fontRef>
+        </p:style>
+        <p:txBody>
+          <a:bodyPr rtlCol="0" anchor="ctr"/>
+          <a:lstStyle/>
+          <a:p>
+            <a:pPr algn="ctr"/>
+          </a:p>
+        </p:txBody>
+      </p:sp>
+      <p:sp>
+        <p:nvSpPr>
+          <p:cNvPr id="30" name="TextBox 29"/>
+          <p:cNvSpPr txBox="1"/>
+          <p:nvPr/>
+        </p:nvSpPr>
+        <p:spPr>
+          <a:xfrm>
+            <a:off x="5806440" y="4572000"/>
+            <a:ext cx="5715000" cy="530352"/>
+          </a:xfrm>
+          <a:prstGeom prst="rect">
+            <a:avLst/>
+          </a:prstGeom>
+          <a:noFill/>
+        </p:spPr>
+        <p:txBody>
+          <a:bodyPr wrap="square" lIns="0" rIns="0" tIns="0" bIns="0" anchor="ctr">
+            <a:spAutoFit/>
+          </a:bodyPr>
+          <a:lstStyle/>
+          <a:p>
+            <a:pPr algn="l"/>
+            <a:r>
+              <a:rPr sz="1500" b="0" i="0">
+                <a:solidFill>
+                  <a:srgbClr val="11233E"/>
+                </a:solidFill>
+                <a:latin typeface="Calibri"/>
+              </a:rPr>
+              <a:t>static address group of those address objects</a:t>
+            </a:r>
+          </a:p>
+        </p:txBody>
+      </p:sp>
+      <p:sp>
+        <p:nvSpPr>
+          <p:cNvPr id="31" name="Rounded Rectangle 30"/>
+          <p:cNvSpPr/>
+          <p:nvPr/>
+        </p:nvSpPr>
+        <p:spPr>
+          <a:xfrm>
+            <a:off x="548640" y="5212080"/>
+            <a:ext cx="4206240" cy="530352"/>
+          </a:xfrm>
+          <a:prstGeom prst="roundRect">
+            <a:avLst>
+              <a:gd name="adj" fmla="val 8333"/>
+            </a:avLst>
+          </a:prstGeom>
+          <a:solidFill>
+            <a:srgbClr val="F2F6FA"/>
+          </a:solidFill>
+          <a:ln w="12700">
+            <a:solidFill>
+              <a:srgbClr val="F2F6FA"/>
+            </a:solidFill>
+          </a:ln>
+          <a:effectLst/>
+        </p:spPr>
+        <p:style>
+          <a:lnRef idx="1">
+            <a:schemeClr val="accent1"/>
+          </a:lnRef>
+          <a:fillRef idx="3">
+            <a:schemeClr val="accent1"/>
+          </a:fillRef>
+          <a:effectRef idx="2">
+            <a:schemeClr val="accent1"/>
+          </a:effectRef>
+          <a:fontRef idx="minor">
+            <a:schemeClr val="lt1"/>
+          </a:fontRef>
+        </p:style>
+        <p:txBody>
+          <a:bodyPr rtlCol="0" anchor="ctr"/>
+          <a:lstStyle/>
+          <a:p>
+            <a:pPr algn="ctr"/>
+          </a:p>
+        </p:txBody>
+      </p:sp>
+      <p:sp>
+        <p:nvSpPr>
+          <p:cNvPr id="32" name="TextBox 31"/>
+          <p:cNvSpPr txBox="1"/>
+          <p:nvPr/>
+        </p:nvSpPr>
+        <p:spPr>
+          <a:xfrm>
+            <a:off x="731520" y="5212080"/>
+            <a:ext cx="3931920" cy="530352"/>
+          </a:xfrm>
+          <a:prstGeom prst="rect">
+            <a:avLst/>
+          </a:prstGeom>
+          <a:noFill/>
+        </p:spPr>
+        <p:txBody>
+          <a:bodyPr wrap="square" lIns="0" rIns="0" tIns="0" bIns="0" anchor="ctr">
+            <a:spAutoFit/>
+          </a:bodyPr>
+          <a:lstStyle/>
+          <a:p>
+            <a:pPr algn="l"/>
+            <a:r>
+              <a:rPr sz="1500" b="1" i="0">
+                <a:solidFill>
+                  <a:srgbClr val="11233E"/>
+                </a:solidFill>
+                <a:latin typeface="Calibri"/>
+              </a:rPr>
+              <a:t>Group of groups</a:t>
+            </a:r>
+          </a:p>
+        </p:txBody>
+      </p:sp>
+      <p:cxnSp>
+        <p:nvCxnSpPr>
+          <p:cNvPr id="33" name="Connector 32"/>
+          <p:cNvCxnSpPr/>
+          <p:nvPr/>
+        </p:nvCxnSpPr>
+        <p:spPr>
+          <a:xfrm>
+            <a:off x="4846320" y="5477256"/>
+            <a:ext cx="685800" cy="0"/>
+          </a:xfrm>
+          <a:prstGeom prst="line">
+            <a:avLst/>
+          </a:prstGeom>
+          <a:ln w="25400">
+            <a:solidFill>
+              <a:srgbClr val="27965B"/>
+            </a:solidFill>
+            <a:tailEnd type="triangle"/>
+          </a:ln>
+        </p:spPr>
+        <p:style>
+          <a:lnRef idx="2">
+            <a:schemeClr val="accent1"/>
+          </a:lnRef>
+          <a:fillRef idx="0">
+            <a:schemeClr val="accent1"/>
+          </a:fillRef>
+          <a:effectRef idx="1">
+            <a:schemeClr val="accent1"/>
+          </a:effectRef>
+          <a:fontRef idx="minor">
+            <a:schemeClr val="tx1"/>
+          </a:fontRef>
+        </p:style>
+      </p:cxnSp>
+      <p:sp>
+        <p:nvSpPr>
+          <p:cNvPr id="34" name="Rounded Rectangle 33"/>
+          <p:cNvSpPr/>
+          <p:nvPr/>
+        </p:nvSpPr>
+        <p:spPr>
+          <a:xfrm>
+            <a:off x="5623560" y="5212080"/>
+            <a:ext cx="5989320" cy="530352"/>
+          </a:xfrm>
+          <a:prstGeom prst="roundRect">
+            <a:avLst>
+              <a:gd name="adj" fmla="val 8333"/>
+            </a:avLst>
+          </a:prstGeom>
+          <a:solidFill>
+            <a:srgbClr val="EAF5EE"/>
+          </a:solidFill>
+          <a:ln w="12700">
+            <a:solidFill>
+              <a:srgbClr val="EAF5EE"/>
+            </a:solidFill>
+          </a:ln>
+          <a:effectLst/>
+        </p:spPr>
+        <p:style>
+          <a:lnRef idx="1">
+            <a:schemeClr val="accent1"/>
+          </a:lnRef>
+          <a:fillRef idx="3">
+            <a:schemeClr val="accent1"/>
+          </a:fillRef>
+          <a:effectRef idx="2">
+            <a:schemeClr val="accent1"/>
+          </a:effectRef>
+          <a:fontRef idx="minor">
+            <a:schemeClr val="lt1"/>
+          </a:fontRef>
+        </p:style>
+        <p:txBody>
+          <a:bodyPr rtlCol="0" anchor="ctr"/>
+          <a:lstStyle/>
+          <a:p>
+            <a:pPr algn="ctr"/>
+          </a:p>
+        </p:txBody>
+      </p:sp>
+      <p:sp>
+        <p:nvSpPr>
+          <p:cNvPr id="35" name="TextBox 34"/>
+          <p:cNvSpPr txBox="1"/>
+          <p:nvPr/>
+        </p:nvSpPr>
+        <p:spPr>
+          <a:xfrm>
+            <a:off x="5806440" y="5212080"/>
+            <a:ext cx="5715000" cy="530352"/>
+          </a:xfrm>
+          <a:prstGeom prst="rect">
+            <a:avLst/>
+          </a:prstGeom>
+          <a:noFill/>
+        </p:spPr>
+        <p:txBody>
+          <a:bodyPr wrap="square" lIns="0" rIns="0" tIns="0" bIns="0" anchor="ctr">
+            <a:spAutoFit/>
+          </a:bodyPr>
+          <a:lstStyle/>
+          <a:p>
+            <a:pPr algn="l"/>
+            <a:r>
+              <a:rPr sz="1500" b="0" i="0">
+                <a:solidFill>
+                  <a:srgbClr val="11233E"/>
+                </a:solidFill>
+                <a:latin typeface="Calibri"/>
+              </a:rPr>
+              <a:t>static address group of those groups</a:t>
+            </a:r>
+          </a:p>
+        </p:txBody>
+      </p:sp>
+      <p:sp>
+        <p:nvSpPr>
+          <p:cNvPr id="36" name="TextBox 35"/>
+          <p:cNvSpPr txBox="1"/>
+          <p:nvPr/>
+        </p:nvSpPr>
+        <p:spPr>
+          <a:xfrm>
+            <a:off x="548640" y="5897880"/>
+            <a:ext cx="11064240" cy="411480"/>
+          </a:xfrm>
+          <a:prstGeom prst="rect">
+            <a:avLst/>
+          </a:prstGeom>
+          <a:noFill/>
+        </p:spPr>
+        <p:txBody>
+          <a:bodyPr wrap="square" lIns="0" rIns="0" tIns="0" bIns="0" anchor="t">
+            <a:spAutoFit/>
+          </a:bodyPr>
+          <a:lstStyle/>
+          <a:p>
+            <a:pPr algn="l"/>
+            <a:r>
+              <a:rPr sz="1300" b="0" i="1">
+                <a:solidFill>
+                  <a:srgbClr val="5C6C7E"/>
+                </a:solidFill>
+                <a:latin typeface="Calibri"/>
+              </a:rPr>
+              <a:t>A group mixing tags and addresses becomes a static group holding a helper dynamic group &lt;name&gt;-tags. Segment and non-tag conditions are reported, not mirrored.</a:t>
+            </a:r>
+          </a:p>
+        </p:txBody>
+      </p:sp>
+      <p:sp>
+        <p:nvSpPr>
+          <p:cNvPr id="37" name="TextBox 36"/>
+          <p:cNvSpPr txBox="1"/>
+          <p:nvPr/>
+        </p:nvSpPr>
+        <p:spPr>
+          <a:xfrm>
+            <a:off x="548640" y="6400800"/>
+            <a:ext cx="5486400" cy="274320"/>
+          </a:xfrm>
+          <a:prstGeom prst="rect">
+            <a:avLst/>
+          </a:prstGeom>
+          <a:noFill/>
+        </p:spPr>
+        <p:txBody>
+          <a:bodyPr wrap="square" lIns="0" rIns="0" tIns="0" bIns="0" anchor="ctr">
+            <a:spAutoFit/>
+          </a:bodyPr>
+          <a:lstStyle/>
+          <a:p>
+            <a:pPr algn="l"/>
+            <a:r>
+              <a:rPr sz="1000" b="0" i="0">
+                <a:solidFill>
+                  <a:srgbClr val="5C6C7E"/>
+                </a:solidFill>
+                <a:latin typeface="Calibri"/>
+              </a:rPr>
+              <a:t>NSX + Palo Alto migration workflow  •  9/12</a:t>
+            </a:r>
+          </a:p>
+        </p:txBody>
+      </p:sp>
+    </p:spTree>
+  </p:cSld>
+  <p:clrMapOvr>
+    <a:masterClrMapping/>
+  </p:clrMapOvr>
+</p:sld>
+</file>
+
+<file path=ppt/slides/slide11.xml><?xml version="1.0" encoding="utf-8"?>
+<p:sld xmlns:a="http://schemas.openxmlformats.org/drawingml/2006/main" xmlns:p="http://schemas.openxmlformats.org/presentationml/2006/main" xmlns:r="http://schemas.openxmlformats.org/officeDocument/2006/relationships">
+  <p:cSld>
+    <p:bg>
+      <p:bgPr>
+        <a:solidFill>
+          <a:srgbClr val="FFFFFF"/>
+        </a:solidFill>
+        <a:effectLst/>
+      </p:bgPr>
+    </p:bg>
+    <p:spTree>
+      <p:nvGrpSpPr>
+        <p:cNvPr id="1" name=""/>
+        <p:cNvGrpSpPr/>
+        <p:nvPr/>
+      </p:nvGrpSpPr>
+      <p:grpSpPr/>
+      <p:sp>
+        <p:nvSpPr>
+          <p:cNvPr id="2" name="TextBox 1"/>
+          <p:cNvSpPr txBox="1"/>
+          <p:nvPr/>
+        </p:nvSpPr>
+        <p:spPr>
+          <a:xfrm>
+            <a:off x="548640" y="365760"/>
+            <a:ext cx="11064240" cy="731520"/>
+          </a:xfrm>
+          <a:prstGeom prst="rect">
+            <a:avLst/>
+          </a:prstGeom>
+          <a:noFill/>
+        </p:spPr>
+        <p:txBody>
+          <a:bodyPr wrap="square" lIns="0" rIns="0" tIns="0" bIns="0" anchor="t">
+            <a:spAutoFit/>
+          </a:bodyPr>
+          <a:lstStyle/>
+          <a:p>
+            <a:pPr algn="l"/>
+            <a:r>
+              <a:rPr sz="3600" b="1" i="0">
+                <a:solidFill>
+                  <a:srgbClr val="11233E"/>
+                </a:solidFill>
+                <a:latin typeface="Calibri"/>
+              </a:rPr>
+              <a:t>First live Panorama push</a:t>
+            </a:r>
+          </a:p>
+        </p:txBody>
+      </p:sp>
+      <p:sp>
+        <p:nvSpPr>
+          <p:cNvPr id="3" name="TextBox 2"/>
+          <p:cNvSpPr txBox="1"/>
+          <p:nvPr/>
+        </p:nvSpPr>
+        <p:spPr>
+          <a:xfrm>
+            <a:off x="548640" y="1051560"/>
+            <a:ext cx="11064240" cy="411480"/>
+          </a:xfrm>
+          <a:prstGeom prst="rect">
+            <a:avLst/>
+          </a:prstGeom>
+          <a:noFill/>
+        </p:spPr>
+        <p:txBody>
+          <a:bodyPr wrap="square" lIns="0" rIns="0" tIns="0" bIns="0" anchor="t">
+            <a:spAutoFit/>
+          </a:bodyPr>
+          <a:lstStyle/>
+          <a:p>
+            <a:pPr algn="l"/>
+            <a:r>
+              <a:rPr sz="1700" b="0" i="0">
+                <a:solidFill>
+                  <a:srgbClr val="5C6C7E"/>
+                </a:solidFill>
+                <a:latin typeface="Calibri"/>
+              </a:rPr>
+              <a:t>pano4, device group dg-5, 2026-10-05: four NSX groups, one of each kind</a:t>
+            </a:r>
+          </a:p>
+        </p:txBody>
+      </p:sp>
+      <p:sp>
+        <p:nvSpPr>
+          <p:cNvPr id="4" name="Rounded Rectangle 3"/>
+          <p:cNvSpPr/>
+          <p:nvPr/>
+        </p:nvSpPr>
+        <p:spPr>
+          <a:xfrm>
+            <a:off x="548640" y="1828800"/>
+            <a:ext cx="2606040" cy="2514600"/>
+          </a:xfrm>
+          <a:prstGeom prst="roundRect">
+            <a:avLst>
+              <a:gd name="adj" fmla="val 8333"/>
+            </a:avLst>
+          </a:prstGeom>
+          <a:solidFill>
+            <a:srgbClr val="F2F6FA"/>
+          </a:solidFill>
+          <a:ln w="12700">
+            <a:solidFill>
+              <a:srgbClr val="F2F6FA"/>
+            </a:solidFill>
+          </a:ln>
+          <a:effectLst/>
+        </p:spPr>
+        <p:style>
+          <a:lnRef idx="1">
+            <a:schemeClr val="accent1"/>
+          </a:lnRef>
+          <a:fillRef idx="3">
+            <a:schemeClr val="accent1"/>
+          </a:fillRef>
+          <a:effectRef idx="2">
+            <a:schemeClr val="accent1"/>
+          </a:effectRef>
+          <a:fontRef idx="minor">
+            <a:schemeClr val="lt1"/>
+          </a:fontRef>
+        </p:style>
+        <p:txBody>
+          <a:bodyPr rtlCol="0" anchor="ctr"/>
+          <a:lstStyle/>
+          <a:p>
+            <a:pPr algn="ctr"/>
+          </a:p>
+        </p:txBody>
+      </p:sp>
+      <p:sp>
+        <p:nvSpPr>
+          <p:cNvPr id="5" name="TextBox 4"/>
+          <p:cNvSpPr txBox="1"/>
+          <p:nvPr/>
+        </p:nvSpPr>
+        <p:spPr>
+          <a:xfrm>
+            <a:off x="548640" y="2011680"/>
+            <a:ext cx="2606040" cy="1143000"/>
+          </a:xfrm>
+          <a:prstGeom prst="rect">
+            <a:avLst/>
+          </a:prstGeom>
+          <a:noFill/>
+        </p:spPr>
+        <p:txBody>
+          <a:bodyPr wrap="square" lIns="0" rIns="0" tIns="0" bIns="0" anchor="ctr">
+            <a:spAutoFit/>
+          </a:bodyPr>
+          <a:lstStyle/>
+          <a:p>
+            <a:pPr algn="ctr"/>
+            <a:r>
+              <a:rPr sz="6000" b="1" i="0">
+                <a:solidFill>
+                  <a:srgbClr val="216FBD"/>
+                </a:solidFill>
+                <a:latin typeface="Calibri"/>
+              </a:rPr>
+              <a:t>24</a:t>
+            </a:r>
+          </a:p>
+        </p:txBody>
+      </p:sp>
+      <p:sp>
+        <p:nvSpPr>
+          <p:cNvPr id="6" name="TextBox 5"/>
+          <p:cNvSpPr txBox="1"/>
+          <p:nvPr/>
+        </p:nvSpPr>
+        <p:spPr>
+          <a:xfrm>
+            <a:off x="731520" y="3291840"/>
+            <a:ext cx="2240280" cy="914400"/>
+          </a:xfrm>
+          <a:prstGeom prst="rect">
+            <a:avLst/>
+          </a:prstGeom>
+          <a:noFill/>
+        </p:spPr>
+        <p:txBody>
+          <a:bodyPr wrap="square" lIns="0" rIns="0" tIns="0" bIns="0" anchor="ctr">
+            <a:spAutoFit/>
+          </a:bodyPr>
+          <a:lstStyle/>
+          <a:p>
+            <a:pPr algn="ctr"/>
+            <a:r>
+              <a:rPr sz="1700" b="1" i="0">
+                <a:solidFill>
+                  <a:srgbClr val="11233E"/>
+                </a:solidFill>
+                <a:latin typeface="Calibri"/>
+              </a:rPr>
+              <a:t>objects created</a:t>
+            </a:r>
+          </a:p>
+          <a:p>
+            <a:pPr algn="ctr"/>
+            <a:r>
+              <a:rPr sz="1400" b="0" i="0">
+                <a:solidFill>
+                  <a:srgbClr val="5C6C7E"/>
+                </a:solidFill>
+                <a:latin typeface="Calibri"/>
+              </a:rPr>
+              <a:t>5 tags · 13 addresses · 6 groups</a:t>
+            </a:r>
+          </a:p>
+        </p:txBody>
+      </p:sp>
+      <p:sp>
+        <p:nvSpPr>
+          <p:cNvPr id="7" name="Rounded Rectangle 6"/>
+          <p:cNvSpPr/>
+          <p:nvPr/>
+        </p:nvSpPr>
+        <p:spPr>
+          <a:xfrm>
+            <a:off x="3383280" y="1828800"/>
+            <a:ext cx="2606040" cy="2514600"/>
+          </a:xfrm>
+          <a:prstGeom prst="roundRect">
+            <a:avLst>
+              <a:gd name="adj" fmla="val 8333"/>
+            </a:avLst>
+          </a:prstGeom>
+          <a:solidFill>
+            <a:srgbClr val="F2F6FA"/>
+          </a:solidFill>
+          <a:ln w="12700">
+            <a:solidFill>
+              <a:srgbClr val="F2F6FA"/>
+            </a:solidFill>
+          </a:ln>
+          <a:effectLst/>
+        </p:spPr>
+        <p:style>
+          <a:lnRef idx="1">
+            <a:schemeClr val="accent1"/>
+          </a:lnRef>
+          <a:fillRef idx="3">
+            <a:schemeClr val="accent1"/>
+          </a:fillRef>
+          <a:effectRef idx="2">
+            <a:schemeClr val="accent1"/>
+          </a:effectRef>
+          <a:fontRef idx="minor">
+            <a:schemeClr val="lt1"/>
+          </a:fontRef>
+        </p:style>
+        <p:txBody>
+          <a:bodyPr rtlCol="0" anchor="ctr"/>
+          <a:lstStyle/>
+          <a:p>
+            <a:pPr algn="ctr"/>
+          </a:p>
+        </p:txBody>
+      </p:sp>
+      <p:sp>
+        <p:nvSpPr>
+          <p:cNvPr id="8" name="TextBox 7"/>
+          <p:cNvSpPr txBox="1"/>
+          <p:nvPr/>
+        </p:nvSpPr>
+        <p:spPr>
+          <a:xfrm>
+            <a:off x="3383280" y="2011680"/>
+            <a:ext cx="2606040" cy="1143000"/>
+          </a:xfrm>
+          <a:prstGeom prst="rect">
+            <a:avLst/>
+          </a:prstGeom>
+          <a:noFill/>
+        </p:spPr>
+        <p:txBody>
+          <a:bodyPr wrap="square" lIns="0" rIns="0" tIns="0" bIns="0" anchor="ctr">
+            <a:spAutoFit/>
+          </a:bodyPr>
+          <a:lstStyle/>
+          <a:p>
+            <a:pPr algn="ctr"/>
+            <a:r>
+              <a:rPr sz="6000" b="1" i="0">
+                <a:solidFill>
+                  <a:srgbClr val="27965B"/>
+                </a:solidFill>
+                <a:latin typeface="Calibri"/>
+              </a:rPr>
+              <a:t>24 / 24</a:t>
+            </a:r>
+          </a:p>
+        </p:txBody>
+      </p:sp>
+      <p:sp>
+        <p:nvSpPr>
+          <p:cNvPr id="9" name="TextBox 8"/>
+          <p:cNvSpPr txBox="1"/>
+          <p:nvPr/>
+        </p:nvSpPr>
+        <p:spPr>
+          <a:xfrm>
+            <a:off x="3566160" y="3291840"/>
+            <a:ext cx="2240280" cy="914400"/>
+          </a:xfrm>
+          <a:prstGeom prst="rect">
+            <a:avLst/>
+          </a:prstGeom>
+          <a:noFill/>
+        </p:spPr>
+        <p:txBody>
+          <a:bodyPr wrap="square" lIns="0" rIns="0" tIns="0" bIns="0" anchor="ctr">
+            <a:spAutoFit/>
+          </a:bodyPr>
+          <a:lstStyle/>
+          <a:p>
+            <a:pPr algn="ctr"/>
+            <a:r>
+              <a:rPr sz="1700" b="1" i="0">
+                <a:solidFill>
+                  <a:srgbClr val="11233E"/>
+                </a:solidFill>
+                <a:latin typeface="Calibri"/>
+              </a:rPr>
+              <a:t>read back exactly</a:t>
+            </a:r>
+          </a:p>
+          <a:p>
+            <a:pPr algn="ctr"/>
+            <a:r>
+              <a:rPr sz="1400" b="0" i="0">
+                <a:solidFill>
+                  <a:srgbClr val="5C6C7E"/>
+                </a:solidFill>
+                <a:latin typeface="Calibri"/>
+              </a:rPr>
+              <a:t>field by field against the plan</a:t>
+            </a:r>
+          </a:p>
+        </p:txBody>
+      </p:sp>
+      <p:sp>
+        <p:nvSpPr>
+          <p:cNvPr id="10" name="Rounded Rectangle 9"/>
+          <p:cNvSpPr/>
+          <p:nvPr/>
+        </p:nvSpPr>
+        <p:spPr>
+          <a:xfrm>
+            <a:off x="6217920" y="1828800"/>
+            <a:ext cx="2606040" cy="2514600"/>
+          </a:xfrm>
+          <a:prstGeom prst="roundRect">
+            <a:avLst>
+              <a:gd name="adj" fmla="val 8333"/>
+            </a:avLst>
+          </a:prstGeom>
+          <a:solidFill>
+            <a:srgbClr val="F2F6FA"/>
+          </a:solidFill>
+          <a:ln w="12700">
+            <a:solidFill>
+              <a:srgbClr val="F2F6FA"/>
+            </a:solidFill>
+          </a:ln>
+          <a:effectLst/>
+        </p:spPr>
+        <p:style>
+          <a:lnRef idx="1">
+            <a:schemeClr val="accent1"/>
+          </a:lnRef>
+          <a:fillRef idx="3">
+            <a:schemeClr val="accent1"/>
+          </a:fillRef>
+          <a:effectRef idx="2">
+            <a:schemeClr val="accent1"/>
+          </a:effectRef>
+          <a:fontRef idx="minor">
+            <a:schemeClr val="lt1"/>
+          </a:fontRef>
+        </p:style>
+        <p:txBody>
+          <a:bodyPr rtlCol="0" anchor="ctr"/>
+          <a:lstStyle/>
+          <a:p>
+            <a:pPr algn="ctr"/>
+          </a:p>
+        </p:txBody>
+      </p:sp>
+      <p:sp>
+        <p:nvSpPr>
+          <p:cNvPr id="11" name="TextBox 10"/>
+          <p:cNvSpPr txBox="1"/>
+          <p:nvPr/>
+        </p:nvSpPr>
+        <p:spPr>
+          <a:xfrm>
+            <a:off x="6217920" y="2011680"/>
+            <a:ext cx="2606040" cy="1143000"/>
+          </a:xfrm>
+          <a:prstGeom prst="rect">
+            <a:avLst/>
+          </a:prstGeom>
+          <a:noFill/>
+        </p:spPr>
+        <p:txBody>
+          <a:bodyPr wrap="square" lIns="0" rIns="0" tIns="0" bIns="0" anchor="ctr">
+            <a:spAutoFit/>
+          </a:bodyPr>
+          <a:lstStyle/>
+          <a:p>
+            <a:pPr algn="ctr"/>
+            <a:r>
+              <a:rPr sz="6000" b="1" i="0">
+                <a:solidFill>
+                  <a:srgbClr val="EB852D"/>
+                </a:solidFill>
+                <a:latin typeface="Calibri"/>
+              </a:rPr>
+              <a:t>0</a:t>
+            </a:r>
+          </a:p>
+        </p:txBody>
+      </p:sp>
+      <p:sp>
+        <p:nvSpPr>
+          <p:cNvPr id="12" name="TextBox 11"/>
+          <p:cNvSpPr txBox="1"/>
+          <p:nvPr/>
+        </p:nvSpPr>
+        <p:spPr>
+          <a:xfrm>
+            <a:off x="6400800" y="3291840"/>
+            <a:ext cx="2240280" cy="914400"/>
+          </a:xfrm>
+          <a:prstGeom prst="rect">
+            <a:avLst/>
+          </a:prstGeom>
+          <a:noFill/>
+        </p:spPr>
+        <p:txBody>
+          <a:bodyPr wrap="square" lIns="0" rIns="0" tIns="0" bIns="0" anchor="ctr">
+            <a:spAutoFit/>
+          </a:bodyPr>
+          <a:lstStyle/>
+          <a:p>
+            <a:pPr algn="ctr"/>
+            <a:r>
+              <a:rPr sz="1700" b="1" i="0">
+                <a:solidFill>
+                  <a:srgbClr val="11233E"/>
+                </a:solidFill>
+                <a:latin typeface="Calibri"/>
+              </a:rPr>
+              <a:t>committed</a:t>
+            </a:r>
+          </a:p>
+          <a:p>
+            <a:pPr algn="ctr"/>
+            <a:r>
+              <a:rPr sz="1400" b="0" i="0">
+                <a:solidFill>
+                  <a:srgbClr val="5C6C7E"/>
+                </a:solidFill>
+                <a:latin typeface="Calibri"/>
+              </a:rPr>
+              <a:t>candidate config only</a:t>
+            </a:r>
+          </a:p>
+        </p:txBody>
+      </p:sp>
+      <p:sp>
+        <p:nvSpPr>
+          <p:cNvPr id="13" name="Rounded Rectangle 12"/>
+          <p:cNvSpPr/>
+          <p:nvPr/>
+        </p:nvSpPr>
+        <p:spPr>
+          <a:xfrm>
+            <a:off x="9052560" y="1828800"/>
+            <a:ext cx="2606040" cy="2514600"/>
+          </a:xfrm>
+          <a:prstGeom prst="roundRect">
+            <a:avLst>
+              <a:gd name="adj" fmla="val 8333"/>
+            </a:avLst>
+          </a:prstGeom>
+          <a:solidFill>
+            <a:srgbClr val="F2F6FA"/>
+          </a:solidFill>
+          <a:ln w="12700">
+            <a:solidFill>
+              <a:srgbClr val="F2F6FA"/>
+            </a:solidFill>
+          </a:ln>
+          <a:effectLst/>
+        </p:spPr>
+        <p:style>
+          <a:lnRef idx="1">
+            <a:schemeClr val="accent1"/>
+          </a:lnRef>
+          <a:fillRef idx="3">
+            <a:schemeClr val="accent1"/>
+          </a:fillRef>
+          <a:effectRef idx="2">
+            <a:schemeClr val="accent1"/>
+          </a:effectRef>
+          <a:fontRef idx="minor">
+            <a:schemeClr val="lt1"/>
+          </a:fontRef>
+        </p:style>
+        <p:txBody>
+          <a:bodyPr rtlCol="0" anchor="ctr"/>
+          <a:lstStyle/>
+          <a:p>
+            <a:pPr algn="ctr"/>
+          </a:p>
+        </p:txBody>
+      </p:sp>
+      <p:sp>
+        <p:nvSpPr>
+          <p:cNvPr id="14" name="TextBox 13"/>
+          <p:cNvSpPr txBox="1"/>
+          <p:nvPr/>
+        </p:nvSpPr>
+        <p:spPr>
+          <a:xfrm>
+            <a:off x="9052560" y="2011680"/>
+            <a:ext cx="2606040" cy="1143000"/>
+          </a:xfrm>
+          <a:prstGeom prst="rect">
+            <a:avLst/>
+          </a:prstGeom>
+          <a:noFill/>
+        </p:spPr>
+        <p:txBody>
+          <a:bodyPr wrap="square" lIns="0" rIns="0" tIns="0" bIns="0" anchor="ctr">
+            <a:spAutoFit/>
+          </a:bodyPr>
+          <a:lstStyle/>
+          <a:p>
+            <a:pPr algn="ctr"/>
+            <a:r>
+              <a:rPr sz="6000" b="1" i="0">
+                <a:solidFill>
+                  <a:srgbClr val="009691"/>
+                </a:solidFill>
+                <a:latin typeface="Calibri"/>
+              </a:rPr>
+              <a:t>444</a:t>
+            </a:r>
+          </a:p>
+        </p:txBody>
+      </p:sp>
+      <p:sp>
+        <p:nvSpPr>
+          <p:cNvPr id="15" name="TextBox 14"/>
+          <p:cNvSpPr txBox="1"/>
+          <p:nvPr/>
+        </p:nvSpPr>
+        <p:spPr>
+          <a:xfrm>
+            <a:off x="9235440" y="3291840"/>
+            <a:ext cx="2240280" cy="914400"/>
+          </a:xfrm>
+          <a:prstGeom prst="rect">
+            <a:avLst/>
+          </a:prstGeom>
+          <a:noFill/>
+        </p:spPr>
+        <p:txBody>
+          <a:bodyPr wrap="square" lIns="0" rIns="0" tIns="0" bIns="0" anchor="ctr">
+            <a:spAutoFit/>
+          </a:bodyPr>
+          <a:lstStyle/>
+          <a:p>
+            <a:pPr algn="ctr"/>
+            <a:r>
+              <a:rPr sz="1700" b="1" i="0">
+                <a:solidFill>
+                  <a:srgbClr val="11233E"/>
+                </a:solidFill>
+                <a:latin typeface="Calibri"/>
+              </a:rPr>
+              <a:t>automated tests</a:t>
+            </a:r>
+          </a:p>
+          <a:p>
+            <a:pPr algn="ctr"/>
+            <a:r>
+              <a:rPr sz="1400" b="0" i="0">
+                <a:solidFill>
+                  <a:srgbClr val="5C6C7E"/>
+                </a:solidFill>
+                <a:latin typeface="Calibri"/>
+              </a:rPr>
+              <a:t>18 of them for the mirror</a:t>
+            </a:r>
+          </a:p>
+        </p:txBody>
+      </p:sp>
+      <p:sp>
+        <p:nvSpPr>
+          <p:cNvPr id="16" name="TextBox 15"/>
+          <p:cNvSpPr txBox="1"/>
+          <p:nvPr/>
+        </p:nvSpPr>
+        <p:spPr>
+          <a:xfrm>
+            <a:off x="548640" y="4800600"/>
+            <a:ext cx="11064240" cy="822960"/>
+          </a:xfrm>
+          <a:prstGeom prst="rect">
+            <a:avLst/>
+          </a:prstGeom>
+          <a:noFill/>
+        </p:spPr>
+        <p:txBody>
+          <a:bodyPr wrap="square" lIns="0" rIns="0" tIns="0" bIns="0" anchor="t">
+            <a:spAutoFit/>
+          </a:bodyPr>
+          <a:lstStyle/>
+          <a:p>
+            <a:pPr algn="l"/>
+            <a:r>
+              <a:rPr sz="1500" b="0" i="1">
+                <a:solidFill>
+                  <a:srgbClr val="5C6C7E"/>
+                </a:solidFill>
+                <a:latin typeface="Calibri"/>
+              </a:rPr>
+              <a:t>Before it: hostname tags added to 9 VMs (3 on lm1, all 6 on lm3) and asl_id on the 6 lm3 VMs; every VM must carry a hostname tag. The agent account writes through REST only; the XML API is not used.</a:t>
+            </a:r>
+          </a:p>
+        </p:txBody>
+      </p:sp>
+      <p:sp>
+        <p:nvSpPr>
+          <p:cNvPr id="17" name="TextBox 16"/>
+          <p:cNvSpPr txBox="1"/>
+          <p:nvPr/>
+        </p:nvSpPr>
+        <p:spPr>
+          <a:xfrm>
+            <a:off x="548640" y="6400800"/>
+            <a:ext cx="5486400" cy="274320"/>
+          </a:xfrm>
+          <a:prstGeom prst="rect">
+            <a:avLst/>
+          </a:prstGeom>
+          <a:noFill/>
+        </p:spPr>
+        <p:txBody>
+          <a:bodyPr wrap="square" lIns="0" rIns="0" tIns="0" bIns="0" anchor="ctr">
+            <a:spAutoFit/>
+          </a:bodyPr>
+          <a:lstStyle/>
+          <a:p>
+            <a:pPr algn="l"/>
+            <a:r>
+              <a:rPr sz="1000" b="0" i="0">
+                <a:solidFill>
+                  <a:srgbClr val="5C6C7E"/>
+                </a:solidFill>
+                <a:latin typeface="Calibri"/>
+              </a:rPr>
+              <a:t>NSX + Palo Alto migration workflow  •  10/12</a:t>
+            </a:r>
+          </a:p>
+        </p:txBody>
+      </p:sp>
+    </p:spTree>
+  </p:cSld>
+  <p:clrMapOvr>
+    <a:masterClrMapping/>
+  </p:clrMapOvr>
+</p:sld>
+</file>
+
+<file path=ppt/slides/slide12.xml><?xml version="1.0" encoding="utf-8"?>
+<p:sld xmlns:a="http://schemas.openxmlformats.org/drawingml/2006/main" xmlns:p="http://schemas.openxmlformats.org/presentationml/2006/main" xmlns:r="http://schemas.openxmlformats.org/officeDocument/2006/relationships">
+  <p:cSld>
+    <p:bg>
+      <p:bgPr>
+        <a:solidFill>
+          <a:srgbClr val="FFFFFF"/>
+        </a:solidFill>
+        <a:effectLst/>
+      </p:bgPr>
+    </p:bg>
+    <p:spTree>
+      <p:nvGrpSpPr>
+        <p:cNvPr id="1" name=""/>
+        <p:cNvGrpSpPr/>
+        <p:nvPr/>
+      </p:nvGrpSpPr>
+      <p:grpSpPr/>
+      <p:sp>
+        <p:nvSpPr>
+          <p:cNvPr id="2" name="TextBox 1"/>
+          <p:cNvSpPr txBox="1"/>
+          <p:nvPr/>
+        </p:nvSpPr>
+        <p:spPr>
+          <a:xfrm>
+            <a:off x="548640" y="365760"/>
+            <a:ext cx="11064240" cy="731520"/>
+          </a:xfrm>
+          <a:prstGeom prst="rect">
+            <a:avLst/>
+          </a:prstGeom>
+          <a:noFill/>
+        </p:spPr>
+        <p:txBody>
+          <a:bodyPr wrap="square" lIns="0" rIns="0" tIns="0" bIns="0" anchor="t">
+            <a:spAutoFit/>
+          </a:bodyPr>
+          <a:lstStyle/>
+          <a:p>
+            <a:pPr algn="l"/>
+            <a:r>
+              <a:rPr sz="3600" b="1" i="0">
+                <a:solidFill>
+                  <a:srgbClr val="11233E"/>
+                </a:solidFill>
+                <a:latin typeface="Calibri"/>
+              </a:rPr>
+              <a:t>Groundwork and fixes</a:t>
+            </a:r>
+          </a:p>
+        </p:txBody>
+      </p:sp>
+      <p:sp>
+        <p:nvSpPr>
+          <p:cNvPr id="3" name="TextBox 2"/>
+          <p:cNvSpPr txBox="1"/>
+          <p:nvPr/>
+        </p:nvSpPr>
+        <p:spPr>
+          <a:xfrm>
+            <a:off x="548640" y="1051560"/>
+            <a:ext cx="11064240" cy="411480"/>
+          </a:xfrm>
+          <a:prstGeom prst="rect">
+            <a:avLst/>
+          </a:prstGeom>
+          <a:noFill/>
+        </p:spPr>
+        <p:txBody>
+          <a:bodyPr wrap="square" lIns="0" rIns="0" tIns="0" bIns="0" anchor="t">
+            <a:spAutoFit/>
+          </a:bodyPr>
+          <a:lstStyle/>
+          <a:p>
+            <a:pPr algn="l"/>
+            <a:r>
+              <a:rPr sz="1700" b="0" i="0">
+                <a:solidFill>
+                  <a:srgbClr val="5C6C7E"/>
+                </a:solidFill>
+                <a:latin typeface="Calibri"/>
+              </a:rPr>
+              <a:t>Built along the way; existing scripts changed only where a defect was fixed</a:t>
+            </a:r>
+          </a:p>
+        </p:txBody>
+      </p:sp>
+      <p:sp>
+        <p:nvSpPr>
+          <p:cNvPr id="4" name="Rounded Rectangle 3"/>
+          <p:cNvSpPr/>
+          <p:nvPr/>
+        </p:nvSpPr>
+        <p:spPr>
+          <a:xfrm>
+            <a:off x="548640" y="1783080"/>
+            <a:ext cx="5440680" cy="1417320"/>
+          </a:xfrm>
+          <a:prstGeom prst="roundRect">
+            <a:avLst>
+              <a:gd name="adj" fmla="val 8333"/>
+            </a:avLst>
+          </a:prstGeom>
+          <a:solidFill>
+            <a:srgbClr val="F2F6FA"/>
+          </a:solidFill>
+          <a:ln w="12700">
+            <a:solidFill>
+              <a:srgbClr val="F2F6FA"/>
+            </a:solidFill>
+          </a:ln>
+          <a:effectLst/>
+        </p:spPr>
+        <p:style>
+          <a:lnRef idx="1">
+            <a:schemeClr val="accent1"/>
+          </a:lnRef>
+          <a:fillRef idx="3">
+            <a:schemeClr val="accent1"/>
+          </a:fillRef>
+          <a:effectRef idx="2">
+            <a:schemeClr val="accent1"/>
+          </a:effectRef>
+          <a:fontRef idx="minor">
+            <a:schemeClr val="lt1"/>
+          </a:fontRef>
+        </p:style>
+        <p:txBody>
+          <a:bodyPr rtlCol="0" anchor="ctr"/>
+          <a:lstStyle/>
+          <a:p>
+            <a:pPr algn="ctr"/>
+          </a:p>
+        </p:txBody>
+      </p:sp>
+      <p:sp>
+        <p:nvSpPr>
+          <p:cNvPr id="5" name="Oval 4"/>
+          <p:cNvSpPr/>
+          <p:nvPr/>
+        </p:nvSpPr>
+        <p:spPr>
+          <a:xfrm>
+            <a:off x="777240" y="2212848"/>
+            <a:ext cx="548640" cy="548640"/>
+          </a:xfrm>
+          <a:prstGeom prst="ellipse">
+            <a:avLst/>
+          </a:prstGeom>
+          <a:solidFill>
+            <a:srgbClr val="6B4FA8"/>
+          </a:solidFill>
+          <a:ln w="12700">
+            <a:solidFill>
+              <a:srgbClr val="6B4FA8"/>
+            </a:solidFill>
+          </a:ln>
+          <a:effectLst/>
+        </p:spPr>
+        <p:style>
+          <a:lnRef idx="1">
+            <a:schemeClr val="accent1"/>
+          </a:lnRef>
+          <a:fillRef idx="3">
+            <a:schemeClr val="accent1"/>
+          </a:fillRef>
+          <a:effectRef idx="2">
+            <a:schemeClr val="accent1"/>
+          </a:effectRef>
+          <a:fontRef idx="minor">
+            <a:schemeClr val="lt1"/>
+          </a:fontRef>
+        </p:style>
+        <p:txBody>
+          <a:bodyPr rtlCol="0" anchor="ctr"/>
+          <a:lstStyle/>
+          <a:p>
+            <a:pPr algn="ctr"/>
+          </a:p>
+        </p:txBody>
+      </p:sp>
+      <p:sp>
+        <p:nvSpPr>
+          <p:cNvPr id="6" name="TextBox 5"/>
+          <p:cNvSpPr txBox="1"/>
+          <p:nvPr/>
+        </p:nvSpPr>
+        <p:spPr>
+          <a:xfrm>
+            <a:off x="777240" y="2212848"/>
+            <a:ext cx="548640" cy="548640"/>
+          </a:xfrm>
+          <a:prstGeom prst="rect">
+            <a:avLst/>
+          </a:prstGeom>
+          <a:noFill/>
+        </p:spPr>
+        <p:txBody>
+          <a:bodyPr wrap="square" lIns="0" rIns="0" tIns="0" bIns="0" anchor="ctr">
+            <a:spAutoFit/>
+          </a:bodyPr>
+          <a:lstStyle/>
+          <a:p>
+            <a:pPr algn="ctr"/>
+            <a:r>
+              <a:rPr sz="2200" b="1" i="0">
+                <a:solidFill>
+                  <a:srgbClr val="FFFFFF"/>
+                </a:solidFill>
+                <a:latin typeface="Calibri"/>
+              </a:rPr>
+              <a:t>+</a:t>
+            </a:r>
+          </a:p>
+        </p:txBody>
+      </p:sp>
+      <p:sp>
+        <p:nvSpPr>
+          <p:cNvPr id="7" name="TextBox 6"/>
+          <p:cNvSpPr txBox="1"/>
+          <p:nvPr/>
+        </p:nvSpPr>
+        <p:spPr>
+          <a:xfrm>
+            <a:off x="1554480" y="1783080"/>
+            <a:ext cx="4297680" cy="1417320"/>
+          </a:xfrm>
+          <a:prstGeom prst="rect">
+            <a:avLst/>
+          </a:prstGeom>
+          <a:noFill/>
+        </p:spPr>
+        <p:txBody>
+          <a:bodyPr wrap="square" lIns="0" rIns="0" tIns="0" bIns="0" anchor="ctr">
+            <a:spAutoFit/>
+          </a:bodyPr>
+          <a:lstStyle/>
+          <a:p>
+            <a:pPr algn="l"/>
+            <a:r>
+              <a:rPr sz="1700" b="1" i="0">
+                <a:solidFill>
+                  <a:srgbClr val="11233E"/>
+                </a:solidFill>
+                <a:latin typeface="Calibri"/>
+              </a:rPr>
+              <a:t>Shared library: app/common</a:t>
+            </a:r>
+          </a:p>
+          <a:p>
+            <a:pPr algn="l"/>
+            <a:r>
+              <a:rPr sz="1400" b="0" i="0">
+                <a:solidFill>
+                  <a:srgbClr val="5C6C7E"/>
+                </a:solidFill>
+                <a:latin typeface="Calibri"/>
+              </a:rPr>
+              <a:t>File IO with atomic writes, paths, UTC time, logging, run folders, IP spans, subnet maps. Imports neither vendor.</a:t>
+            </a:r>
+          </a:p>
+        </p:txBody>
+      </p:sp>
+      <p:sp>
+        <p:nvSpPr>
+          <p:cNvPr id="8" name="Rounded Rectangle 7"/>
+          <p:cNvSpPr/>
+          <p:nvPr/>
+        </p:nvSpPr>
+        <p:spPr>
+          <a:xfrm>
+            <a:off x="6172200" y="1783080"/>
+            <a:ext cx="5440680" cy="1417320"/>
+          </a:xfrm>
+          <a:prstGeom prst="roundRect">
+            <a:avLst>
+              <a:gd name="adj" fmla="val 8333"/>
+            </a:avLst>
+          </a:prstGeom>
+          <a:solidFill>
+            <a:srgbClr val="F2F6FA"/>
+          </a:solidFill>
+          <a:ln w="12700">
+            <a:solidFill>
+              <a:srgbClr val="F2F6FA"/>
+            </a:solidFill>
+          </a:ln>
+          <a:effectLst/>
+        </p:spPr>
+        <p:style>
+          <a:lnRef idx="1">
+            <a:schemeClr val="accent1"/>
+          </a:lnRef>
+          <a:fillRef idx="3">
+            <a:schemeClr val="accent1"/>
+          </a:fillRef>
+          <a:effectRef idx="2">
+            <a:schemeClr val="accent1"/>
+          </a:effectRef>
+          <a:fontRef idx="minor">
+            <a:schemeClr val="lt1"/>
+          </a:fontRef>
+        </p:style>
+        <p:txBody>
+          <a:bodyPr rtlCol="0" anchor="ctr"/>
+          <a:lstStyle/>
+          <a:p>
+            <a:pPr algn="ctr"/>
+          </a:p>
+        </p:txBody>
+      </p:sp>
+      <p:sp>
+        <p:nvSpPr>
+          <p:cNvPr id="9" name="Oval 8"/>
+          <p:cNvSpPr/>
+          <p:nvPr/>
+        </p:nvSpPr>
+        <p:spPr>
+          <a:xfrm>
+            <a:off x="6400800" y="2212848"/>
+            <a:ext cx="548640" cy="548640"/>
+          </a:xfrm>
+          <a:prstGeom prst="ellipse">
+            <a:avLst/>
+          </a:prstGeom>
+          <a:solidFill>
+            <a:srgbClr val="216FBD"/>
+          </a:solidFill>
+          <a:ln w="12700">
+            <a:solidFill>
+              <a:srgbClr val="216FBD"/>
+            </a:solidFill>
+          </a:ln>
+          <a:effectLst/>
+        </p:spPr>
+        <p:style>
+          <a:lnRef idx="1">
+            <a:schemeClr val="accent1"/>
+          </a:lnRef>
+          <a:fillRef idx="3">
+            <a:schemeClr val="accent1"/>
+          </a:fillRef>
+          <a:effectRef idx="2">
+            <a:schemeClr val="accent1"/>
+          </a:effectRef>
+          <a:fontRef idx="minor">
+            <a:schemeClr val="lt1"/>
+          </a:fontRef>
+        </p:style>
+        <p:txBody>
+          <a:bodyPr rtlCol="0" anchor="ctr"/>
+          <a:lstStyle/>
+          <a:p>
+            <a:pPr algn="ctr"/>
+          </a:p>
+        </p:txBody>
+      </p:sp>
+      <p:sp>
+        <p:nvSpPr>
+          <p:cNvPr id="10" name="TextBox 9"/>
+          <p:cNvSpPr txBox="1"/>
+          <p:nvPr/>
+        </p:nvSpPr>
+        <p:spPr>
+          <a:xfrm>
+            <a:off x="6400800" y="2212848"/>
+            <a:ext cx="548640" cy="548640"/>
+          </a:xfrm>
+          <a:prstGeom prst="rect">
+            <a:avLst/>
+          </a:prstGeom>
+          <a:noFill/>
+        </p:spPr>
+        <p:txBody>
+          <a:bodyPr wrap="square" lIns="0" rIns="0" tIns="0" bIns="0" anchor="ctr">
+            <a:spAutoFit/>
+          </a:bodyPr>
+          <a:lstStyle/>
+          <a:p>
+            <a:pPr algn="ctr"/>
+            <a:r>
+              <a:rPr sz="2200" b="1" i="0">
+                <a:solidFill>
+                  <a:srgbClr val="FFFFFF"/>
+                </a:solidFill>
+                <a:latin typeface="Calibri"/>
+              </a:rPr>
+              <a:t>+</a:t>
+            </a:r>
+          </a:p>
+        </p:txBody>
+      </p:sp>
+      <p:sp>
+        <p:nvSpPr>
+          <p:cNvPr id="11" name="TextBox 10"/>
+          <p:cNvSpPr txBox="1"/>
+          <p:nvPr/>
+        </p:nvSpPr>
+        <p:spPr>
+          <a:xfrm>
+            <a:off x="7178040" y="1783080"/>
+            <a:ext cx="4297680" cy="1417320"/>
+          </a:xfrm>
+          <a:prstGeom prst="rect">
+            <a:avLst/>
+          </a:prstGeom>
+          <a:noFill/>
+        </p:spPr>
+        <p:txBody>
+          <a:bodyPr wrap="square" lIns="0" rIns="0" tIns="0" bIns="0" anchor="ctr">
+            <a:spAutoFit/>
+          </a:bodyPr>
+          <a:lstStyle/>
+          <a:p>
+            <a:pPr algn="l"/>
+            <a:r>
+              <a:rPr sz="1700" b="1" i="0">
+                <a:solidFill>
+                  <a:srgbClr val="11233E"/>
+                </a:solidFill>
+                <a:latin typeface="Calibri"/>
+              </a:rPr>
+              <a:t>nsx-lm5 and nsx-lm6</a:t>
+            </a:r>
+          </a:p>
+          <a:p>
+            <a:pPr algn="l"/>
+            <a:r>
+              <a:rPr sz="1400" b="0" i="0">
+                <a:solidFill>
+                  <a:srgbClr val="5C6C7E"/>
+                </a:solidFill>
+                <a:latin typeface="Calibri"/>
+              </a:rPr>
+              <a:t>Every tool accepts lm1 to lm6. Picking lm5 used to crash with a KeyError; a test now guards the lists.</a:t>
+            </a:r>
+          </a:p>
+        </p:txBody>
+      </p:sp>
+      <p:sp>
+        <p:nvSpPr>
+          <p:cNvPr id="12" name="Rounded Rectangle 11"/>
+          <p:cNvSpPr/>
+          <p:nvPr/>
+        </p:nvSpPr>
+        <p:spPr>
+          <a:xfrm>
+            <a:off x="548640" y="3429000"/>
+            <a:ext cx="5440680" cy="1417320"/>
+          </a:xfrm>
+          <a:prstGeom prst="roundRect">
+            <a:avLst>
+              <a:gd name="adj" fmla="val 8333"/>
+            </a:avLst>
+          </a:prstGeom>
+          <a:solidFill>
+            <a:srgbClr val="F2F6FA"/>
+          </a:solidFill>
+          <a:ln w="12700">
+            <a:solidFill>
+              <a:srgbClr val="F2F6FA"/>
+            </a:solidFill>
+          </a:ln>
+          <a:effectLst/>
+        </p:spPr>
+        <p:style>
+          <a:lnRef idx="1">
+            <a:schemeClr val="accent1"/>
+          </a:lnRef>
+          <a:fillRef idx="3">
+            <a:schemeClr val="accent1"/>
+          </a:fillRef>
+          <a:effectRef idx="2">
+            <a:schemeClr val="accent1"/>
+          </a:effectRef>
+          <a:fontRef idx="minor">
+            <a:schemeClr val="lt1"/>
+          </a:fontRef>
+        </p:style>
+        <p:txBody>
+          <a:bodyPr rtlCol="0" anchor="ctr"/>
+          <a:lstStyle/>
+          <a:p>
+            <a:pPr algn="ctr"/>
+          </a:p>
+        </p:txBody>
+      </p:sp>
+      <p:sp>
+        <p:nvSpPr>
+          <p:cNvPr id="13" name="Oval 12"/>
+          <p:cNvSpPr/>
+          <p:nvPr/>
+        </p:nvSpPr>
+        <p:spPr>
+          <a:xfrm>
+            <a:off x="777240" y="3858768"/>
+            <a:ext cx="548640" cy="548640"/>
+          </a:xfrm>
+          <a:prstGeom prst="ellipse">
+            <a:avLst/>
+          </a:prstGeom>
+          <a:solidFill>
+            <a:srgbClr val="27965B"/>
+          </a:solidFill>
+          <a:ln w="12700">
+            <a:solidFill>
+              <a:srgbClr val="27965B"/>
+            </a:solidFill>
+          </a:ln>
+          <a:effectLst/>
+        </p:spPr>
+        <p:style>
+          <a:lnRef idx="1">
+            <a:schemeClr val="accent1"/>
+          </a:lnRef>
+          <a:fillRef idx="3">
+            <a:schemeClr val="accent1"/>
+          </a:fillRef>
+          <a:effectRef idx="2">
+            <a:schemeClr val="accent1"/>
+          </a:effectRef>
+          <a:fontRef idx="minor">
+            <a:schemeClr val="lt1"/>
+          </a:fontRef>
+        </p:style>
+        <p:txBody>
+          <a:bodyPr rtlCol="0" anchor="ctr"/>
+          <a:lstStyle/>
+          <a:p>
+            <a:pPr algn="ctr"/>
+          </a:p>
+        </p:txBody>
+      </p:sp>
+      <p:sp>
+        <p:nvSpPr>
+          <p:cNvPr id="14" name="TextBox 13"/>
+          <p:cNvSpPr txBox="1"/>
+          <p:nvPr/>
+        </p:nvSpPr>
+        <p:spPr>
+          <a:xfrm>
+            <a:off x="777240" y="3858768"/>
+            <a:ext cx="548640" cy="548640"/>
+          </a:xfrm>
+          <a:prstGeom prst="rect">
+            <a:avLst/>
+          </a:prstGeom>
+          <a:noFill/>
+        </p:spPr>
+        <p:txBody>
+          <a:bodyPr wrap="square" lIns="0" rIns="0" tIns="0" bIns="0" anchor="ctr">
+            <a:spAutoFit/>
+          </a:bodyPr>
+          <a:lstStyle/>
+          <a:p>
+            <a:pPr algn="ctr"/>
+            <a:r>
+              <a:rPr sz="2200" b="1" i="0">
+                <a:solidFill>
+                  <a:srgbClr val="FFFFFF"/>
+                </a:solidFill>
+                <a:latin typeface="Calibri"/>
+              </a:rPr>
+              <a:t>✓</a:t>
+            </a:r>
+          </a:p>
+        </p:txBody>
+      </p:sp>
+      <p:sp>
+        <p:nvSpPr>
+          <p:cNvPr id="15" name="TextBox 14"/>
+          <p:cNvSpPr txBox="1"/>
+          <p:nvPr/>
+        </p:nvSpPr>
+        <p:spPr>
+          <a:xfrm>
+            <a:off x="1554480" y="3429000"/>
+            <a:ext cx="4297680" cy="1417320"/>
+          </a:xfrm>
+          <a:prstGeom prst="rect">
+            <a:avLst/>
+          </a:prstGeom>
+          <a:noFill/>
+        </p:spPr>
+        <p:txBody>
+          <a:bodyPr wrap="square" lIns="0" rIns="0" tIns="0" bIns="0" anchor="ctr">
+            <a:spAutoFit/>
+          </a:bodyPr>
+          <a:lstStyle/>
+          <a:p>
+            <a:pPr algn="l"/>
+            <a:r>
+              <a:rPr sz="1700" b="1" i="0">
+                <a:solidFill>
+                  <a:srgbClr val="11233E"/>
+                </a:solidFill>
+                <a:latin typeface="Calibri"/>
+              </a:rPr>
+              <a:t>UTC means UTC</a:t>
+            </a:r>
+          </a:p>
+          <a:p>
+            <a:pPr algn="l"/>
+            <a:r>
+              <a:rPr sz="1400" b="0" i="0">
+                <a:solidFill>
+                  <a:srgbClr val="5C6C7E"/>
+                </a:solidFill>
+                <a:latin typeface="Calibri"/>
+              </a:rPr>
+              <a:t>The Panorama add-services tool logged Central time labelled UTC. Fixed and proven in a non-UTC zone.</a:t>
+            </a:r>
+          </a:p>
+        </p:txBody>
+      </p:sp>
+      <p:sp>
+        <p:nvSpPr>
+          <p:cNvPr id="16" name="Rounded Rectangle 15"/>
+          <p:cNvSpPr/>
+          <p:nvPr/>
+        </p:nvSpPr>
+        <p:spPr>
+          <a:xfrm>
+            <a:off x="6172200" y="3429000"/>
+            <a:ext cx="5440680" cy="1417320"/>
+          </a:xfrm>
+          <a:prstGeom prst="roundRect">
+            <a:avLst>
+              <a:gd name="adj" fmla="val 8333"/>
+            </a:avLst>
+          </a:prstGeom>
+          <a:solidFill>
+            <a:srgbClr val="F2F6FA"/>
+          </a:solidFill>
+          <a:ln w="12700">
+            <a:solidFill>
+              <a:srgbClr val="F2F6FA"/>
+            </a:solidFill>
+          </a:ln>
+          <a:effectLst/>
+        </p:spPr>
+        <p:style>
+          <a:lnRef idx="1">
+            <a:schemeClr val="accent1"/>
+          </a:lnRef>
+          <a:fillRef idx="3">
+            <a:schemeClr val="accent1"/>
+          </a:fillRef>
+          <a:effectRef idx="2">
+            <a:schemeClr val="accent1"/>
+          </a:effectRef>
+          <a:fontRef idx="minor">
+            <a:schemeClr val="lt1"/>
+          </a:fontRef>
+        </p:style>
+        <p:txBody>
+          <a:bodyPr rtlCol="0" anchor="ctr"/>
+          <a:lstStyle/>
+          <a:p>
+            <a:pPr algn="ctr"/>
+          </a:p>
+        </p:txBody>
+      </p:sp>
+      <p:sp>
+        <p:nvSpPr>
+          <p:cNvPr id="17" name="Oval 16"/>
+          <p:cNvSpPr/>
+          <p:nvPr/>
+        </p:nvSpPr>
+        <p:spPr>
+          <a:xfrm>
+            <a:off x="6400800" y="3858768"/>
+            <a:ext cx="548640" cy="548640"/>
+          </a:xfrm>
+          <a:prstGeom prst="ellipse">
+            <a:avLst/>
+          </a:prstGeom>
+          <a:solidFill>
+            <a:srgbClr val="EB852D"/>
+          </a:solidFill>
+          <a:ln w="12700">
+            <a:solidFill>
+              <a:srgbClr val="EB852D"/>
+            </a:solidFill>
+          </a:ln>
+          <a:effectLst/>
+        </p:spPr>
+        <p:style>
+          <a:lnRef idx="1">
+            <a:schemeClr val="accent1"/>
+          </a:lnRef>
+          <a:fillRef idx="3">
+            <a:schemeClr val="accent1"/>
+          </a:fillRef>
+          <a:effectRef idx="2">
+            <a:schemeClr val="accent1"/>
+          </a:effectRef>
+          <a:fontRef idx="minor">
+            <a:schemeClr val="lt1"/>
+          </a:fontRef>
+        </p:style>
+        <p:txBody>
+          <a:bodyPr rtlCol="0" anchor="ctr"/>
+          <a:lstStyle/>
+          <a:p>
+            <a:pPr algn="ctr"/>
+          </a:p>
+        </p:txBody>
+      </p:sp>
+      <p:sp>
+        <p:nvSpPr>
+          <p:cNvPr id="18" name="TextBox 17"/>
+          <p:cNvSpPr txBox="1"/>
+          <p:nvPr/>
+        </p:nvSpPr>
+        <p:spPr>
+          <a:xfrm>
+            <a:off x="6400800" y="3858768"/>
+            <a:ext cx="548640" cy="548640"/>
+          </a:xfrm>
+          <a:prstGeom prst="rect">
+            <a:avLst/>
+          </a:prstGeom>
+          <a:noFill/>
+        </p:spPr>
+        <p:txBody>
+          <a:bodyPr wrap="square" lIns="0" rIns="0" tIns="0" bIns="0" anchor="ctr">
+            <a:spAutoFit/>
+          </a:bodyPr>
+          <a:lstStyle/>
+          <a:p>
+            <a:pPr algn="ctr"/>
+            <a:r>
+              <a:rPr sz="2200" b="1" i="0">
+                <a:solidFill>
+                  <a:srgbClr val="FFFFFF"/>
+                </a:solidFill>
+                <a:latin typeface="Calibri"/>
+              </a:rPr>
+              <a:t>✓</a:t>
+            </a:r>
+          </a:p>
+        </p:txBody>
+      </p:sp>
+      <p:sp>
+        <p:nvSpPr>
+          <p:cNvPr id="19" name="TextBox 18"/>
+          <p:cNvSpPr txBox="1"/>
+          <p:nvPr/>
+        </p:nvSpPr>
+        <p:spPr>
+          <a:xfrm>
+            <a:off x="7178040" y="3429000"/>
+            <a:ext cx="4297680" cy="1417320"/>
+          </a:xfrm>
+          <a:prstGeom prst="rect">
+            <a:avLst/>
+          </a:prstGeom>
+          <a:noFill/>
+        </p:spPr>
+        <p:txBody>
+          <a:bodyPr wrap="square" lIns="0" rIns="0" tIns="0" bIns="0" anchor="ctr">
+            <a:spAutoFit/>
+          </a:bodyPr>
+          <a:lstStyle/>
+          <a:p>
+            <a:pPr algn="l"/>
+            <a:r>
+              <a:rPr sz="1700" b="1" i="0">
+                <a:solidFill>
+                  <a:srgbClr val="11233E"/>
+                </a:solidFill>
+                <a:latin typeface="Calibri"/>
+              </a:rPr>
+              <a:t>Closed input stops</a:t>
+            </a:r>
+          </a:p>
+          <a:p>
+            <a:pPr algn="l"/>
+            <a:r>
+              <a:rPr sz="1400" b="0" i="0">
+                <a:solidFill>
+                  <a:srgbClr val="5C6C7E"/>
+                </a:solidFill>
+                <a:latin typeface="Calibri"/>
+              </a:rPr>
+              <a:t>VM-tag push and revert approved the next batch when input closed. Now they stop and still write the manifest.</a:t>
+            </a:r>
+          </a:p>
+        </p:txBody>
+      </p:sp>
+      <p:sp>
+        <p:nvSpPr>
+          <p:cNvPr id="20" name="Rounded Rectangle 19"/>
+          <p:cNvSpPr/>
+          <p:nvPr/>
+        </p:nvSpPr>
+        <p:spPr>
+          <a:xfrm>
+            <a:off x="548640" y="5074920"/>
+            <a:ext cx="11064240" cy="868680"/>
+          </a:xfrm>
+          <a:prstGeom prst="roundRect">
+            <a:avLst>
+              <a:gd name="adj" fmla="val 8333"/>
+            </a:avLst>
+          </a:prstGeom>
+          <a:solidFill>
+            <a:srgbClr val="E6F4F3"/>
+          </a:solidFill>
+          <a:ln w="12700">
+            <a:solidFill>
+              <a:srgbClr val="009691"/>
+            </a:solidFill>
+          </a:ln>
+          <a:effectLst/>
+        </p:spPr>
+        <p:style>
+          <a:lnRef idx="1">
+            <a:schemeClr val="accent1"/>
+          </a:lnRef>
+          <a:fillRef idx="3">
+            <a:schemeClr val="accent1"/>
+          </a:fillRef>
+          <a:effectRef idx="2">
+            <a:schemeClr val="accent1"/>
+          </a:effectRef>
+          <a:fontRef idx="minor">
+            <a:schemeClr val="lt1"/>
+          </a:fontRef>
+        </p:style>
+        <p:txBody>
+          <a:bodyPr rtlCol="0" anchor="ctr"/>
+          <a:lstStyle/>
+          <a:p>
+            <a:pPr algn="ctr"/>
+          </a:p>
+        </p:txBody>
+      </p:sp>
+      <p:sp>
+        <p:nvSpPr>
+          <p:cNvPr id="21" name="TextBox 20"/>
+          <p:cNvSpPr txBox="1"/>
+          <p:nvPr/>
+        </p:nvSpPr>
+        <p:spPr>
+          <a:xfrm>
+            <a:off x="731520" y="5074920"/>
+            <a:ext cx="10698480" cy="868680"/>
+          </a:xfrm>
+          <a:prstGeom prst="rect">
+            <a:avLst/>
+          </a:prstGeom>
+          <a:noFill/>
+        </p:spPr>
+        <p:txBody>
+          <a:bodyPr wrap="square" lIns="0" rIns="0" tIns="0" bIns="0" anchor="ctr">
+            <a:spAutoFit/>
+          </a:bodyPr>
+          <a:lstStyle/>
+          <a:p>
+            <a:pPr algn="l"/>
+            <a:r>
+              <a:rPr sz="1500" b="0" i="0">
+                <a:solidFill>
+                  <a:srgbClr val="11233E"/>
+                </a:solidFill>
+                <a:latin typeface="Calibri"/>
+              </a:rPr>
+              <a:t>Status and runbooks: docs/multivendor/STATUS.md and RUNBOOK_MULTIVENDOR_ROLLOUT (bash and PowerShell). All of this is uncommitted until reviewed.</a:t>
+            </a:r>
+          </a:p>
+        </p:txBody>
+      </p:sp>
+      <p:sp>
+        <p:nvSpPr>
+          <p:cNvPr id="22" name="TextBox 21"/>
+          <p:cNvSpPr txBox="1"/>
+          <p:nvPr/>
+        </p:nvSpPr>
+        <p:spPr>
+          <a:xfrm>
+            <a:off x="548640" y="6400800"/>
+            <a:ext cx="5486400" cy="274320"/>
+          </a:xfrm>
+          <a:prstGeom prst="rect">
+            <a:avLst/>
+          </a:prstGeom>
+          <a:noFill/>
+        </p:spPr>
+        <p:txBody>
+          <a:bodyPr wrap="square" lIns="0" rIns="0" tIns="0" bIns="0" anchor="ctr">
+            <a:spAutoFit/>
+          </a:bodyPr>
+          <a:lstStyle/>
+          <a:p>
+            <a:pPr algn="l"/>
+            <a:r>
+              <a:rPr sz="1000" b="0" i="0">
+                <a:solidFill>
+                  <a:srgbClr val="5C6C7E"/>
+                </a:solidFill>
+                <a:latin typeface="Calibri"/>
+              </a:rPr>
+              <a:t>NSX + Palo Alto migration workflow  •  11/12</a:t>
+            </a:r>
+          </a:p>
+        </p:txBody>
+      </p:sp>
+    </p:spTree>
+  </p:cSld>
+  <p:clrMapOvr>
+    <a:masterClrMapping/>
+  </p:clrMapOvr>
+</p:sld>
+</file>
+
+<file path=ppt/slides/slide13.xml><?xml version="1.0" encoding="utf-8"?>
+<p:sld xmlns:a="http://schemas.openxmlformats.org/drawingml/2006/main" xmlns:p="http://schemas.openxmlformats.org/presentationml/2006/main" xmlns:r="http://schemas.openxmlformats.org/officeDocument/2006/relationships">
+  <p:cSld>
+    <p:bg>
+      <p:bgPr>
+        <a:solidFill>
+          <a:srgbClr val="11233E"/>
+        </a:solidFill>
+        <a:effectLst/>
+      </p:bgPr>
+    </p:bg>
+    <p:spTree>
+      <p:nvGrpSpPr>
+        <p:cNvPr id="1" name=""/>
+        <p:cNvGrpSpPr/>
+        <p:nvPr/>
+      </p:nvGrpSpPr>
+      <p:grpSpPr/>
+      <p:sp>
+        <p:nvSpPr>
+          <p:cNvPr id="2" name="TextBox 1"/>
+          <p:cNvSpPr txBox="1"/>
+          <p:nvPr/>
+        </p:nvSpPr>
+        <p:spPr>
+          <a:xfrm>
+            <a:off x="548640" y="457200"/>
+            <a:ext cx="10972800" cy="822960"/>
+          </a:xfrm>
+          <a:prstGeom prst="rect">
+            <a:avLst/>
+          </a:prstGeom>
+          <a:noFill/>
+        </p:spPr>
+        <p:txBody>
+          <a:bodyPr wrap="square" lIns="0" rIns="0" tIns="0" bIns="0" anchor="t">
+            <a:spAutoFit/>
+          </a:bodyPr>
+          <a:lstStyle/>
+          <a:p>
+            <a:pPr algn="l"/>
+            <a:r>
+              <a:rPr sz="4000" b="1" i="0">
+                <a:solidFill>
+                  <a:srgbClr val="FFFFFF"/>
+                </a:solidFill>
+                <a:latin typeface="Calibri"/>
+              </a:rPr>
+              <a:t>Open items</a:t>
+            </a:r>
+          </a:p>
+        </p:txBody>
+      </p:sp>
+      <p:sp>
+        <p:nvSpPr>
+          <p:cNvPr id="3" name="TextBox 2"/>
+          <p:cNvSpPr txBox="1"/>
+          <p:nvPr/>
+        </p:nvSpPr>
+        <p:spPr>
+          <a:xfrm>
+            <a:off x="548640" y="1325880"/>
+            <a:ext cx="5120640" cy="365760"/>
+          </a:xfrm>
+          <a:prstGeom prst="rect">
+            <a:avLst/>
+          </a:prstGeom>
+          <a:noFill/>
+        </p:spPr>
+        <p:txBody>
+          <a:bodyPr wrap="square" lIns="0" rIns="0" tIns="0" bIns="0" anchor="ctr">
+            <a:spAutoFit/>
+          </a:bodyPr>
+          <a:lstStyle/>
+          <a:p>
+            <a:pPr algn="l"/>
+            <a:r>
+              <a:rPr sz="1700" b="1" i="0">
+                <a:solidFill>
+                  <a:srgbClr val="BEDCE6"/>
+                </a:solidFill>
+                <a:latin typeface="Calibri"/>
+              </a:rPr>
+              <a:t>NSX</a:t>
+            </a:r>
+          </a:p>
+        </p:txBody>
+      </p:sp>
+      <p:sp>
+        <p:nvSpPr>
+          <p:cNvPr id="4" name="Oval 3"/>
+          <p:cNvSpPr/>
+          <p:nvPr/>
+        </p:nvSpPr>
+        <p:spPr>
+          <a:xfrm>
+            <a:off x="548640" y="1828800"/>
+            <a:ext cx="475488" cy="475488"/>
+          </a:xfrm>
+          <a:prstGeom prst="ellipse">
+            <a:avLst/>
+          </a:prstGeom>
+          <a:solidFill>
+            <a:srgbClr val="009691"/>
+          </a:solidFill>
+          <a:ln w="12700">
+            <a:solidFill>
+              <a:srgbClr val="009691"/>
+            </a:solidFill>
+          </a:ln>
+          <a:effectLst/>
+        </p:spPr>
+        <p:style>
+          <a:lnRef idx="1">
+            <a:schemeClr val="accent1"/>
+          </a:lnRef>
+          <a:fillRef idx="3">
+            <a:schemeClr val="accent1"/>
+          </a:fillRef>
+          <a:effectRef idx="2">
+            <a:schemeClr val="accent1"/>
+          </a:effectRef>
+          <a:fontRef idx="minor">
+            <a:schemeClr val="lt1"/>
+          </a:fontRef>
+        </p:style>
+        <p:txBody>
+          <a:bodyPr rtlCol="0" anchor="ctr"/>
+          <a:lstStyle/>
+          <a:p>
+            <a:pPr algn="ctr"/>
+          </a:p>
+        </p:txBody>
+      </p:sp>
+      <p:sp>
+        <p:nvSpPr>
+          <p:cNvPr id="5" name="TextBox 4"/>
+          <p:cNvSpPr txBox="1"/>
+          <p:nvPr/>
+        </p:nvSpPr>
+        <p:spPr>
+          <a:xfrm>
+            <a:off x="548640" y="1828800"/>
+            <a:ext cx="475488" cy="475488"/>
+          </a:xfrm>
+          <a:prstGeom prst="rect">
+            <a:avLst/>
+          </a:prstGeom>
+          <a:noFill/>
+        </p:spPr>
+        <p:txBody>
+          <a:bodyPr wrap="square" lIns="0" rIns="0" tIns="0" bIns="0" anchor="ctr">
+            <a:spAutoFit/>
+          </a:bodyPr>
+          <a:lstStyle/>
+          <a:p>
+            <a:pPr algn="ctr"/>
+            <a:r>
+              <a:rPr sz="1900" b="1" i="0">
+                <a:solidFill>
+                  <a:srgbClr val="FFFFFF"/>
+                </a:solidFill>
+                <a:latin typeface="Calibri"/>
+              </a:rPr>
+              <a:t>1</a:t>
+            </a:r>
+          </a:p>
+        </p:txBody>
+      </p:sp>
+      <p:sp>
+        <p:nvSpPr>
+          <p:cNvPr id="6" name="TextBox 5"/>
+          <p:cNvSpPr txBox="1"/>
+          <p:nvPr/>
+        </p:nvSpPr>
+        <p:spPr>
+          <a:xfrm>
+            <a:off x="1234440" y="1737360"/>
+            <a:ext cx="4617720" cy="685800"/>
+          </a:xfrm>
+          <a:prstGeom prst="rect">
+            <a:avLst/>
+          </a:prstGeom>
+          <a:noFill/>
+        </p:spPr>
+        <p:txBody>
+          <a:bodyPr wrap="square" lIns="0" rIns="0" tIns="0" bIns="0" anchor="ctr">
+            <a:spAutoFit/>
+          </a:bodyPr>
+          <a:lstStyle/>
+          <a:p>
+            <a:pPr algn="l"/>
+            <a:r>
+              <a:rPr sz="1700" b="1" i="0">
+                <a:solidFill>
+                  <a:srgbClr val="FFFFFF"/>
+                </a:solidFill>
+                <a:latin typeface="Calibri"/>
+              </a:rPr>
+              <a:t>C: cover nested and segment-based groups</a:t>
+            </a:r>
+          </a:p>
+          <a:p>
+            <a:pPr algn="l"/>
+            <a:r>
+              <a:rPr sz="1300" b="0" i="0">
+                <a:solidFill>
+                  <a:srgbClr val="BEDCE6"/>
+                </a:solidFill>
+                <a:latin typeface="Calibri"/>
+              </a:rPr>
+              <a:t>rules using them miss source IPs today</a:t>
+            </a:r>
+          </a:p>
+        </p:txBody>
+      </p:sp>
+      <p:sp>
+        <p:nvSpPr>
+          <p:cNvPr id="7" name="Oval 6"/>
+          <p:cNvSpPr/>
+          <p:nvPr/>
+        </p:nvSpPr>
+        <p:spPr>
+          <a:xfrm>
+            <a:off x="548640" y="2788920"/>
+            <a:ext cx="475488" cy="475488"/>
+          </a:xfrm>
+          <a:prstGeom prst="ellipse">
+            <a:avLst/>
+          </a:prstGeom>
+          <a:solidFill>
+            <a:srgbClr val="EB852D"/>
+          </a:solidFill>
+          <a:ln w="12700">
+            <a:solidFill>
+              <a:srgbClr val="EB852D"/>
+            </a:solidFill>
+          </a:ln>
+          <a:effectLst/>
+        </p:spPr>
+        <p:style>
+          <a:lnRef idx="1">
+            <a:schemeClr val="accent1"/>
+          </a:lnRef>
+          <a:fillRef idx="3">
+            <a:schemeClr val="accent1"/>
+          </a:fillRef>
+          <a:effectRef idx="2">
+            <a:schemeClr val="accent1"/>
+          </a:effectRef>
+          <a:fontRef idx="minor">
+            <a:schemeClr val="lt1"/>
+          </a:fontRef>
+        </p:style>
+        <p:txBody>
+          <a:bodyPr rtlCol="0" anchor="ctr"/>
+          <a:lstStyle/>
+          <a:p>
+            <a:pPr algn="ctr"/>
+          </a:p>
+        </p:txBody>
+      </p:sp>
+      <p:sp>
+        <p:nvSpPr>
+          <p:cNvPr id="8" name="TextBox 7"/>
+          <p:cNvSpPr txBox="1"/>
+          <p:nvPr/>
+        </p:nvSpPr>
+        <p:spPr>
+          <a:xfrm>
+            <a:off x="548640" y="2788920"/>
+            <a:ext cx="475488" cy="475488"/>
+          </a:xfrm>
+          <a:prstGeom prst="rect">
+            <a:avLst/>
+          </a:prstGeom>
+          <a:noFill/>
+        </p:spPr>
+        <p:txBody>
+          <a:bodyPr wrap="square" lIns="0" rIns="0" tIns="0" bIns="0" anchor="ctr">
+            <a:spAutoFit/>
+          </a:bodyPr>
+          <a:lstStyle/>
+          <a:p>
+            <a:pPr algn="ctr"/>
+            <a:r>
+              <a:rPr sz="1900" b="1" i="0">
+                <a:solidFill>
+                  <a:srgbClr val="FFFFFF"/>
+                </a:solidFill>
+                <a:latin typeface="Calibri"/>
+              </a:rPr>
+              <a:t>2</a:t>
+            </a:r>
+          </a:p>
+        </p:txBody>
+      </p:sp>
+      <p:sp>
+        <p:nvSpPr>
+          <p:cNvPr id="9" name="TextBox 8"/>
+          <p:cNvSpPr txBox="1"/>
+          <p:nvPr/>
+        </p:nvSpPr>
+        <p:spPr>
+          <a:xfrm>
+            <a:off x="1234440" y="2697480"/>
+            <a:ext cx="4617720" cy="685800"/>
+          </a:xfrm>
+          <a:prstGeom prst="rect">
+            <a:avLst/>
+          </a:prstGeom>
+          <a:noFill/>
+        </p:spPr>
+        <p:txBody>
+          <a:bodyPr wrap="square" lIns="0" rIns="0" tIns="0" bIns="0" anchor="ctr">
+            <a:spAutoFit/>
+          </a:bodyPr>
+          <a:lstStyle/>
+          <a:p>
+            <a:pPr algn="l"/>
+            <a:r>
+              <a:rPr sz="1700" b="1" i="0">
+                <a:solidFill>
+                  <a:srgbClr val="FFFFFF"/>
+                </a:solidFill>
+                <a:latin typeface="Calibri"/>
+              </a:rPr>
+              <a:t>Services and policies rollbacks</a:t>
+            </a:r>
+          </a:p>
+          <a:p>
+            <a:pPr algn="l"/>
+            <a:r>
+              <a:rPr sz="1300" b="0" i="0">
+                <a:solidFill>
+                  <a:srgbClr val="BEDCE6"/>
+                </a:solidFill>
+                <a:latin typeface="Calibri"/>
+              </a:rPr>
+              <a:t>delete only what they created</a:t>
+            </a:r>
+          </a:p>
+        </p:txBody>
+      </p:sp>
+      <p:sp>
+        <p:nvSpPr>
+          <p:cNvPr id="10" name="Oval 9"/>
+          <p:cNvSpPr/>
+          <p:nvPr/>
+        </p:nvSpPr>
+        <p:spPr>
+          <a:xfrm>
+            <a:off x="548640" y="3749039"/>
+            <a:ext cx="475488" cy="475488"/>
+          </a:xfrm>
+          <a:prstGeom prst="ellipse">
+            <a:avLst/>
+          </a:prstGeom>
+          <a:solidFill>
+            <a:srgbClr val="27965B"/>
+          </a:solidFill>
+          <a:ln w="12700">
+            <a:solidFill>
+              <a:srgbClr val="27965B"/>
+            </a:solidFill>
+          </a:ln>
+          <a:effectLst/>
+        </p:spPr>
+        <p:style>
+          <a:lnRef idx="1">
+            <a:schemeClr val="accent1"/>
+          </a:lnRef>
+          <a:fillRef idx="3">
+            <a:schemeClr val="accent1"/>
+          </a:fillRef>
+          <a:effectRef idx="2">
+            <a:schemeClr val="accent1"/>
+          </a:effectRef>
+          <a:fontRef idx="minor">
+            <a:schemeClr val="lt1"/>
+          </a:fontRef>
+        </p:style>
+        <p:txBody>
+          <a:bodyPr rtlCol="0" anchor="ctr"/>
+          <a:lstStyle/>
+          <a:p>
+            <a:pPr algn="ctr"/>
+          </a:p>
+        </p:txBody>
+      </p:sp>
+      <p:sp>
+        <p:nvSpPr>
+          <p:cNvPr id="11" name="TextBox 10"/>
+          <p:cNvSpPr txBox="1"/>
+          <p:nvPr/>
+        </p:nvSpPr>
+        <p:spPr>
+          <a:xfrm>
+            <a:off x="548640" y="3749039"/>
+            <a:ext cx="475488" cy="475488"/>
+          </a:xfrm>
+          <a:prstGeom prst="rect">
+            <a:avLst/>
+          </a:prstGeom>
+          <a:noFill/>
+        </p:spPr>
+        <p:txBody>
+          <a:bodyPr wrap="square" lIns="0" rIns="0" tIns="0" bIns="0" anchor="ctr">
+            <a:spAutoFit/>
+          </a:bodyPr>
+          <a:lstStyle/>
+          <a:p>
+            <a:pPr algn="ctr"/>
+            <a:r>
+              <a:rPr sz="1900" b="1" i="0">
+                <a:solidFill>
+                  <a:srgbClr val="FFFFFF"/>
+                </a:solidFill>
+                <a:latin typeface="Calibri"/>
+              </a:rPr>
+              <a:t>3</a:t>
+            </a:r>
+          </a:p>
+        </p:txBody>
+      </p:sp>
+      <p:sp>
+        <p:nvSpPr>
+          <p:cNvPr id="12" name="TextBox 11"/>
+          <p:cNvSpPr txBox="1"/>
+          <p:nvPr/>
+        </p:nvSpPr>
+        <p:spPr>
+          <a:xfrm>
+            <a:off x="1234440" y="3657600"/>
+            <a:ext cx="4617720" cy="685800"/>
+          </a:xfrm>
+          <a:prstGeom prst="rect">
+            <a:avLst/>
+          </a:prstGeom>
+          <a:noFill/>
+        </p:spPr>
+        <p:txBody>
+          <a:bodyPr wrap="square" lIns="0" rIns="0" tIns="0" bIns="0" anchor="ctr">
+            <a:spAutoFit/>
+          </a:bodyPr>
+          <a:lstStyle/>
+          <a:p>
+            <a:pPr algn="l"/>
+            <a:r>
+              <a:rPr sz="1700" b="1" i="0">
+                <a:solidFill>
+                  <a:srgbClr val="FFFFFF"/>
+                </a:solidFill>
+                <a:latin typeface="Calibri"/>
+              </a:rPr>
+              <a:t>Workflow A rollback after a second site</a:t>
+            </a:r>
+          </a:p>
+          <a:p>
+            <a:pPr algn="l"/>
+            <a:r>
+              <a:rPr sz="1300" b="0" i="0">
+                <a:solidFill>
+                  <a:srgbClr val="BEDCE6"/>
+                </a:solidFill>
+                <a:latin typeface="Calibri"/>
+              </a:rPr>
+              <a:t>the shared baseline folder needs --from-baseline</a:t>
+            </a:r>
+          </a:p>
+        </p:txBody>
+      </p:sp>
+      <p:sp>
+        <p:nvSpPr>
+          <p:cNvPr id="13" name="Oval 12"/>
+          <p:cNvSpPr/>
+          <p:nvPr/>
+        </p:nvSpPr>
+        <p:spPr>
+          <a:xfrm>
+            <a:off x="548640" y="4709159"/>
+            <a:ext cx="475488" cy="475488"/>
+          </a:xfrm>
+          <a:prstGeom prst="ellipse">
+            <a:avLst/>
+          </a:prstGeom>
+          <a:solidFill>
+            <a:srgbClr val="216FBD"/>
+          </a:solidFill>
+          <a:ln w="12700">
+            <a:solidFill>
+              <a:srgbClr val="216FBD"/>
+            </a:solidFill>
+          </a:ln>
+          <a:effectLst/>
+        </p:spPr>
+        <p:style>
+          <a:lnRef idx="1">
+            <a:schemeClr val="accent1"/>
+          </a:lnRef>
+          <a:fillRef idx="3">
+            <a:schemeClr val="accent1"/>
+          </a:fillRef>
+          <a:effectRef idx="2">
+            <a:schemeClr val="accent1"/>
+          </a:effectRef>
+          <a:fontRef idx="minor">
+            <a:schemeClr val="lt1"/>
+          </a:fontRef>
+        </p:style>
+        <p:txBody>
+          <a:bodyPr rtlCol="0" anchor="ctr"/>
+          <a:lstStyle/>
+          <a:p>
+            <a:pPr algn="ctr"/>
+          </a:p>
+        </p:txBody>
+      </p:sp>
+      <p:sp>
+        <p:nvSpPr>
+          <p:cNvPr id="14" name="TextBox 13"/>
+          <p:cNvSpPr txBox="1"/>
+          <p:nvPr/>
+        </p:nvSpPr>
+        <p:spPr>
+          <a:xfrm>
+            <a:off x="548640" y="4709159"/>
+            <a:ext cx="475488" cy="475488"/>
+          </a:xfrm>
+          <a:prstGeom prst="rect">
+            <a:avLst/>
+          </a:prstGeom>
+          <a:noFill/>
+        </p:spPr>
+        <p:txBody>
+          <a:bodyPr wrap="square" lIns="0" rIns="0" tIns="0" bIns="0" anchor="ctr">
+            <a:spAutoFit/>
+          </a:bodyPr>
+          <a:lstStyle/>
+          <a:p>
+            <a:pPr algn="ctr"/>
+            <a:r>
+              <a:rPr sz="1900" b="1" i="0">
+                <a:solidFill>
+                  <a:srgbClr val="FFFFFF"/>
+                </a:solidFill>
+                <a:latin typeface="Calibri"/>
+              </a:rPr>
+              <a:t>4</a:t>
+            </a:r>
+          </a:p>
+        </p:txBody>
+      </p:sp>
+      <p:sp>
+        <p:nvSpPr>
+          <p:cNvPr id="15" name="TextBox 14"/>
+          <p:cNvSpPr txBox="1"/>
+          <p:nvPr/>
+        </p:nvSpPr>
+        <p:spPr>
+          <a:xfrm>
+            <a:off x="1234440" y="4617720"/>
+            <a:ext cx="4617720" cy="685800"/>
+          </a:xfrm>
+          <a:prstGeom prst="rect">
+            <a:avLst/>
+          </a:prstGeom>
+          <a:noFill/>
+        </p:spPr>
+        <p:txBody>
+          <a:bodyPr wrap="square" lIns="0" rIns="0" tIns="0" bIns="0" anchor="ctr">
+            <a:spAutoFit/>
+          </a:bodyPr>
+          <a:lstStyle/>
+          <a:p>
+            <a:pPr algn="l"/>
+            <a:r>
+              <a:rPr sz="1700" b="1" i="0">
+                <a:solidFill>
+                  <a:srgbClr val="FFFFFF"/>
+                </a:solidFill>
+                <a:latin typeface="Calibri"/>
+              </a:rPr>
+              <a:t>nonprod_map.csv: 10.8 rows collide</a:t>
+            </a:r>
+          </a:p>
+          <a:p>
+            <a:pPr algn="l"/>
+            <a:r>
+              <a:rPr sz="1300" b="0" i="0">
+                <a:solidFill>
+                  <a:srgbClr val="BEDCE6"/>
+                </a:solidFill>
+                <a:latin typeface="Calibri"/>
+              </a:rPr>
+              <a:t>a /24 row disagrees with its /16 parent</a:t>
+            </a:r>
+          </a:p>
+        </p:txBody>
+      </p:sp>
+      <p:sp>
+        <p:nvSpPr>
+          <p:cNvPr id="16" name="TextBox 15"/>
+          <p:cNvSpPr txBox="1"/>
+          <p:nvPr/>
+        </p:nvSpPr>
+        <p:spPr>
+          <a:xfrm>
+            <a:off x="6263640" y="1325880"/>
+            <a:ext cx="5120640" cy="365760"/>
+          </a:xfrm>
+          <a:prstGeom prst="rect">
+            <a:avLst/>
+          </a:prstGeom>
+          <a:noFill/>
+        </p:spPr>
+        <p:txBody>
+          <a:bodyPr wrap="square" lIns="0" rIns="0" tIns="0" bIns="0" anchor="ctr">
+            <a:spAutoFit/>
+          </a:bodyPr>
+          <a:lstStyle/>
+          <a:p>
+            <a:pPr algn="l"/>
+            <a:r>
+              <a:rPr sz="1700" b="1" i="0">
+                <a:solidFill>
+                  <a:srgbClr val="BEDCE6"/>
+                </a:solidFill>
+                <a:latin typeface="Calibri"/>
+              </a:rPr>
+              <a:t>Multivendor</a:t>
+            </a:r>
+          </a:p>
+        </p:txBody>
+      </p:sp>
+      <p:sp>
+        <p:nvSpPr>
+          <p:cNvPr id="17" name="Oval 16"/>
+          <p:cNvSpPr/>
+          <p:nvPr/>
+        </p:nvSpPr>
+        <p:spPr>
+          <a:xfrm>
+            <a:off x="6263640" y="1828800"/>
+            <a:ext cx="475488" cy="475488"/>
+          </a:xfrm>
+          <a:prstGeom prst="ellipse">
+            <a:avLst/>
+          </a:prstGeom>
+          <a:solidFill>
+            <a:srgbClr val="6B4FA8"/>
+          </a:solidFill>
+          <a:ln w="12700">
+            <a:solidFill>
+              <a:srgbClr val="6B4FA8"/>
+            </a:solidFill>
+          </a:ln>
+          <a:effectLst/>
+        </p:spPr>
+        <p:style>
+          <a:lnRef idx="1">
+            <a:schemeClr val="accent1"/>
+          </a:lnRef>
+          <a:fillRef idx="3">
+            <a:schemeClr val="accent1"/>
+          </a:fillRef>
+          <a:effectRef idx="2">
+            <a:schemeClr val="accent1"/>
+          </a:effectRef>
+          <a:fontRef idx="minor">
+            <a:schemeClr val="lt1"/>
+          </a:fontRef>
+        </p:style>
+        <p:txBody>
+          <a:bodyPr rtlCol="0" anchor="ctr"/>
+          <a:lstStyle/>
+          <a:p>
+            <a:pPr algn="ctr"/>
+          </a:p>
+        </p:txBody>
+      </p:sp>
+      <p:sp>
+        <p:nvSpPr>
+          <p:cNvPr id="18" name="TextBox 17"/>
+          <p:cNvSpPr txBox="1"/>
+          <p:nvPr/>
+        </p:nvSpPr>
+        <p:spPr>
+          <a:xfrm>
+            <a:off x="6263640" y="1828800"/>
+            <a:ext cx="475488" cy="475488"/>
+          </a:xfrm>
+          <a:prstGeom prst="rect">
+            <a:avLst/>
+          </a:prstGeom>
+          <a:noFill/>
+        </p:spPr>
+        <p:txBody>
+          <a:bodyPr wrap="square" lIns="0" rIns="0" tIns="0" bIns="0" anchor="ctr">
+            <a:spAutoFit/>
+          </a:bodyPr>
+          <a:lstStyle/>
+          <a:p>
+            <a:pPr algn="ctr"/>
+            <a:r>
+              <a:rPr sz="1900" b="1" i="0">
+                <a:solidFill>
+                  <a:srgbClr val="FFFFFF"/>
+                </a:solidFill>
+                <a:latin typeface="Calibri"/>
+              </a:rPr>
+              <a:t>5</a:t>
+            </a:r>
+          </a:p>
+        </p:txBody>
+      </p:sp>
+      <p:sp>
+        <p:nvSpPr>
+          <p:cNvPr id="19" name="TextBox 18"/>
+          <p:cNvSpPr txBox="1"/>
+          <p:nvPr/>
+        </p:nvSpPr>
+        <p:spPr>
+          <a:xfrm>
+            <a:off x="6949440" y="1737360"/>
+            <a:ext cx="4617720" cy="685800"/>
+          </a:xfrm>
+          <a:prstGeom prst="rect">
+            <a:avLst/>
+          </a:prstGeom>
+          <a:noFill/>
+        </p:spPr>
+        <p:txBody>
+          <a:bodyPr wrap="square" lIns="0" rIns="0" tIns="0" bIns="0" anchor="ctr">
+            <a:spAutoFit/>
+          </a:bodyPr>
+          <a:lstStyle/>
+          <a:p>
+            <a:pPr algn="l"/>
+            <a:r>
+              <a:rPr sz="1700" b="1" i="0">
+                <a:solidFill>
+                  <a:srgbClr val="FFFFFF"/>
+                </a:solidFill>
+                <a:latin typeface="Calibri"/>
+              </a:rPr>
+              <a:t>Hostname tags on lm1's -old and -New VMs</a:t>
+            </a:r>
+          </a:p>
+          <a:p>
+            <a:pPr algn="l"/>
+            <a:r>
+              <a:rPr sz="1300" b="0" i="0">
+                <a:solidFill>
+                  <a:srgbClr val="BEDCE6"/>
+                </a:solidFill>
+                <a:latin typeface="Calibri"/>
+              </a:rPr>
+              <a:t>the full lm1 mirror needs them</a:t>
+            </a:r>
+          </a:p>
+        </p:txBody>
+      </p:sp>
+      <p:sp>
+        <p:nvSpPr>
+          <p:cNvPr id="20" name="Oval 19"/>
+          <p:cNvSpPr/>
+          <p:nvPr/>
+        </p:nvSpPr>
+        <p:spPr>
+          <a:xfrm>
+            <a:off x="6263640" y="2788920"/>
+            <a:ext cx="475488" cy="475488"/>
+          </a:xfrm>
+          <a:prstGeom prst="ellipse">
+            <a:avLst/>
+          </a:prstGeom>
+          <a:solidFill>
+            <a:srgbClr val="009691"/>
+          </a:solidFill>
+          <a:ln w="12700">
+            <a:solidFill>
+              <a:srgbClr val="009691"/>
+            </a:solidFill>
+          </a:ln>
+          <a:effectLst/>
+        </p:spPr>
+        <p:style>
+          <a:lnRef idx="1">
+            <a:schemeClr val="accent1"/>
+          </a:lnRef>
+          <a:fillRef idx="3">
+            <a:schemeClr val="accent1"/>
+          </a:fillRef>
+          <a:effectRef idx="2">
+            <a:schemeClr val="accent1"/>
+          </a:effectRef>
+          <a:fontRef idx="minor">
+            <a:schemeClr val="lt1"/>
+          </a:fontRef>
+        </p:style>
+        <p:txBody>
+          <a:bodyPr rtlCol="0" anchor="ctr"/>
+          <a:lstStyle/>
+          <a:p>
+            <a:pPr algn="ctr"/>
+          </a:p>
+        </p:txBody>
+      </p:sp>
+      <p:sp>
+        <p:nvSpPr>
+          <p:cNvPr id="21" name="TextBox 20"/>
+          <p:cNvSpPr txBox="1"/>
+          <p:nvPr/>
+        </p:nvSpPr>
+        <p:spPr>
+          <a:xfrm>
+            <a:off x="6263640" y="2788920"/>
+            <a:ext cx="475488" cy="475488"/>
+          </a:xfrm>
+          <a:prstGeom prst="rect">
+            <a:avLst/>
+          </a:prstGeom>
+          <a:noFill/>
+        </p:spPr>
+        <p:txBody>
+          <a:bodyPr wrap="square" lIns="0" rIns="0" tIns="0" bIns="0" anchor="ctr">
+            <a:spAutoFit/>
+          </a:bodyPr>
+          <a:lstStyle/>
+          <a:p>
+            <a:pPr algn="ctr"/>
+            <a:r>
+              <a:rPr sz="1900" b="1" i="0">
+                <a:solidFill>
+                  <a:srgbClr val="FFFFFF"/>
+                </a:solidFill>
+                <a:latin typeface="Calibri"/>
+              </a:rPr>
+              <a:t>6</a:t>
+            </a:r>
+          </a:p>
+        </p:txBody>
+      </p:sp>
+      <p:sp>
+        <p:nvSpPr>
+          <p:cNvPr id="22" name="TextBox 21"/>
+          <p:cNvSpPr txBox="1"/>
+          <p:nvPr/>
+        </p:nvSpPr>
+        <p:spPr>
+          <a:xfrm>
+            <a:off x="6949440" y="2697480"/>
+            <a:ext cx="4617720" cy="685800"/>
+          </a:xfrm>
+          <a:prstGeom prst="rect">
+            <a:avLst/>
+          </a:prstGeom>
+          <a:noFill/>
+        </p:spPr>
+        <p:txBody>
+          <a:bodyPr wrap="square" lIns="0" rIns="0" tIns="0" bIns="0" anchor="ctr">
+            <a:spAutoFit/>
+          </a:bodyPr>
+          <a:lstStyle/>
+          <a:p>
+            <a:pPr algn="l"/>
+            <a:r>
+              <a:rPr sz="1700" b="1" i="0">
+                <a:solidFill>
+                  <a:srgbClr val="FFFFFF"/>
+                </a:solidFill>
+                <a:latin typeface="Calibri"/>
+              </a:rPr>
+              <a:t>Full lm1 mirror, then dg-5 rules</a:t>
+            </a:r>
+          </a:p>
+          <a:p>
+            <a:pPr algn="l"/>
+            <a:r>
+              <a:rPr sz="1300" b="0" i="0">
+                <a:solidFill>
+                  <a:srgbClr val="BEDCE6"/>
+                </a:solidFill>
+                <a:latin typeface="Calibri"/>
+              </a:rPr>
+              <a:t>57 groups planned; rules (P3) not built</a:t>
+            </a:r>
+          </a:p>
+        </p:txBody>
+      </p:sp>
+      <p:sp>
+        <p:nvSpPr>
+          <p:cNvPr id="23" name="Oval 22"/>
+          <p:cNvSpPr/>
+          <p:nvPr/>
+        </p:nvSpPr>
+        <p:spPr>
+          <a:xfrm>
+            <a:off x="6263640" y="3749039"/>
+            <a:ext cx="475488" cy="475488"/>
+          </a:xfrm>
+          <a:prstGeom prst="ellipse">
+            <a:avLst/>
+          </a:prstGeom>
+          <a:solidFill>
+            <a:srgbClr val="EB852D"/>
+          </a:solidFill>
+          <a:ln w="12700">
+            <a:solidFill>
+              <a:srgbClr val="EB852D"/>
+            </a:solidFill>
+          </a:ln>
+          <a:effectLst/>
+        </p:spPr>
+        <p:style>
+          <a:lnRef idx="1">
+            <a:schemeClr val="accent1"/>
+          </a:lnRef>
+          <a:fillRef idx="3">
+            <a:schemeClr val="accent1"/>
+          </a:fillRef>
+          <a:effectRef idx="2">
+            <a:schemeClr val="accent1"/>
+          </a:effectRef>
+          <a:fontRef idx="minor">
+            <a:schemeClr val="lt1"/>
+          </a:fontRef>
+        </p:style>
+        <p:txBody>
+          <a:bodyPr rtlCol="0" anchor="ctr"/>
+          <a:lstStyle/>
+          <a:p>
+            <a:pPr algn="ctr"/>
+          </a:p>
+        </p:txBody>
+      </p:sp>
+      <p:sp>
+        <p:nvSpPr>
+          <p:cNvPr id="24" name="TextBox 23"/>
+          <p:cNvSpPr txBox="1"/>
+          <p:nvPr/>
+        </p:nvSpPr>
+        <p:spPr>
+          <a:xfrm>
+            <a:off x="6263640" y="3749039"/>
+            <a:ext cx="475488" cy="475488"/>
+          </a:xfrm>
+          <a:prstGeom prst="rect">
+            <a:avLst/>
+          </a:prstGeom>
+          <a:noFill/>
+        </p:spPr>
+        <p:txBody>
+          <a:bodyPr wrap="square" lIns="0" rIns="0" tIns="0" bIns="0" anchor="ctr">
+            <a:spAutoFit/>
+          </a:bodyPr>
+          <a:lstStyle/>
+          <a:p>
+            <a:pPr algn="ctr"/>
+            <a:r>
+              <a:rPr sz="1900" b="1" i="0">
+                <a:solidFill>
+                  <a:srgbClr val="FFFFFF"/>
+                </a:solidFill>
+                <a:latin typeface="Calibri"/>
+              </a:rPr>
+              <a:t>7</a:t>
+            </a:r>
+          </a:p>
+        </p:txBody>
+      </p:sp>
+      <p:sp>
+        <p:nvSpPr>
+          <p:cNvPr id="25" name="TextBox 24"/>
+          <p:cNvSpPr txBox="1"/>
+          <p:nvPr/>
+        </p:nvSpPr>
+        <p:spPr>
+          <a:xfrm>
+            <a:off x="6949440" y="3657600"/>
+            <a:ext cx="4617720" cy="685800"/>
+          </a:xfrm>
+          <a:prstGeom prst="rect">
+            <a:avLst/>
+          </a:prstGeom>
+          <a:noFill/>
+        </p:spPr>
+        <p:txBody>
+          <a:bodyPr wrap="square" lIns="0" rIns="0" tIns="0" bIns="0" anchor="ctr">
+            <a:spAutoFit/>
+          </a:bodyPr>
+          <a:lstStyle/>
+          <a:p>
+            <a:pPr algn="l"/>
+            <a:r>
+              <a:rPr sz="1700" b="1" i="0">
+                <a:solidFill>
+                  <a:srgbClr val="FFFFFF"/>
+                </a:solidFill>
+                <a:latin typeface="Calibri"/>
+              </a:rPr>
+              <a:t>Probe tool prints the password on errors</a:t>
+            </a:r>
+          </a:p>
+          <a:p>
+            <a:pPr algn="l"/>
+            <a:r>
+              <a:rPr sz="1300" b="0" i="0">
+                <a:solidFill>
+                  <a:srgbClr val="BEDCE6"/>
+                </a:solidFill>
+                <a:latin typeface="Calibri"/>
+              </a:rPr>
+              <a:t>fix it the way the mirror tool does</a:t>
+            </a:r>
+          </a:p>
+        </p:txBody>
+      </p:sp>
+      <p:sp>
+        <p:nvSpPr>
+          <p:cNvPr id="26" name="Oval 25"/>
+          <p:cNvSpPr/>
+          <p:nvPr/>
+        </p:nvSpPr>
+        <p:spPr>
+          <a:xfrm>
+            <a:off x="6263640" y="4709159"/>
+            <a:ext cx="475488" cy="475488"/>
+          </a:xfrm>
+          <a:prstGeom prst="ellipse">
+            <a:avLst/>
+          </a:prstGeom>
+          <a:solidFill>
+            <a:srgbClr val="5C6C7E"/>
+          </a:solidFill>
+          <a:ln w="12700">
+            <a:solidFill>
+              <a:srgbClr val="5C6C7E"/>
+            </a:solidFill>
+          </a:ln>
+          <a:effectLst/>
+        </p:spPr>
+        <p:style>
+          <a:lnRef idx="1">
+            <a:schemeClr val="accent1"/>
+          </a:lnRef>
+          <a:fillRef idx="3">
+            <a:schemeClr val="accent1"/>
+          </a:fillRef>
+          <a:effectRef idx="2">
+            <a:schemeClr val="accent1"/>
+          </a:effectRef>
+          <a:fontRef idx="minor">
+            <a:schemeClr val="lt1"/>
+          </a:fontRef>
+        </p:style>
+        <p:txBody>
+          <a:bodyPr rtlCol="0" anchor="ctr"/>
+          <a:lstStyle/>
+          <a:p>
+            <a:pPr algn="ctr"/>
+          </a:p>
+        </p:txBody>
+      </p:sp>
+      <p:sp>
+        <p:nvSpPr>
+          <p:cNvPr id="27" name="TextBox 26"/>
+          <p:cNvSpPr txBox="1"/>
+          <p:nvPr/>
+        </p:nvSpPr>
+        <p:spPr>
+          <a:xfrm>
+            <a:off x="6263640" y="4709159"/>
+            <a:ext cx="475488" cy="475488"/>
+          </a:xfrm>
+          <a:prstGeom prst="rect">
+            <a:avLst/>
+          </a:prstGeom>
+          <a:noFill/>
+        </p:spPr>
+        <p:txBody>
+          <a:bodyPr wrap="square" lIns="0" rIns="0" tIns="0" bIns="0" anchor="ctr">
+            <a:spAutoFit/>
+          </a:bodyPr>
+          <a:lstStyle/>
+          <a:p>
+            <a:pPr algn="ctr"/>
+            <a:r>
+              <a:rPr sz="1900" b="1" i="0">
+                <a:solidFill>
+                  <a:srgbClr val="FFFFFF"/>
+                </a:solidFill>
+                <a:latin typeface="Calibri"/>
+              </a:rPr>
+              <a:t>8</a:t>
+            </a:r>
+          </a:p>
+        </p:txBody>
+      </p:sp>
+      <p:sp>
+        <p:nvSpPr>
+          <p:cNvPr id="28" name="TextBox 27"/>
+          <p:cNvSpPr txBox="1"/>
+          <p:nvPr/>
+        </p:nvSpPr>
+        <p:spPr>
+          <a:xfrm>
+            <a:off x="6949440" y="4617720"/>
+            <a:ext cx="4617720" cy="685800"/>
+          </a:xfrm>
+          <a:prstGeom prst="rect">
+            <a:avLst/>
+          </a:prstGeom>
+          <a:noFill/>
+        </p:spPr>
+        <p:txBody>
+          <a:bodyPr wrap="square" lIns="0" rIns="0" tIns="0" bIns="0" anchor="ctr">
+            <a:spAutoFit/>
+          </a:bodyPr>
+          <a:lstStyle/>
+          <a:p>
+            <a:pPr algn="l"/>
+            <a:r>
+              <a:rPr sz="1700" b="1" i="0">
+                <a:solidFill>
+                  <a:srgbClr val="FFFFFF"/>
+                </a:solidFill>
+                <a:latin typeface="Calibri"/>
+              </a:rPr>
+              <a:t>Review or revert the 24 test objects</a:t>
+            </a:r>
+          </a:p>
+          <a:p>
+            <a:pPr algn="l"/>
+            <a:r>
+              <a:rPr sz="1300" b="0" i="0">
+                <a:solidFill>
+                  <a:srgbClr val="BEDCE6"/>
+                </a:solidFill>
+                <a:latin typeface="Calibri"/>
+              </a:rPr>
+              <a:t>still in pano4's candidate config</a:t>
+            </a:r>
+          </a:p>
+        </p:txBody>
+      </p:sp>
+      <p:sp>
+        <p:nvSpPr>
+          <p:cNvPr id="29" name="TextBox 28"/>
+          <p:cNvSpPr txBox="1"/>
+          <p:nvPr/>
+        </p:nvSpPr>
+        <p:spPr>
+          <a:xfrm>
+            <a:off x="548640" y="5760720"/>
+            <a:ext cx="10972800" cy="502920"/>
+          </a:xfrm>
+          <a:prstGeom prst="rect">
+            <a:avLst/>
+          </a:prstGeom>
+          <a:noFill/>
+        </p:spPr>
+        <p:txBody>
+          <a:bodyPr wrap="square" lIns="0" rIns="0" tIns="0" bIns="0" anchor="t">
+            <a:spAutoFit/>
+          </a:bodyPr>
+          <a:lstStyle/>
+          <a:p>
+            <a:pPr algn="l"/>
+            <a:r>
+              <a:rPr sz="1300" b="0" i="1">
+                <a:solidFill>
+                  <a:srgbClr val="BEDCE6"/>
+                </a:solidFill>
+                <a:latin typeface="Calibri"/>
+              </a:rPr>
+              <a:t>Also open: automatic backup before every apply; D2a re-runs count their own siblings; D verify rule keys. Detail: docs/multivendor/STATUS.md and docs/nsx/RUNBOOK_WORKFLOW.md</a:t>
+            </a:r>
+          </a:p>
+        </p:txBody>
+      </p:sp>
+      <p:sp>
+        <p:nvSpPr>
+          <p:cNvPr id="30" name="TextBox 29"/>
+          <p:cNvSpPr txBox="1"/>
+          <p:nvPr/>
+        </p:nvSpPr>
+        <p:spPr>
+          <a:xfrm>
+            <a:off x="548640" y="6400800"/>
+            <a:ext cx="5486400" cy="274320"/>
+          </a:xfrm>
+          <a:prstGeom prst="rect">
+            <a:avLst/>
+          </a:prstGeom>
+          <a:noFill/>
+        </p:spPr>
+        <p:txBody>
+          <a:bodyPr wrap="square" lIns="0" rIns="0" tIns="0" bIns="0" anchor="ctr">
+            <a:spAutoFit/>
+          </a:bodyPr>
+          <a:lstStyle/>
+          <a:p>
+            <a:pPr algn="l"/>
+            <a:r>
+              <a:rPr sz="1000" b="0" i="0">
+                <a:solidFill>
+                  <a:srgbClr val="BEDCE6"/>
+                </a:solidFill>
+                <a:latin typeface="Calibri"/>
+              </a:rPr>
+              <a:t>NSX + Palo Alto migration workflow  •  12/12</a:t>
+            </a:r>
           </a:p>
         </p:txBody>
       </p:sp>
@@ -2288,6 +6714,10 @@
             <a:prstDash val="solid"/>
           </a:ln>
         </p:spPr>
+        <p:txBody>
+          <a:bodyPr/>
+          <a:p/>
+        </p:txBody>
       </p:sp>
       <p:sp>
         <p:nvSpPr>
@@ -2354,6 +6784,10 @@
             <a:prstDash val="solid"/>
           </a:ln>
         </p:spPr>
+        <p:txBody>
+          <a:bodyPr/>
+          <a:p/>
+        </p:txBody>
       </p:sp>
       <p:sp>
         <p:nvSpPr>
@@ -2420,6 +6854,10 @@
             <a:prstDash val="solid"/>
           </a:ln>
         </p:spPr>
+        <p:txBody>
+          <a:bodyPr/>
+          <a:p/>
+        </p:txBody>
       </p:sp>
       <p:sp>
         <p:nvSpPr>
@@ -2501,6 +6939,10 @@
             <a:prstDash val="solid"/>
           </a:ln>
         </p:spPr>
+        <p:txBody>
+          <a:bodyPr/>
+          <a:p/>
+        </p:txBody>
       </p:sp>
       <p:sp>
         <p:nvSpPr>
@@ -2567,6 +7009,10 @@
             <a:prstDash val="solid"/>
           </a:ln>
         </p:spPr>
+        <p:txBody>
+          <a:bodyPr/>
+          <a:p/>
+        </p:txBody>
       </p:sp>
       <p:sp>
         <p:nvSpPr>
@@ -2635,7 +7081,7 @@
                 <a:ea typeface="Calibri" pitchFamily="34" charset="-122"/>
                 <a:cs typeface="Calibri" pitchFamily="34" charset="-120"/>
               </a:rPr>
-              <a:t>10.6.x → 10.16.x   •   10.21.x → 10.31.x</a:t>
+              <a:t>10.6.x → 10.7.x   •   10.21.x → 10.31.x</a:t>
             </a:r>
             <a:endParaRPr lang="en-US" sz="1600" dirty="0"/>
           </a:p>
@@ -2667,6 +7113,10 @@
             <a:prstDash val="solid"/>
           </a:ln>
         </p:spPr>
+        <p:txBody>
+          <a:bodyPr/>
+          <a:p/>
+        </p:txBody>
       </p:sp>
       <p:sp>
         <p:nvSpPr>
@@ -2748,6 +7198,10 @@
             <a:prstDash val="solid"/>
           </a:ln>
         </p:spPr>
+        <p:txBody>
+          <a:bodyPr/>
+          <a:p/>
+        </p:txBody>
       </p:sp>
       <p:sp>
         <p:nvSpPr>
@@ -2814,6 +7268,10 @@
             <a:prstDash val="solid"/>
           </a:ln>
         </p:spPr>
+        <p:txBody>
+          <a:bodyPr/>
+          <a:p/>
+        </p:txBody>
       </p:sp>
       <p:sp>
         <p:nvSpPr>
@@ -2895,6 +7353,10 @@
             <a:prstDash val="solid"/>
           </a:ln>
         </p:spPr>
+        <p:txBody>
+          <a:bodyPr/>
+          <a:p/>
+        </p:txBody>
       </p:sp>
       <p:sp>
         <p:nvSpPr>
@@ -2961,6 +7423,10 @@
             <a:prstDash val="solid"/>
           </a:ln>
         </p:spPr>
+        <p:txBody>
+          <a:bodyPr/>
+          <a:p/>
+        </p:txBody>
       </p:sp>
       <p:sp>
         <p:nvSpPr>
@@ -3044,6 +7510,10 @@
             <a:prstDash val="solid"/>
           </a:ln>
         </p:spPr>
+        <p:txBody>
+          <a:bodyPr/>
+          <a:p/>
+        </p:txBody>
       </p:sp>
       <p:sp>
         <p:nvSpPr>
@@ -3124,6 +7594,10 @@
             <a:tailEnd type="triangle"/>
           </a:ln>
         </p:spPr>
+        <p:txBody>
+          <a:bodyPr/>
+          <a:p/>
+        </p:txBody>
       </p:sp>
       <p:sp>
         <p:nvSpPr>
@@ -3187,6 +7661,10 @@
             <a:tailEnd type="triangle"/>
           </a:ln>
         </p:spPr>
+        <p:txBody>
+          <a:bodyPr/>
+          <a:p/>
+        </p:txBody>
       </p:sp>
       <p:sp>
         <p:nvSpPr>
@@ -3260,7 +7738,7 @@
                 <a:ea typeface="Calibri" pitchFamily="34" charset="-122"/>
                 <a:cs typeface="Calibri" pitchFamily="34" charset="-120"/>
               </a:rPr>
-              <a:t>NSX migration workflow  •  2/6</a:t>
+              <a:t>NSX + Palo Alto migration workflow  •  2/12</a:t>
             </a:r>
             <a:endParaRPr lang="en-US" sz="1000" dirty="0"/>
           </a:p>
@@ -3402,6 +7880,10 @@
             <a:prstDash val="solid"/>
           </a:ln>
         </p:spPr>
+        <p:txBody>
+          <a:bodyPr/>
+          <a:p/>
+        </p:txBody>
       </p:sp>
       <p:sp>
         <p:nvSpPr>
@@ -3502,6 +7984,10 @@
             <a:prstDash val="solid"/>
           </a:ln>
         </p:spPr>
+        <p:txBody>
+          <a:bodyPr/>
+          <a:p/>
+        </p:txBody>
       </p:sp>
       <p:sp>
         <p:nvSpPr>
@@ -3602,6 +8088,10 @@
             <a:prstDash val="solid"/>
           </a:ln>
         </p:spPr>
+        <p:txBody>
+          <a:bodyPr/>
+          <a:p/>
+        </p:txBody>
       </p:sp>
       <p:sp>
         <p:nvSpPr>
@@ -3653,7 +8143,7 @@
                 <a:ea typeface="Calibri" pitchFamily="34" charset="-122"/>
                 <a:cs typeface="Calibri" pitchFamily="34" charset="-120"/>
               </a:rPr>
-              <a:t>10.16.0.101 · 10.16.1.101 · …</a:t>
+              <a:t>10.7.0.101 · 10.7.1.101 · …</a:t>
             </a:r>
             <a:endParaRPr lang="en-US" sz="1800" dirty="0"/>
           </a:p>
@@ -3699,6 +8189,10 @@
             <a:tailEnd type="triangle"/>
           </a:ln>
         </p:spPr>
+        <p:txBody>
+          <a:bodyPr/>
+          <a:p/>
+        </p:txBody>
       </p:sp>
       <p:sp>
         <p:nvSpPr>
@@ -3723,6 +8217,10 @@
             <a:tailEnd type="triangle"/>
           </a:ln>
         </p:spPr>
+        <p:txBody>
+          <a:bodyPr/>
+          <a:p/>
+        </p:txBody>
       </p:sp>
       <p:sp>
         <p:nvSpPr>
@@ -3787,6 +8285,10 @@
             <a:prstDash val="solid"/>
           </a:ln>
         </p:spPr>
+        <p:txBody>
+          <a:bodyPr/>
+          <a:p/>
+        </p:txBody>
       </p:sp>
       <p:sp>
         <p:nvSpPr>
@@ -3868,6 +8370,10 @@
             <a:prstDash val="solid"/>
           </a:ln>
         </p:spPr>
+        <p:txBody>
+          <a:bodyPr/>
+          <a:p/>
+        </p:txBody>
       </p:sp>
       <p:sp>
         <p:nvSpPr>
@@ -3949,6 +8455,10 @@
             <a:prstDash val="solid"/>
           </a:ln>
         </p:spPr>
+        <p:txBody>
+          <a:bodyPr/>
+          <a:p/>
+        </p:txBody>
       </p:sp>
       <p:sp>
         <p:nvSpPr>
@@ -4078,7 +8588,7 @@
                 <a:ea typeface="Calibri" pitchFamily="34" charset="-122"/>
                 <a:cs typeface="Calibri" pitchFamily="34" charset="-120"/>
               </a:rPr>
-              <a:t>NSX migration workflow  •  3/6</a:t>
+              <a:t>NSX + Palo Alto migration workflow  •  3/12</a:t>
             </a:r>
             <a:endParaRPr lang="en-US" sz="1000" dirty="0"/>
           </a:p>
@@ -4220,6 +8730,10 @@
             <a:prstDash val="solid"/>
           </a:ln>
         </p:spPr>
+        <p:txBody>
+          <a:bodyPr/>
+          <a:p/>
+        </p:txBody>
       </p:sp>
       <p:sp>
         <p:nvSpPr>
@@ -4300,6 +8814,10 @@
             <a:tailEnd type="triangle"/>
           </a:ln>
         </p:spPr>
+        <p:txBody>
+          <a:bodyPr/>
+          <a:p/>
+        </p:txBody>
       </p:sp>
       <p:sp>
         <p:nvSpPr>
@@ -4327,6 +8845,10 @@
             <a:prstDash val="solid"/>
           </a:ln>
         </p:spPr>
+        <p:txBody>
+          <a:bodyPr/>
+          <a:p/>
+        </p:txBody>
       </p:sp>
       <p:sp>
         <p:nvSpPr>
@@ -4407,6 +8929,10 @@
             <a:tailEnd type="triangle"/>
           </a:ln>
         </p:spPr>
+        <p:txBody>
+          <a:bodyPr/>
+          <a:p/>
+        </p:txBody>
       </p:sp>
       <p:sp>
         <p:nvSpPr>
@@ -4434,6 +8960,10 @@
             <a:prstDash val="solid"/>
           </a:ln>
         </p:spPr>
+        <p:txBody>
+          <a:bodyPr/>
+          <a:p/>
+        </p:txBody>
       </p:sp>
       <p:sp>
         <p:nvSpPr>
@@ -4514,6 +9044,10 @@
             <a:tailEnd type="triangle"/>
           </a:ln>
         </p:spPr>
+        <p:txBody>
+          <a:bodyPr/>
+          <a:p/>
+        </p:txBody>
       </p:sp>
       <p:sp>
         <p:nvSpPr>
@@ -4541,6 +9075,10 @@
             <a:prstDash val="solid"/>
           </a:ln>
         </p:spPr>
+        <p:txBody>
+          <a:bodyPr/>
+          <a:p/>
+        </p:txBody>
       </p:sp>
       <p:sp>
         <p:nvSpPr>
@@ -4621,6 +9159,10 @@
             <a:tailEnd type="triangle"/>
           </a:ln>
         </p:spPr>
+        <p:txBody>
+          <a:bodyPr/>
+          <a:p/>
+        </p:txBody>
       </p:sp>
       <p:sp>
         <p:nvSpPr>
@@ -4648,6 +9190,10 @@
             <a:prstDash val="solid"/>
           </a:ln>
         </p:spPr>
+        <p:txBody>
+          <a:bodyPr/>
+          <a:p/>
+        </p:txBody>
       </p:sp>
       <p:sp>
         <p:nvSpPr>
@@ -4731,6 +9277,10 @@
             <a:prstDash val="solid"/>
           </a:ln>
         </p:spPr>
+        <p:txBody>
+          <a:bodyPr/>
+          <a:p/>
+        </p:txBody>
       </p:sp>
       <p:sp>
         <p:nvSpPr>
@@ -4814,6 +9364,10 @@
             <a:prstDash val="solid"/>
           </a:ln>
         </p:spPr>
+        <p:txBody>
+          <a:bodyPr/>
+          <a:p/>
+        </p:txBody>
       </p:sp>
       <p:sp>
         <p:nvSpPr>
@@ -4897,6 +9451,10 @@
             <a:prstDash val="solid"/>
           </a:ln>
         </p:spPr>
+        <p:txBody>
+          <a:bodyPr/>
+          <a:p/>
+        </p:txBody>
       </p:sp>
       <p:sp>
         <p:nvSpPr>
@@ -4980,6 +9538,10 @@
             <a:prstDash val="solid"/>
           </a:ln>
         </p:spPr>
+        <p:txBody>
+          <a:bodyPr/>
+          <a:p/>
+        </p:txBody>
       </p:sp>
       <p:sp>
         <p:nvSpPr>
@@ -5070,7 +9632,7 @@
                 <a:ea typeface="Calibri" pitchFamily="34" charset="-122"/>
                 <a:cs typeface="Calibri" pitchFamily="34" charset="-120"/>
               </a:rPr>
-              <a:t>NSX migration workflow  •  4/6</a:t>
+              <a:t>NSX + Palo Alto migration workflow  •  4/12</a:t>
             </a:r>
             <a:endParaRPr lang="en-US" sz="1000" dirty="0"/>
           </a:p>
@@ -5212,6 +9774,10 @@
             <a:prstDash val="solid"/>
           </a:ln>
         </p:spPr>
+        <p:txBody>
+          <a:bodyPr/>
+          <a:p/>
+        </p:txBody>
       </p:sp>
       <p:sp>
         <p:nvSpPr>
@@ -5334,6 +9900,10 @@
             <a:prstDash val="solid"/>
           </a:ln>
         </p:spPr>
+        <p:txBody>
+          <a:bodyPr/>
+          <a:p/>
+        </p:txBody>
       </p:sp>
       <p:sp>
         <p:nvSpPr>
@@ -5456,6 +10026,10 @@
             <a:prstDash val="solid"/>
           </a:ln>
         </p:spPr>
+        <p:txBody>
+          <a:bodyPr/>
+          <a:p/>
+        </p:txBody>
       </p:sp>
       <p:sp>
         <p:nvSpPr>
@@ -5578,6 +10152,10 @@
             <a:prstDash val="solid"/>
           </a:ln>
         </p:spPr>
+        <p:txBody>
+          <a:bodyPr/>
+          <a:p/>
+        </p:txBody>
       </p:sp>
       <p:sp>
         <p:nvSpPr>
@@ -5707,7 +10285,7 @@
                 <a:ea typeface="Calibri" pitchFamily="34" charset="-122"/>
                 <a:cs typeface="Calibri" pitchFamily="34" charset="-120"/>
               </a:rPr>
-              <a:t>Every result checked against the committed baseline and the source's live IPs  •  360 automated tests</a:t>
+              <a:t>Every result checked against the committed baseline and the source's live IPs  •  360 automated tests then, 444 now</a:t>
             </a:r>
             <a:endParaRPr lang="en-US" sz="1500" dirty="0"/>
           </a:p>
@@ -5746,7 +10324,7 @@
                 <a:ea typeface="Calibri" pitchFamily="34" charset="-122"/>
                 <a:cs typeface="Calibri" pitchFamily="34" charset="-120"/>
               </a:rPr>
-              <a:t>NSX migration workflow  •  5/6</a:t>
+              <a:t>NSX + Palo Alto migration workflow  •  5/12</a:t>
             </a:r>
             <a:endParaRPr lang="en-US" sz="1000" dirty="0"/>
           </a:p>
@@ -5760,14 +10338,15 @@
 </p:sld>
 </file>
 
-<file path=ppt/slides/slide6.xml><?xml version="1.0" encoding="utf-8"?>
-<p:sld xmlns:a="http://schemas.openxmlformats.org/drawingml/2006/main" xmlns:r="http://schemas.openxmlformats.org/officeDocument/2006/relationships" xmlns:p="http://schemas.openxmlformats.org/presentationml/2006/main">
-  <p:cSld name="Slide 6">
+<file path=ppt/slides/slide7.xml><?xml version="1.0" encoding="utf-8"?>
+<p:sld xmlns:a="http://schemas.openxmlformats.org/drawingml/2006/main" xmlns:p="http://schemas.openxmlformats.org/presentationml/2006/main" xmlns:r="http://schemas.openxmlformats.org/officeDocument/2006/relationships">
+  <p:cSld>
     <p:bg>
       <p:bgPr>
         <a:solidFill>
           <a:srgbClr val="11233E"/>
         </a:solidFill>
+        <a:effectLst/>
       </p:bgPr>
     </p:bg>
     <p:spTree>
@@ -5776,63 +10355,135 @@
         <p:cNvGrpSpPr/>
         <p:nvPr/>
       </p:nvGrpSpPr>
-      <p:grpSpPr>
-        <a:xfrm>
-          <a:off x="0" y="0"/>
-          <a:ext cx="0" cy="0"/>
-          <a:chOff x="0" y="0"/>
-          <a:chExt cx="0" cy="0"/>
-        </a:xfrm>
-      </p:grpSpPr>
-      <p:sp>
-        <p:nvSpPr>
-          <p:cNvPr id="2" name="Text 0"/>
-          <p:cNvSpPr txBox="1"/>
-          <p:nvPr/>
-        </p:nvSpPr>
-        <p:spPr>
-          <a:xfrm>
-            <a:off x="548640" y="457200"/>
+      <p:grpSpPr/>
+      <p:sp>
+        <p:nvSpPr>
+          <p:cNvPr id="2" name="TextBox 1"/>
+          <p:cNvSpPr txBox="1"/>
+          <p:nvPr/>
+        </p:nvSpPr>
+        <p:spPr>
+          <a:xfrm>
+            <a:off x="548640" y="1005840"/>
+            <a:ext cx="10972800" cy="914400"/>
+          </a:xfrm>
+          <a:prstGeom prst="rect">
+            <a:avLst/>
+          </a:prstGeom>
+          <a:noFill/>
+        </p:spPr>
+        <p:txBody>
+          <a:bodyPr wrap="square" lIns="0" rIns="0" tIns="0" bIns="0" anchor="t">
+            <a:spAutoFit/>
+          </a:bodyPr>
+          <a:lstStyle/>
+          <a:p>
+            <a:pPr algn="l"/>
+            <a:r>
+              <a:rPr sz="4800" b="1" i="0">
+                <a:solidFill>
+                  <a:srgbClr val="FFFFFF"/>
+                </a:solidFill>
+                <a:latin typeface="Calibri"/>
+              </a:rPr>
+              <a:t>Three sites and a firewall</a:t>
+            </a:r>
+          </a:p>
+        </p:txBody>
+      </p:sp>
+      <p:sp>
+        <p:nvSpPr>
+          <p:cNvPr id="3" name="TextBox 2"/>
+          <p:cNvSpPr txBox="1"/>
+          <p:nvPr/>
+        </p:nvSpPr>
+        <p:spPr>
+          <a:xfrm>
+            <a:off x="548640" y="1920240"/>
             <a:ext cx="10972800" cy="822960"/>
           </a:xfrm>
           <a:prstGeom prst="rect">
             <a:avLst/>
           </a:prstGeom>
           <a:noFill/>
-          <a:ln/>
-        </p:spPr>
-        <p:txBody>
-          <a:bodyPr wrap="square" lIns="0" tIns="0" rIns="0" bIns="0" rtlCol="0" anchor="ctr"/>
-          <a:lstStyle/>
-          <a:p>
-            <a:pPr indent="0" marL="0">
-              <a:buNone/>
-            </a:pPr>
-            <a:r>
-              <a:rPr lang="en-US" sz="4000" b="1" dirty="0">
-                <a:solidFill>
-                  <a:srgbClr val="FFFFFF"/>
-                </a:solidFill>
-                <a:latin typeface="Calibri" pitchFamily="34" charset="0"/>
-                <a:ea typeface="Calibri" pitchFamily="34" charset="-122"/>
-                <a:cs typeface="Calibri" pitchFamily="34" charset="-120"/>
-              </a:rPr>
-              <a:t>Open items</a:t>
-            </a:r>
-            <a:endParaRPr lang="en-US" sz="4000" dirty="0"/>
-          </a:p>
-        </p:txBody>
-      </p:sp>
-      <p:sp>
-        <p:nvSpPr>
-          <p:cNvPr id="3" name="Shape 1"/>
+        </p:spPr>
+        <p:txBody>
+          <a:bodyPr wrap="square" lIns="0" rIns="0" tIns="0" bIns="0" anchor="t">
+            <a:spAutoFit/>
+          </a:bodyPr>
+          <a:lstStyle/>
+          <a:p>
+            <a:pPr algn="l"/>
+            <a:r>
+              <a:rPr sz="2200" b="0" i="0">
+                <a:solidFill>
+                  <a:srgbClr val="BEDCE6"/>
+                </a:solidFill>
+                <a:latin typeface="Calibri"/>
+              </a:rPr>
+              <a:t>VMs leave nsx-lm1 for either nsx-lm2 or nsx-lm3. Traffic keeps flowing between all three, and through Palo Alto dg-5 in the middle.</a:t>
+            </a:r>
+          </a:p>
+        </p:txBody>
+      </p:sp>
+      <p:sp>
+        <p:nvSpPr>
+          <p:cNvPr id="4" name="Rounded Rectangle 3"/>
           <p:cNvSpPr/>
           <p:nvPr/>
         </p:nvSpPr>
         <p:spPr>
           <a:xfrm>
-            <a:off x="548640" y="1554480"/>
-            <a:ext cx="548640" cy="548640"/>
+            <a:off x="548640" y="3383280"/>
+            <a:ext cx="3520440" cy="1554480"/>
+          </a:xfrm>
+          <a:prstGeom prst="roundRect">
+            <a:avLst>
+              <a:gd name="adj" fmla="val 8333"/>
+            </a:avLst>
+          </a:prstGeom>
+          <a:solidFill>
+            <a:srgbClr val="1B3354"/>
+          </a:solidFill>
+          <a:ln w="12700">
+            <a:solidFill>
+              <a:srgbClr val="1B3354"/>
+            </a:solidFill>
+          </a:ln>
+          <a:effectLst/>
+        </p:spPr>
+        <p:style>
+          <a:lnRef idx="1">
+            <a:schemeClr val="accent1"/>
+          </a:lnRef>
+          <a:fillRef idx="3">
+            <a:schemeClr val="accent1"/>
+          </a:fillRef>
+          <a:effectRef idx="2">
+            <a:schemeClr val="accent1"/>
+          </a:effectRef>
+          <a:fontRef idx="minor">
+            <a:schemeClr val="lt1"/>
+          </a:fontRef>
+        </p:style>
+        <p:txBody>
+          <a:bodyPr rtlCol="0" anchor="ctr"/>
+          <a:lstStyle/>
+          <a:p>
+            <a:pPr algn="ctr"/>
+          </a:p>
+        </p:txBody>
+      </p:sp>
+      <p:sp>
+        <p:nvSpPr>
+          <p:cNvPr id="5" name="Oval 4"/>
+          <p:cNvSpPr/>
+          <p:nvPr/>
+        </p:nvSpPr>
+        <p:spPr>
+          <a:xfrm>
+            <a:off x="777240" y="3611880"/>
+            <a:ext cx="566928" cy="566928"/>
           </a:xfrm>
           <a:prstGeom prst="ellipse">
             <a:avLst/>
@@ -5844,115 +10495,1145 @@
             <a:solidFill>
               <a:srgbClr val="009691"/>
             </a:solidFill>
-            <a:prstDash val="solid"/>
           </a:ln>
-        </p:spPr>
-      </p:sp>
-      <p:sp>
-        <p:nvSpPr>
-          <p:cNvPr id="4" name="Text 2"/>
-          <p:cNvSpPr txBox="1"/>
-          <p:nvPr/>
-        </p:nvSpPr>
-        <p:spPr>
-          <a:xfrm>
-            <a:off x="548640" y="1554480"/>
-            <a:ext cx="548640" cy="548640"/>
-          </a:xfrm>
-          <a:prstGeom prst="rect">
-            <a:avLst/>
-          </a:prstGeom>
-          <a:noFill/>
-          <a:ln/>
-        </p:spPr>
-        <p:txBody>
-          <a:bodyPr wrap="square" lIns="0" tIns="0" rIns="0" bIns="0" rtlCol="0" anchor="ctr"/>
-          <a:lstStyle/>
-          <a:p>
-            <a:pPr algn="ctr" indent="0" marL="0">
-              <a:buNone/>
-            </a:pPr>
-            <a:r>
-              <a:rPr lang="en-US" sz="2160" b="1" dirty="0">
+          <a:effectLst/>
+        </p:spPr>
+        <p:style>
+          <a:lnRef idx="1">
+            <a:schemeClr val="accent1"/>
+          </a:lnRef>
+          <a:fillRef idx="3">
+            <a:schemeClr val="accent1"/>
+          </a:fillRef>
+          <a:effectRef idx="2">
+            <a:schemeClr val="accent1"/>
+          </a:effectRef>
+          <a:fontRef idx="minor">
+            <a:schemeClr val="lt1"/>
+          </a:fontRef>
+        </p:style>
+        <p:txBody>
+          <a:bodyPr rtlCol="0" anchor="ctr"/>
+          <a:lstStyle/>
+          <a:p>
+            <a:pPr algn="ctr"/>
+          </a:p>
+        </p:txBody>
+      </p:sp>
+      <p:sp>
+        <p:nvSpPr>
+          <p:cNvPr id="6" name="TextBox 5"/>
+          <p:cNvSpPr txBox="1"/>
+          <p:nvPr/>
+        </p:nvSpPr>
+        <p:spPr>
+          <a:xfrm>
+            <a:off x="777240" y="3611880"/>
+            <a:ext cx="566928" cy="566928"/>
+          </a:xfrm>
+          <a:prstGeom prst="rect">
+            <a:avLst/>
+          </a:prstGeom>
+          <a:noFill/>
+        </p:spPr>
+        <p:txBody>
+          <a:bodyPr wrap="square" lIns="0" rIns="0" tIns="0" bIns="0" anchor="ctr">
+            <a:spAutoFit/>
+          </a:bodyPr>
+          <a:lstStyle/>
+          <a:p>
+            <a:pPr algn="ctr"/>
+            <a:r>
+              <a:rPr sz="2200" b="1" i="0">
                 <a:solidFill>
                   <a:srgbClr val="FFFFFF"/>
                 </a:solidFill>
-                <a:latin typeface="Calibri" pitchFamily="34" charset="0"/>
-                <a:ea typeface="Calibri" pitchFamily="34" charset="-122"/>
-                <a:cs typeface="Calibri" pitchFamily="34" charset="-120"/>
+                <a:latin typeface="Calibri"/>
+              </a:rPr>
+              <a:t>3</a:t>
+            </a:r>
+          </a:p>
+        </p:txBody>
+      </p:sp>
+      <p:sp>
+        <p:nvSpPr>
+          <p:cNvPr id="7" name="TextBox 6"/>
+          <p:cNvSpPr txBox="1"/>
+          <p:nvPr/>
+        </p:nvSpPr>
+        <p:spPr>
+          <a:xfrm>
+            <a:off x="1508760" y="3611880"/>
+            <a:ext cx="2423160" cy="594360"/>
+          </a:xfrm>
+          <a:prstGeom prst="rect">
+            <a:avLst/>
+          </a:prstGeom>
+          <a:noFill/>
+        </p:spPr>
+        <p:txBody>
+          <a:bodyPr wrap="square" lIns="0" rIns="0" tIns="0" bIns="0" anchor="ctr">
+            <a:spAutoFit/>
+          </a:bodyPr>
+          <a:lstStyle/>
+          <a:p>
+            <a:pPr algn="l"/>
+            <a:r>
+              <a:rPr sz="1700" b="1" i="0">
+                <a:solidFill>
+                  <a:srgbClr val="FFFFFF"/>
+                </a:solidFill>
+                <a:latin typeface="Calibri"/>
+              </a:rPr>
+              <a:t>Third site</a:t>
+            </a:r>
+          </a:p>
+        </p:txBody>
+      </p:sp>
+      <p:sp>
+        <p:nvSpPr>
+          <p:cNvPr id="8" name="TextBox 7"/>
+          <p:cNvSpPr txBox="1"/>
+          <p:nvPr/>
+        </p:nvSpPr>
+        <p:spPr>
+          <a:xfrm>
+            <a:off x="777240" y="4343400"/>
+            <a:ext cx="3108960" cy="457200"/>
+          </a:xfrm>
+          <a:prstGeom prst="rect">
+            <a:avLst/>
+          </a:prstGeom>
+          <a:noFill/>
+        </p:spPr>
+        <p:txBody>
+          <a:bodyPr wrap="square" lIns="0" rIns="0" tIns="0" bIns="0" anchor="t">
+            <a:spAutoFit/>
+          </a:bodyPr>
+          <a:lstStyle/>
+          <a:p>
+            <a:pPr algn="l"/>
+            <a:r>
+              <a:rPr sz="1400" b="0" i="0">
+                <a:solidFill>
+                  <a:srgbClr val="BEDCE6"/>
+                </a:solidFill>
+                <a:latin typeface="Calibri"/>
+              </a:rPr>
+              <a:t>nsx-lm3 joins as a target, with its own subnet map</a:t>
+            </a:r>
+          </a:p>
+        </p:txBody>
+      </p:sp>
+      <p:sp>
+        <p:nvSpPr>
+          <p:cNvPr id="9" name="Rounded Rectangle 8"/>
+          <p:cNvSpPr/>
+          <p:nvPr/>
+        </p:nvSpPr>
+        <p:spPr>
+          <a:xfrm>
+            <a:off x="4297679" y="3383280"/>
+            <a:ext cx="3520440" cy="1554480"/>
+          </a:xfrm>
+          <a:prstGeom prst="roundRect">
+            <a:avLst>
+              <a:gd name="adj" fmla="val 8333"/>
+            </a:avLst>
+          </a:prstGeom>
+          <a:solidFill>
+            <a:srgbClr val="1B3354"/>
+          </a:solidFill>
+          <a:ln w="12700">
+            <a:solidFill>
+              <a:srgbClr val="1B3354"/>
+            </a:solidFill>
+          </a:ln>
+          <a:effectLst/>
+        </p:spPr>
+        <p:style>
+          <a:lnRef idx="1">
+            <a:schemeClr val="accent1"/>
+          </a:lnRef>
+          <a:fillRef idx="3">
+            <a:schemeClr val="accent1"/>
+          </a:fillRef>
+          <a:effectRef idx="2">
+            <a:schemeClr val="accent1"/>
+          </a:effectRef>
+          <a:fontRef idx="minor">
+            <a:schemeClr val="lt1"/>
+          </a:fontRef>
+        </p:style>
+        <p:txBody>
+          <a:bodyPr rtlCol="0" anchor="ctr"/>
+          <a:lstStyle/>
+          <a:p>
+            <a:pPr algn="ctr"/>
+          </a:p>
+        </p:txBody>
+      </p:sp>
+      <p:sp>
+        <p:nvSpPr>
+          <p:cNvPr id="10" name="Oval 9"/>
+          <p:cNvSpPr/>
+          <p:nvPr/>
+        </p:nvSpPr>
+        <p:spPr>
+          <a:xfrm>
+            <a:off x="4526279" y="3611880"/>
+            <a:ext cx="566928" cy="566928"/>
+          </a:xfrm>
+          <a:prstGeom prst="ellipse">
+            <a:avLst/>
+          </a:prstGeom>
+          <a:solidFill>
+            <a:srgbClr val="216FBD"/>
+          </a:solidFill>
+          <a:ln w="12700">
+            <a:solidFill>
+              <a:srgbClr val="216FBD"/>
+            </a:solidFill>
+          </a:ln>
+          <a:effectLst/>
+        </p:spPr>
+        <p:style>
+          <a:lnRef idx="1">
+            <a:schemeClr val="accent1"/>
+          </a:lnRef>
+          <a:fillRef idx="3">
+            <a:schemeClr val="accent1"/>
+          </a:fillRef>
+          <a:effectRef idx="2">
+            <a:schemeClr val="accent1"/>
+          </a:effectRef>
+          <a:fontRef idx="minor">
+            <a:schemeClr val="lt1"/>
+          </a:fontRef>
+        </p:style>
+        <p:txBody>
+          <a:bodyPr rtlCol="0" anchor="ctr"/>
+          <a:lstStyle/>
+          <a:p>
+            <a:pPr algn="ctr"/>
+          </a:p>
+        </p:txBody>
+      </p:sp>
+      <p:sp>
+        <p:nvSpPr>
+          <p:cNvPr id="11" name="TextBox 10"/>
+          <p:cNvSpPr txBox="1"/>
+          <p:nvPr/>
+        </p:nvSpPr>
+        <p:spPr>
+          <a:xfrm>
+            <a:off x="4526279" y="3611880"/>
+            <a:ext cx="566928" cy="566928"/>
+          </a:xfrm>
+          <a:prstGeom prst="rect">
+            <a:avLst/>
+          </a:prstGeom>
+          <a:noFill/>
+        </p:spPr>
+        <p:txBody>
+          <a:bodyPr wrap="square" lIns="0" rIns="0" tIns="0" bIns="0" anchor="ctr">
+            <a:spAutoFit/>
+          </a:bodyPr>
+          <a:lstStyle/>
+          <a:p>
+            <a:pPr algn="ctr"/>
+            <a:r>
+              <a:rPr sz="2200" b="1" i="0">
+                <a:solidFill>
+                  <a:srgbClr val="FFFFFF"/>
+                </a:solidFill>
+                <a:latin typeface="Calibri"/>
+              </a:rPr>
+              <a:t>→</a:t>
+            </a:r>
+          </a:p>
+        </p:txBody>
+      </p:sp>
+      <p:sp>
+        <p:nvSpPr>
+          <p:cNvPr id="12" name="TextBox 11"/>
+          <p:cNvSpPr txBox="1"/>
+          <p:nvPr/>
+        </p:nvSpPr>
+        <p:spPr>
+          <a:xfrm>
+            <a:off x="5257799" y="3611880"/>
+            <a:ext cx="2423160" cy="594360"/>
+          </a:xfrm>
+          <a:prstGeom prst="rect">
+            <a:avLst/>
+          </a:prstGeom>
+          <a:noFill/>
+        </p:spPr>
+        <p:txBody>
+          <a:bodyPr wrap="square" lIns="0" rIns="0" tIns="0" bIns="0" anchor="ctr">
+            <a:spAutoFit/>
+          </a:bodyPr>
+          <a:lstStyle/>
+          <a:p>
+            <a:pPr algn="l"/>
+            <a:r>
+              <a:rPr sz="1700" b="1" i="0">
+                <a:solidFill>
+                  <a:srgbClr val="FFFFFF"/>
+                </a:solidFill>
+                <a:latin typeface="Calibri"/>
+              </a:rPr>
+              <a:t>One step at a time</a:t>
+            </a:r>
+          </a:p>
+        </p:txBody>
+      </p:sp>
+      <p:sp>
+        <p:nvSpPr>
+          <p:cNvPr id="13" name="TextBox 12"/>
+          <p:cNvSpPr txBox="1"/>
+          <p:nvPr/>
+        </p:nvSpPr>
+        <p:spPr>
+          <a:xfrm>
+            <a:off x="4526279" y="4343400"/>
+            <a:ext cx="3108960" cy="457200"/>
+          </a:xfrm>
+          <a:prstGeom prst="rect">
+            <a:avLst/>
+          </a:prstGeom>
+          <a:noFill/>
+        </p:spPr>
+        <p:txBody>
+          <a:bodyPr wrap="square" lIns="0" rIns="0" tIns="0" bIns="0" anchor="t">
+            <a:spAutoFit/>
+          </a:bodyPr>
+          <a:lstStyle/>
+          <a:p>
+            <a:pPr algn="l"/>
+            <a:r>
+              <a:rPr sz="1400" b="0" i="0">
+                <a:solidFill>
+                  <a:srgbClr val="BEDCE6"/>
+                </a:solidFill>
+                <a:latin typeface="Calibri"/>
+              </a:rPr>
+              <a:t>each step runs through the existing, tested driver</a:t>
+            </a:r>
+          </a:p>
+        </p:txBody>
+      </p:sp>
+      <p:sp>
+        <p:nvSpPr>
+          <p:cNvPr id="14" name="Rounded Rectangle 13"/>
+          <p:cNvSpPr/>
+          <p:nvPr/>
+        </p:nvSpPr>
+        <p:spPr>
+          <a:xfrm>
+            <a:off x="8046719" y="3383280"/>
+            <a:ext cx="3520440" cy="1554480"/>
+          </a:xfrm>
+          <a:prstGeom prst="roundRect">
+            <a:avLst>
+              <a:gd name="adj" fmla="val 8333"/>
+            </a:avLst>
+          </a:prstGeom>
+          <a:solidFill>
+            <a:srgbClr val="1B3354"/>
+          </a:solidFill>
+          <a:ln w="12700">
+            <a:solidFill>
+              <a:srgbClr val="1B3354"/>
+            </a:solidFill>
+          </a:ln>
+          <a:effectLst/>
+        </p:spPr>
+        <p:style>
+          <a:lnRef idx="1">
+            <a:schemeClr val="accent1"/>
+          </a:lnRef>
+          <a:fillRef idx="3">
+            <a:schemeClr val="accent1"/>
+          </a:fillRef>
+          <a:effectRef idx="2">
+            <a:schemeClr val="accent1"/>
+          </a:effectRef>
+          <a:fontRef idx="minor">
+            <a:schemeClr val="lt1"/>
+          </a:fontRef>
+        </p:style>
+        <p:txBody>
+          <a:bodyPr rtlCol="0" anchor="ctr"/>
+          <a:lstStyle/>
+          <a:p>
+            <a:pPr algn="ctr"/>
+          </a:p>
+        </p:txBody>
+      </p:sp>
+      <p:sp>
+        <p:nvSpPr>
+          <p:cNvPr id="15" name="Oval 14"/>
+          <p:cNvSpPr/>
+          <p:nvPr/>
+        </p:nvSpPr>
+        <p:spPr>
+          <a:xfrm>
+            <a:off x="8275319" y="3611880"/>
+            <a:ext cx="566928" cy="566928"/>
+          </a:xfrm>
+          <a:prstGeom prst="ellipse">
+            <a:avLst/>
+          </a:prstGeom>
+          <a:solidFill>
+            <a:srgbClr val="6B4FA8"/>
+          </a:solidFill>
+          <a:ln w="12700">
+            <a:solidFill>
+              <a:srgbClr val="6B4FA8"/>
+            </a:solidFill>
+          </a:ln>
+          <a:effectLst/>
+        </p:spPr>
+        <p:style>
+          <a:lnRef idx="1">
+            <a:schemeClr val="accent1"/>
+          </a:lnRef>
+          <a:fillRef idx="3">
+            <a:schemeClr val="accent1"/>
+          </a:fillRef>
+          <a:effectRef idx="2">
+            <a:schemeClr val="accent1"/>
+          </a:effectRef>
+          <a:fontRef idx="minor">
+            <a:schemeClr val="lt1"/>
+          </a:fontRef>
+        </p:style>
+        <p:txBody>
+          <a:bodyPr rtlCol="0" anchor="ctr"/>
+          <a:lstStyle/>
+          <a:p>
+            <a:pPr algn="ctr"/>
+          </a:p>
+        </p:txBody>
+      </p:sp>
+      <p:sp>
+        <p:nvSpPr>
+          <p:cNvPr id="16" name="TextBox 15"/>
+          <p:cNvSpPr txBox="1"/>
+          <p:nvPr/>
+        </p:nvSpPr>
+        <p:spPr>
+          <a:xfrm>
+            <a:off x="8275319" y="3611880"/>
+            <a:ext cx="566928" cy="566928"/>
+          </a:xfrm>
+          <a:prstGeom prst="rect">
+            <a:avLst/>
+          </a:prstGeom>
+          <a:noFill/>
+        </p:spPr>
+        <p:txBody>
+          <a:bodyPr wrap="square" lIns="0" rIns="0" tIns="0" bIns="0" anchor="ctr">
+            <a:spAutoFit/>
+          </a:bodyPr>
+          <a:lstStyle/>
+          <a:p>
+            <a:pPr algn="ctr"/>
+            <a:r>
+              <a:rPr sz="2200" b="1" i="0">
+                <a:solidFill>
+                  <a:srgbClr val="FFFFFF"/>
+                </a:solidFill>
+                <a:latin typeface="Calibri"/>
+              </a:rPr>
+              <a:t>P</a:t>
+            </a:r>
+          </a:p>
+        </p:txBody>
+      </p:sp>
+      <p:sp>
+        <p:nvSpPr>
+          <p:cNvPr id="17" name="TextBox 16"/>
+          <p:cNvSpPr txBox="1"/>
+          <p:nvPr/>
+        </p:nvSpPr>
+        <p:spPr>
+          <a:xfrm>
+            <a:off x="9006840" y="3611880"/>
+            <a:ext cx="2423160" cy="594360"/>
+          </a:xfrm>
+          <a:prstGeom prst="rect">
+            <a:avLst/>
+          </a:prstGeom>
+          <a:noFill/>
+        </p:spPr>
+        <p:txBody>
+          <a:bodyPr wrap="square" lIns="0" rIns="0" tIns="0" bIns="0" anchor="ctr">
+            <a:spAutoFit/>
+          </a:bodyPr>
+          <a:lstStyle/>
+          <a:p>
+            <a:pPr algn="l"/>
+            <a:r>
+              <a:rPr sz="1700" b="1" i="0">
+                <a:solidFill>
+                  <a:srgbClr val="FFFFFF"/>
+                </a:solidFill>
+                <a:latin typeface="Calibri"/>
+              </a:rPr>
+              <a:t>Palo mirrors NSX</a:t>
+            </a:r>
+          </a:p>
+        </p:txBody>
+      </p:sp>
+      <p:sp>
+        <p:nvSpPr>
+          <p:cNvPr id="18" name="TextBox 17"/>
+          <p:cNvSpPr txBox="1"/>
+          <p:nvPr/>
+        </p:nvSpPr>
+        <p:spPr>
+          <a:xfrm>
+            <a:off x="8275319" y="4343400"/>
+            <a:ext cx="3108960" cy="457200"/>
+          </a:xfrm>
+          <a:prstGeom prst="rect">
+            <a:avLst/>
+          </a:prstGeom>
+          <a:noFill/>
+        </p:spPr>
+        <p:txBody>
+          <a:bodyPr wrap="square" lIns="0" rIns="0" tIns="0" bIns="0" anchor="t">
+            <a:spAutoFit/>
+          </a:bodyPr>
+          <a:lstStyle/>
+          <a:p>
+            <a:pPr algn="l"/>
+            <a:r>
+              <a:rPr sz="1400" b="0" i="0">
+                <a:solidFill>
+                  <a:srgbClr val="BEDCE6"/>
+                </a:solidFill>
+                <a:latin typeface="Calibri"/>
+              </a:rPr>
+              <a:t>same group types and tags on dg-5, REST API only</a:t>
+            </a:r>
+          </a:p>
+        </p:txBody>
+      </p:sp>
+      <p:sp>
+        <p:nvSpPr>
+          <p:cNvPr id="19" name="TextBox 18"/>
+          <p:cNvSpPr txBox="1"/>
+          <p:nvPr/>
+        </p:nvSpPr>
+        <p:spPr>
+          <a:xfrm>
+            <a:off x="548640" y="6400800"/>
+            <a:ext cx="5486400" cy="274320"/>
+          </a:xfrm>
+          <a:prstGeom prst="rect">
+            <a:avLst/>
+          </a:prstGeom>
+          <a:noFill/>
+        </p:spPr>
+        <p:txBody>
+          <a:bodyPr wrap="square" lIns="0" rIns="0" tIns="0" bIns="0" anchor="ctr">
+            <a:spAutoFit/>
+          </a:bodyPr>
+          <a:lstStyle/>
+          <a:p>
+            <a:pPr algn="l"/>
+            <a:r>
+              <a:rPr sz="1000" b="0" i="0">
+                <a:solidFill>
+                  <a:srgbClr val="BEDCE6"/>
+                </a:solidFill>
+                <a:latin typeface="Calibri"/>
+              </a:rPr>
+              <a:t>NSX + Palo Alto migration workflow  •  6/12</a:t>
+            </a:r>
+          </a:p>
+        </p:txBody>
+      </p:sp>
+    </p:spTree>
+  </p:cSld>
+  <p:clrMapOvr>
+    <a:masterClrMapping/>
+  </p:clrMapOvr>
+</p:sld>
+</file>
+
+<file path=ppt/slides/slide8.xml><?xml version="1.0" encoding="utf-8"?>
+<p:sld xmlns:a="http://schemas.openxmlformats.org/drawingml/2006/main" xmlns:p="http://schemas.openxmlformats.org/presentationml/2006/main" xmlns:r="http://schemas.openxmlformats.org/officeDocument/2006/relationships">
+  <p:cSld>
+    <p:bg>
+      <p:bgPr>
+        <a:solidFill>
+          <a:srgbClr val="FFFFFF"/>
+        </a:solidFill>
+        <a:effectLst/>
+      </p:bgPr>
+    </p:bg>
+    <p:spTree>
+      <p:nvGrpSpPr>
+        <p:cNvPr id="1" name=""/>
+        <p:cNvGrpSpPr/>
+        <p:nvPr/>
+      </p:nvGrpSpPr>
+      <p:grpSpPr/>
+      <p:sp>
+        <p:nvSpPr>
+          <p:cNvPr id="2" name="TextBox 1"/>
+          <p:cNvSpPr txBox="1"/>
+          <p:nvPr/>
+        </p:nvSpPr>
+        <p:spPr>
+          <a:xfrm>
+            <a:off x="548640" y="365760"/>
+            <a:ext cx="11064240" cy="731520"/>
+          </a:xfrm>
+          <a:prstGeom prst="rect">
+            <a:avLst/>
+          </a:prstGeom>
+          <a:noFill/>
+        </p:spPr>
+        <p:txBody>
+          <a:bodyPr wrap="square" lIns="0" rIns="0" tIns="0" bIns="0" anchor="t">
+            <a:spAutoFit/>
+          </a:bodyPr>
+          <a:lstStyle/>
+          <a:p>
+            <a:pPr algn="l"/>
+            <a:r>
+              <a:rPr sz="3600" b="1" i="0">
+                <a:solidFill>
+                  <a:srgbClr val="11233E"/>
+                </a:solidFill>
+                <a:latin typeface="Calibri"/>
+              </a:rPr>
+              <a:t>A VM can land on either site</a:t>
+            </a:r>
+          </a:p>
+        </p:txBody>
+      </p:sp>
+      <p:sp>
+        <p:nvSpPr>
+          <p:cNvPr id="3" name="TextBox 2"/>
+          <p:cNvSpPr txBox="1"/>
+          <p:nvPr/>
+        </p:nvSpPr>
+        <p:spPr>
+          <a:xfrm>
+            <a:off x="548640" y="1051560"/>
+            <a:ext cx="11064240" cy="411480"/>
+          </a:xfrm>
+          <a:prstGeom prst="rect">
+            <a:avLst/>
+          </a:prstGeom>
+          <a:noFill/>
+        </p:spPr>
+        <p:txBody>
+          <a:bodyPr wrap="square" lIns="0" rIns="0" tIns="0" bIns="0" anchor="t">
+            <a:spAutoFit/>
+          </a:bodyPr>
+          <a:lstStyle/>
+          <a:p>
+            <a:pPr algn="l"/>
+            <a:r>
+              <a:rPr sz="1700" b="0" i="0">
+                <a:solidFill>
+                  <a:srgbClr val="5C6C7E"/>
+                </a:solidFill>
+                <a:latin typeface="Calibri"/>
+              </a:rPr>
+              <a:t>Every manager holds the addresses of the other two sites as IP-only sibling groups</a:t>
+            </a:r>
+          </a:p>
+        </p:txBody>
+      </p:sp>
+      <p:sp>
+        <p:nvSpPr>
+          <p:cNvPr id="4" name="Rounded Rectangle 3"/>
+          <p:cNvSpPr/>
+          <p:nvPr/>
+        </p:nvSpPr>
+        <p:spPr>
+          <a:xfrm>
+            <a:off x="548640" y="2514600"/>
+            <a:ext cx="3154680" cy="1600200"/>
+          </a:xfrm>
+          <a:prstGeom prst="roundRect">
+            <a:avLst>
+              <a:gd name="adj" fmla="val 8333"/>
+            </a:avLst>
+          </a:prstGeom>
+          <a:solidFill>
+            <a:srgbClr val="F2F6FA"/>
+          </a:solidFill>
+          <a:ln w="12700">
+            <a:solidFill>
+              <a:srgbClr val="D5DDE6"/>
+            </a:solidFill>
+          </a:ln>
+          <a:effectLst/>
+        </p:spPr>
+        <p:style>
+          <a:lnRef idx="1">
+            <a:schemeClr val="accent1"/>
+          </a:lnRef>
+          <a:fillRef idx="3">
+            <a:schemeClr val="accent1"/>
+          </a:fillRef>
+          <a:effectRef idx="2">
+            <a:schemeClr val="accent1"/>
+          </a:effectRef>
+          <a:fontRef idx="minor">
+            <a:schemeClr val="lt1"/>
+          </a:fontRef>
+        </p:style>
+        <p:txBody>
+          <a:bodyPr rtlCol="0" anchor="ctr"/>
+          <a:lstStyle/>
+          <a:p>
+            <a:pPr algn="ctr"/>
+          </a:p>
+        </p:txBody>
+      </p:sp>
+      <p:sp>
+        <p:nvSpPr>
+          <p:cNvPr id="5" name="Oval 4"/>
+          <p:cNvSpPr/>
+          <p:nvPr/>
+        </p:nvSpPr>
+        <p:spPr>
+          <a:xfrm>
+            <a:off x="777240" y="2743200"/>
+            <a:ext cx="457200" cy="457200"/>
+          </a:xfrm>
+          <a:prstGeom prst="ellipse">
+            <a:avLst/>
+          </a:prstGeom>
+          <a:solidFill>
+            <a:srgbClr val="216FBD"/>
+          </a:solidFill>
+          <a:ln w="12700">
+            <a:solidFill>
+              <a:srgbClr val="216FBD"/>
+            </a:solidFill>
+          </a:ln>
+          <a:effectLst/>
+        </p:spPr>
+        <p:style>
+          <a:lnRef idx="1">
+            <a:schemeClr val="accent1"/>
+          </a:lnRef>
+          <a:fillRef idx="3">
+            <a:schemeClr val="accent1"/>
+          </a:fillRef>
+          <a:effectRef idx="2">
+            <a:schemeClr val="accent1"/>
+          </a:effectRef>
+          <a:fontRef idx="minor">
+            <a:schemeClr val="lt1"/>
+          </a:fontRef>
+        </p:style>
+        <p:txBody>
+          <a:bodyPr rtlCol="0" anchor="ctr"/>
+          <a:lstStyle/>
+          <a:p>
+            <a:pPr algn="ctr"/>
+          </a:p>
+        </p:txBody>
+      </p:sp>
+      <p:sp>
+        <p:nvSpPr>
+          <p:cNvPr id="6" name="TextBox 5"/>
+          <p:cNvSpPr txBox="1"/>
+          <p:nvPr/>
+        </p:nvSpPr>
+        <p:spPr>
+          <a:xfrm>
+            <a:off x="777240" y="2743200"/>
+            <a:ext cx="457200" cy="457200"/>
+          </a:xfrm>
+          <a:prstGeom prst="rect">
+            <a:avLst/>
+          </a:prstGeom>
+          <a:noFill/>
+        </p:spPr>
+        <p:txBody>
+          <a:bodyPr wrap="square" lIns="0" rIns="0" tIns="0" bIns="0" anchor="ctr">
+            <a:spAutoFit/>
+          </a:bodyPr>
+          <a:lstStyle/>
+          <a:p>
+            <a:pPr algn="ctr"/>
+            <a:r>
+              <a:rPr sz="1800" b="1" i="0">
+                <a:solidFill>
+                  <a:srgbClr val="FFFFFF"/>
+                </a:solidFill>
+                <a:latin typeface="Calibri"/>
               </a:rPr>
               <a:t>1</a:t>
             </a:r>
-            <a:endParaRPr lang="en-US" sz="2160" dirty="0"/>
-          </a:p>
-        </p:txBody>
-      </p:sp>
-      <p:sp>
-        <p:nvSpPr>
-          <p:cNvPr id="5" name="Text 3"/>
-          <p:cNvSpPr txBox="1"/>
-          <p:nvPr/>
-        </p:nvSpPr>
-        <p:spPr>
-          <a:xfrm>
-            <a:off x="1325880" y="1463040"/>
-            <a:ext cx="10058400" cy="777240"/>
-          </a:xfrm>
-          <a:prstGeom prst="rect">
-            <a:avLst/>
-          </a:prstGeom>
-          <a:noFill/>
-          <a:ln/>
-        </p:spPr>
-        <p:txBody>
-          <a:bodyPr wrap="square" lIns="0" tIns="0" rIns="0" bIns="0" rtlCol="0" anchor="ctr"/>
-          <a:lstStyle/>
-          <a:p>
-            <a:pPr indent="0" marL="0">
-              <a:buNone/>
-            </a:pPr>
-            <a:r>
-              <a:rPr lang="en-US" sz="1900" b="1" dirty="0">
+          </a:p>
+        </p:txBody>
+      </p:sp>
+      <p:sp>
+        <p:nvSpPr>
+          <p:cNvPr id="7" name="TextBox 6"/>
+          <p:cNvSpPr txBox="1"/>
+          <p:nvPr/>
+        </p:nvSpPr>
+        <p:spPr>
+          <a:xfrm>
+            <a:off x="1371600" y="2697480"/>
+            <a:ext cx="2194560" cy="548640"/>
+          </a:xfrm>
+          <a:prstGeom prst="rect">
+            <a:avLst/>
+          </a:prstGeom>
+          <a:noFill/>
+        </p:spPr>
+        <p:txBody>
+          <a:bodyPr wrap="square" lIns="0" rIns="0" tIns="0" bIns="0" anchor="ctr">
+            <a:spAutoFit/>
+          </a:bodyPr>
+          <a:lstStyle/>
+          <a:p>
+            <a:pPr algn="l"/>
+            <a:r>
+              <a:rPr sz="1900" b="1" i="0">
+                <a:solidFill>
+                  <a:srgbClr val="11233E"/>
+                </a:solidFill>
+                <a:latin typeface="Calibri"/>
+              </a:rPr>
+              <a:t>nsx-lm1</a:t>
+            </a:r>
+          </a:p>
+          <a:p>
+            <a:pPr algn="l"/>
+            <a:r>
+              <a:rPr sz="1300" b="0" i="0">
+                <a:solidFill>
+                  <a:srgbClr val="5C6C7E"/>
+                </a:solidFill>
+                <a:latin typeface="Calibri"/>
+              </a:rPr>
+              <a:t>source  ·  10.6.0.0/16</a:t>
+            </a:r>
+          </a:p>
+        </p:txBody>
+      </p:sp>
+      <p:sp>
+        <p:nvSpPr>
+          <p:cNvPr id="8" name="TextBox 7"/>
+          <p:cNvSpPr txBox="1"/>
+          <p:nvPr/>
+        </p:nvSpPr>
+        <p:spPr>
+          <a:xfrm>
+            <a:off x="777240" y="3429000"/>
+            <a:ext cx="2743200" cy="502920"/>
+          </a:xfrm>
+          <a:prstGeom prst="rect">
+            <a:avLst/>
+          </a:prstGeom>
+          <a:noFill/>
+        </p:spPr>
+        <p:txBody>
+          <a:bodyPr wrap="square" lIns="0" rIns="0" tIns="0" bIns="0" anchor="ctr">
+            <a:spAutoFit/>
+          </a:bodyPr>
+          <a:lstStyle/>
+          <a:p>
+            <a:pPr algn="l"/>
+            <a:r>
+              <a:rPr sz="1500" b="1" i="0">
+                <a:solidFill>
+                  <a:srgbClr val="216FBD"/>
+                </a:solidFill>
+                <a:latin typeface="Calibri"/>
+              </a:rPr>
+              <a:t>holds lm2 + lm3 addresses</a:t>
+            </a:r>
+          </a:p>
+        </p:txBody>
+      </p:sp>
+      <p:sp>
+        <p:nvSpPr>
+          <p:cNvPr id="9" name="Rounded Rectangle 8"/>
+          <p:cNvSpPr/>
+          <p:nvPr/>
+        </p:nvSpPr>
+        <p:spPr>
+          <a:xfrm>
+            <a:off x="8458200" y="1691640"/>
+            <a:ext cx="3154680" cy="1600200"/>
+          </a:xfrm>
+          <a:prstGeom prst="roundRect">
+            <a:avLst>
+              <a:gd name="adj" fmla="val 8333"/>
+            </a:avLst>
+          </a:prstGeom>
+          <a:solidFill>
+            <a:srgbClr val="F2F6FA"/>
+          </a:solidFill>
+          <a:ln w="12700">
+            <a:solidFill>
+              <a:srgbClr val="D5DDE6"/>
+            </a:solidFill>
+          </a:ln>
+          <a:effectLst/>
+        </p:spPr>
+        <p:style>
+          <a:lnRef idx="1">
+            <a:schemeClr val="accent1"/>
+          </a:lnRef>
+          <a:fillRef idx="3">
+            <a:schemeClr val="accent1"/>
+          </a:fillRef>
+          <a:effectRef idx="2">
+            <a:schemeClr val="accent1"/>
+          </a:effectRef>
+          <a:fontRef idx="minor">
+            <a:schemeClr val="lt1"/>
+          </a:fontRef>
+        </p:style>
+        <p:txBody>
+          <a:bodyPr rtlCol="0" anchor="ctr"/>
+          <a:lstStyle/>
+          <a:p>
+            <a:pPr algn="ctr"/>
+          </a:p>
+        </p:txBody>
+      </p:sp>
+      <p:sp>
+        <p:nvSpPr>
+          <p:cNvPr id="10" name="Oval 9"/>
+          <p:cNvSpPr/>
+          <p:nvPr/>
+        </p:nvSpPr>
+        <p:spPr>
+          <a:xfrm>
+            <a:off x="8686800" y="1920240"/>
+            <a:ext cx="457200" cy="457200"/>
+          </a:xfrm>
+          <a:prstGeom prst="ellipse">
+            <a:avLst/>
+          </a:prstGeom>
+          <a:solidFill>
+            <a:srgbClr val="27965B"/>
+          </a:solidFill>
+          <a:ln w="12700">
+            <a:solidFill>
+              <a:srgbClr val="27965B"/>
+            </a:solidFill>
+          </a:ln>
+          <a:effectLst/>
+        </p:spPr>
+        <p:style>
+          <a:lnRef idx="1">
+            <a:schemeClr val="accent1"/>
+          </a:lnRef>
+          <a:fillRef idx="3">
+            <a:schemeClr val="accent1"/>
+          </a:fillRef>
+          <a:effectRef idx="2">
+            <a:schemeClr val="accent1"/>
+          </a:effectRef>
+          <a:fontRef idx="minor">
+            <a:schemeClr val="lt1"/>
+          </a:fontRef>
+        </p:style>
+        <p:txBody>
+          <a:bodyPr rtlCol="0" anchor="ctr"/>
+          <a:lstStyle/>
+          <a:p>
+            <a:pPr algn="ctr"/>
+          </a:p>
+        </p:txBody>
+      </p:sp>
+      <p:sp>
+        <p:nvSpPr>
+          <p:cNvPr id="11" name="TextBox 10"/>
+          <p:cNvSpPr txBox="1"/>
+          <p:nvPr/>
+        </p:nvSpPr>
+        <p:spPr>
+          <a:xfrm>
+            <a:off x="8686800" y="1920240"/>
+            <a:ext cx="457200" cy="457200"/>
+          </a:xfrm>
+          <a:prstGeom prst="rect">
+            <a:avLst/>
+          </a:prstGeom>
+          <a:noFill/>
+        </p:spPr>
+        <p:txBody>
+          <a:bodyPr wrap="square" lIns="0" rIns="0" tIns="0" bIns="0" anchor="ctr">
+            <a:spAutoFit/>
+          </a:bodyPr>
+          <a:lstStyle/>
+          <a:p>
+            <a:pPr algn="ctr"/>
+            <a:r>
+              <a:rPr sz="1800" b="1" i="0">
                 <a:solidFill>
                   <a:srgbClr val="FFFFFF"/>
                 </a:solidFill>
-                <a:latin typeface="Calibri" pitchFamily="34" charset="0"/>
-                <a:ea typeface="Calibri" pitchFamily="34" charset="-122"/>
-                <a:cs typeface="Calibri" pitchFamily="34" charset="-120"/>
-              </a:rPr>
-              <a:t>C: cover nested and segment-based groups</a:t>
-            </a:r>
-            <a:endParaRPr lang="en-US" sz="1900" dirty="0"/>
-          </a:p>
-          <a:p>
-            <a:pPr indent="0" marL="0">
-              <a:buNone/>
-            </a:pPr>
-            <a:r>
-              <a:rPr lang="en-US" sz="1400" dirty="0">
-                <a:solidFill>
-                  <a:srgbClr val="BEDCE6"/>
-                </a:solidFill>
-                <a:latin typeface="Calibri" pitchFamily="34" charset="0"/>
-                <a:ea typeface="Calibri" pitchFamily="34" charset="-122"/>
-                <a:cs typeface="Calibri" pitchFamily="34" charset="-120"/>
-              </a:rPr>
-              <a:t>they get no _np_ips group today, so rules using them miss source IPs</a:t>
-            </a:r>
-            <a:endParaRPr lang="en-US" sz="1900" dirty="0"/>
-          </a:p>
-        </p:txBody>
-      </p:sp>
-      <p:sp>
-        <p:nvSpPr>
-          <p:cNvPr id="6" name="Shape 4"/>
+                <a:latin typeface="Calibri"/>
+              </a:rPr>
+              <a:t>2</a:t>
+            </a:r>
+          </a:p>
+        </p:txBody>
+      </p:sp>
+      <p:sp>
+        <p:nvSpPr>
+          <p:cNvPr id="12" name="TextBox 11"/>
+          <p:cNvSpPr txBox="1"/>
+          <p:nvPr/>
+        </p:nvSpPr>
+        <p:spPr>
+          <a:xfrm>
+            <a:off x="9281160" y="1874520"/>
+            <a:ext cx="2194560" cy="548640"/>
+          </a:xfrm>
+          <a:prstGeom prst="rect">
+            <a:avLst/>
+          </a:prstGeom>
+          <a:noFill/>
+        </p:spPr>
+        <p:txBody>
+          <a:bodyPr wrap="square" lIns="0" rIns="0" tIns="0" bIns="0" anchor="ctr">
+            <a:spAutoFit/>
+          </a:bodyPr>
+          <a:lstStyle/>
+          <a:p>
+            <a:pPr algn="l"/>
+            <a:r>
+              <a:rPr sz="1900" b="1" i="0">
+                <a:solidFill>
+                  <a:srgbClr val="11233E"/>
+                </a:solidFill>
+                <a:latin typeface="Calibri"/>
+              </a:rPr>
+              <a:t>nsx-lm2</a:t>
+            </a:r>
+          </a:p>
+          <a:p>
+            <a:pPr algn="l"/>
+            <a:r>
+              <a:rPr sz="1300" b="0" i="0">
+                <a:solidFill>
+                  <a:srgbClr val="5C6C7E"/>
+                </a:solidFill>
+                <a:latin typeface="Calibri"/>
+              </a:rPr>
+              <a:t>AVS  ·  10.7.0.0/16</a:t>
+            </a:r>
+          </a:p>
+        </p:txBody>
+      </p:sp>
+      <p:sp>
+        <p:nvSpPr>
+          <p:cNvPr id="13" name="TextBox 12"/>
+          <p:cNvSpPr txBox="1"/>
+          <p:nvPr/>
+        </p:nvSpPr>
+        <p:spPr>
+          <a:xfrm>
+            <a:off x="8686800" y="2606040"/>
+            <a:ext cx="2743200" cy="502920"/>
+          </a:xfrm>
+          <a:prstGeom prst="rect">
+            <a:avLst/>
+          </a:prstGeom>
+          <a:noFill/>
+        </p:spPr>
+        <p:txBody>
+          <a:bodyPr wrap="square" lIns="0" rIns="0" tIns="0" bIns="0" anchor="ctr">
+            <a:spAutoFit/>
+          </a:bodyPr>
+          <a:lstStyle/>
+          <a:p>
+            <a:pPr algn="l"/>
+            <a:r>
+              <a:rPr sz="1500" b="1" i="0">
+                <a:solidFill>
+                  <a:srgbClr val="27965B"/>
+                </a:solidFill>
+                <a:latin typeface="Calibri"/>
+              </a:rPr>
+              <a:t>holds lm1 + lm3 addresses</a:t>
+            </a:r>
+          </a:p>
+        </p:txBody>
+      </p:sp>
+      <p:sp>
+        <p:nvSpPr>
+          <p:cNvPr id="14" name="Rounded Rectangle 13"/>
           <p:cNvSpPr/>
           <p:nvPr/>
         </p:nvSpPr>
         <p:spPr>
           <a:xfrm>
-            <a:off x="548640" y="2423160"/>
-            <a:ext cx="548640" cy="548640"/>
+            <a:off x="8458200" y="3794760"/>
+            <a:ext cx="3154680" cy="1600200"/>
+          </a:xfrm>
+          <a:prstGeom prst="roundRect">
+            <a:avLst>
+              <a:gd name="adj" fmla="val 8333"/>
+            </a:avLst>
+          </a:prstGeom>
+          <a:solidFill>
+            <a:srgbClr val="F2F6FA"/>
+          </a:solidFill>
+          <a:ln w="12700">
+            <a:solidFill>
+              <a:srgbClr val="D5DDE6"/>
+            </a:solidFill>
+          </a:ln>
+          <a:effectLst/>
+        </p:spPr>
+        <p:style>
+          <a:lnRef idx="1">
+            <a:schemeClr val="accent1"/>
+          </a:lnRef>
+          <a:fillRef idx="3">
+            <a:schemeClr val="accent1"/>
+          </a:fillRef>
+          <a:effectRef idx="2">
+            <a:schemeClr val="accent1"/>
+          </a:effectRef>
+          <a:fontRef idx="minor">
+            <a:schemeClr val="lt1"/>
+          </a:fontRef>
+        </p:style>
+        <p:txBody>
+          <a:bodyPr rtlCol="0" anchor="ctr"/>
+          <a:lstStyle/>
+          <a:p>
+            <a:pPr algn="ctr"/>
+          </a:p>
+        </p:txBody>
+      </p:sp>
+      <p:sp>
+        <p:nvSpPr>
+          <p:cNvPr id="15" name="Oval 14"/>
+          <p:cNvSpPr/>
+          <p:nvPr/>
+        </p:nvSpPr>
+        <p:spPr>
+          <a:xfrm>
+            <a:off x="8686800" y="4023360"/>
+            <a:ext cx="457200" cy="457200"/>
           </a:xfrm>
           <a:prstGeom prst="ellipse">
             <a:avLst/>
@@ -5964,118 +11645,794 @@
             <a:solidFill>
               <a:srgbClr val="EB852D"/>
             </a:solidFill>
-            <a:prstDash val="solid"/>
           </a:ln>
-        </p:spPr>
-      </p:sp>
-      <p:sp>
-        <p:nvSpPr>
-          <p:cNvPr id="7" name="Text 5"/>
-          <p:cNvSpPr txBox="1"/>
-          <p:nvPr/>
-        </p:nvSpPr>
-        <p:spPr>
-          <a:xfrm>
-            <a:off x="548640" y="2423160"/>
-            <a:ext cx="548640" cy="548640"/>
-          </a:xfrm>
-          <a:prstGeom prst="rect">
-            <a:avLst/>
-          </a:prstGeom>
-          <a:noFill/>
-          <a:ln/>
-        </p:spPr>
-        <p:txBody>
-          <a:bodyPr wrap="square" lIns="0" tIns="0" rIns="0" bIns="0" rtlCol="0" anchor="ctr"/>
-          <a:lstStyle/>
-          <a:p>
-            <a:pPr algn="ctr" indent="0" marL="0">
-              <a:buNone/>
-            </a:pPr>
-            <a:r>
-              <a:rPr lang="en-US" sz="2160" b="1" dirty="0">
+          <a:effectLst/>
+        </p:spPr>
+        <p:style>
+          <a:lnRef idx="1">
+            <a:schemeClr val="accent1"/>
+          </a:lnRef>
+          <a:fillRef idx="3">
+            <a:schemeClr val="accent1"/>
+          </a:fillRef>
+          <a:effectRef idx="2">
+            <a:schemeClr val="accent1"/>
+          </a:effectRef>
+          <a:fontRef idx="minor">
+            <a:schemeClr val="lt1"/>
+          </a:fontRef>
+        </p:style>
+        <p:txBody>
+          <a:bodyPr rtlCol="0" anchor="ctr"/>
+          <a:lstStyle/>
+          <a:p>
+            <a:pPr algn="ctr"/>
+          </a:p>
+        </p:txBody>
+      </p:sp>
+      <p:sp>
+        <p:nvSpPr>
+          <p:cNvPr id="16" name="TextBox 15"/>
+          <p:cNvSpPr txBox="1"/>
+          <p:nvPr/>
+        </p:nvSpPr>
+        <p:spPr>
+          <a:xfrm>
+            <a:off x="8686800" y="4023360"/>
+            <a:ext cx="457200" cy="457200"/>
+          </a:xfrm>
+          <a:prstGeom prst="rect">
+            <a:avLst/>
+          </a:prstGeom>
+          <a:noFill/>
+        </p:spPr>
+        <p:txBody>
+          <a:bodyPr wrap="square" lIns="0" rIns="0" tIns="0" bIns="0" anchor="ctr">
+            <a:spAutoFit/>
+          </a:bodyPr>
+          <a:lstStyle/>
+          <a:p>
+            <a:pPr algn="ctr"/>
+            <a:r>
+              <a:rPr sz="1800" b="1" i="0">
                 <a:solidFill>
                   <a:srgbClr val="FFFFFF"/>
                 </a:solidFill>
-                <a:latin typeface="Calibri" pitchFamily="34" charset="0"/>
-                <a:ea typeface="Calibri" pitchFamily="34" charset="-122"/>
-                <a:cs typeface="Calibri" pitchFamily="34" charset="-120"/>
-              </a:rPr>
-              <a:t>2</a:t>
-            </a:r>
-            <a:endParaRPr lang="en-US" sz="2160" dirty="0"/>
-          </a:p>
-        </p:txBody>
-      </p:sp>
-      <p:sp>
-        <p:nvSpPr>
-          <p:cNvPr id="8" name="Text 6"/>
-          <p:cNvSpPr txBox="1"/>
-          <p:nvPr/>
-        </p:nvSpPr>
-        <p:spPr>
-          <a:xfrm>
-            <a:off x="1325880" y="2331720"/>
-            <a:ext cx="10058400" cy="777240"/>
-          </a:xfrm>
-          <a:prstGeom prst="rect">
-            <a:avLst/>
-          </a:prstGeom>
-          <a:noFill/>
-          <a:ln/>
-        </p:spPr>
-        <p:txBody>
-          <a:bodyPr wrap="square" lIns="0" tIns="0" rIns="0" bIns="0" rtlCol="0" anchor="ctr"/>
-          <a:lstStyle/>
-          <a:p>
-            <a:pPr indent="0" marL="0">
-              <a:buNone/>
-            </a:pPr>
-            <a:r>
-              <a:rPr lang="en-US" sz="1900" b="1" dirty="0">
+                <a:latin typeface="Calibri"/>
+              </a:rPr>
+              <a:t>3</a:t>
+            </a:r>
+          </a:p>
+        </p:txBody>
+      </p:sp>
+      <p:sp>
+        <p:nvSpPr>
+          <p:cNvPr id="17" name="TextBox 16"/>
+          <p:cNvSpPr txBox="1"/>
+          <p:nvPr/>
+        </p:nvSpPr>
+        <p:spPr>
+          <a:xfrm>
+            <a:off x="9281160" y="3977640"/>
+            <a:ext cx="2194560" cy="548640"/>
+          </a:xfrm>
+          <a:prstGeom prst="rect">
+            <a:avLst/>
+          </a:prstGeom>
+          <a:noFill/>
+        </p:spPr>
+        <p:txBody>
+          <a:bodyPr wrap="square" lIns="0" rIns="0" tIns="0" bIns="0" anchor="ctr">
+            <a:spAutoFit/>
+          </a:bodyPr>
+          <a:lstStyle/>
+          <a:p>
+            <a:pPr algn="l"/>
+            <a:r>
+              <a:rPr sz="1900" b="1" i="0">
+                <a:solidFill>
+                  <a:srgbClr val="11233E"/>
+                </a:solidFill>
+                <a:latin typeface="Calibri"/>
+              </a:rPr>
+              <a:t>nsx-lm3</a:t>
+            </a:r>
+          </a:p>
+          <a:p>
+            <a:pPr algn="l"/>
+            <a:r>
+              <a:rPr sz="1300" b="0" i="0">
+                <a:solidFill>
+                  <a:srgbClr val="5C6C7E"/>
+                </a:solidFill>
+                <a:latin typeface="Calibri"/>
+              </a:rPr>
+              <a:t>new site  ·  10.8.0.0/16</a:t>
+            </a:r>
+          </a:p>
+        </p:txBody>
+      </p:sp>
+      <p:sp>
+        <p:nvSpPr>
+          <p:cNvPr id="18" name="TextBox 17"/>
+          <p:cNvSpPr txBox="1"/>
+          <p:nvPr/>
+        </p:nvSpPr>
+        <p:spPr>
+          <a:xfrm>
+            <a:off x="8686800" y="4709160"/>
+            <a:ext cx="2743200" cy="502920"/>
+          </a:xfrm>
+          <a:prstGeom prst="rect">
+            <a:avLst/>
+          </a:prstGeom>
+          <a:noFill/>
+        </p:spPr>
+        <p:txBody>
+          <a:bodyPr wrap="square" lIns="0" rIns="0" tIns="0" bIns="0" anchor="ctr">
+            <a:spAutoFit/>
+          </a:bodyPr>
+          <a:lstStyle/>
+          <a:p>
+            <a:pPr algn="l"/>
+            <a:r>
+              <a:rPr sz="1500" b="1" i="0">
+                <a:solidFill>
+                  <a:srgbClr val="EB852D"/>
+                </a:solidFill>
+                <a:latin typeface="Calibri"/>
+              </a:rPr>
+              <a:t>holds lm1 + lm2 addresses</a:t>
+            </a:r>
+          </a:p>
+        </p:txBody>
+      </p:sp>
+      <p:sp>
+        <p:nvSpPr>
+          <p:cNvPr id="19" name="Rounded Rectangle 18"/>
+          <p:cNvSpPr/>
+          <p:nvPr/>
+        </p:nvSpPr>
+        <p:spPr>
+          <a:xfrm>
+            <a:off x="4892040" y="2697480"/>
+            <a:ext cx="2331720" cy="1234440"/>
+          </a:xfrm>
+          <a:prstGeom prst="roundRect">
+            <a:avLst>
+              <a:gd name="adj" fmla="val 8333"/>
+            </a:avLst>
+          </a:prstGeom>
+          <a:solidFill>
+            <a:srgbClr val="E6F4F3"/>
+          </a:solidFill>
+          <a:ln w="12700">
+            <a:solidFill>
+              <a:srgbClr val="009691"/>
+            </a:solidFill>
+          </a:ln>
+          <a:effectLst/>
+        </p:spPr>
+        <p:style>
+          <a:lnRef idx="1">
+            <a:schemeClr val="accent1"/>
+          </a:lnRef>
+          <a:fillRef idx="3">
+            <a:schemeClr val="accent1"/>
+          </a:fillRef>
+          <a:effectRef idx="2">
+            <a:schemeClr val="accent1"/>
+          </a:effectRef>
+          <a:fontRef idx="minor">
+            <a:schemeClr val="lt1"/>
+          </a:fontRef>
+        </p:style>
+        <p:txBody>
+          <a:bodyPr rtlCol="0" anchor="ctr"/>
+          <a:lstStyle/>
+          <a:p>
+            <a:pPr algn="ctr"/>
+          </a:p>
+        </p:txBody>
+      </p:sp>
+      <p:sp>
+        <p:nvSpPr>
+          <p:cNvPr id="20" name="TextBox 19"/>
+          <p:cNvSpPr txBox="1"/>
+          <p:nvPr/>
+        </p:nvSpPr>
+        <p:spPr>
+          <a:xfrm>
+            <a:off x="5029200" y="2697480"/>
+            <a:ext cx="2057400" cy="1234440"/>
+          </a:xfrm>
+          <a:prstGeom prst="rect">
+            <a:avLst/>
+          </a:prstGeom>
+          <a:noFill/>
+        </p:spPr>
+        <p:txBody>
+          <a:bodyPr wrap="square" lIns="0" rIns="0" tIns="0" bIns="0" anchor="ctr">
+            <a:spAutoFit/>
+          </a:bodyPr>
+          <a:lstStyle/>
+          <a:p>
+            <a:pPr algn="ctr"/>
+            <a:r>
+              <a:rPr sz="1800" b="1" i="0">
+                <a:solidFill>
+                  <a:srgbClr val="009691"/>
+                </a:solidFill>
+                <a:latin typeface="Calibri"/>
+              </a:rPr>
+              <a:t>Palo Alto dg-5</a:t>
+            </a:r>
+          </a:p>
+          <a:p>
+            <a:pPr algn="ctr"/>
+            <a:r>
+              <a:rPr sz="1300" b="0" i="0">
+                <a:solidFill>
+                  <a:srgbClr val="5C6C7E"/>
+                </a:solidFill>
+                <a:latin typeface="Calibri"/>
+              </a:rPr>
+              <a:t>pano4  ·  mirrors the NSX groups</a:t>
+            </a:r>
+          </a:p>
+        </p:txBody>
+      </p:sp>
+      <p:cxnSp>
+        <p:nvCxnSpPr>
+          <p:cNvPr id="21" name="Connector 20"/>
+          <p:cNvCxnSpPr/>
+          <p:nvPr/>
+        </p:nvCxnSpPr>
+        <p:spPr>
+          <a:xfrm>
+            <a:off x="3703320" y="3310128"/>
+            <a:ext cx="1170432" cy="0"/>
+          </a:xfrm>
+          <a:prstGeom prst="line">
+            <a:avLst/>
+          </a:prstGeom>
+          <a:ln w="25400">
+            <a:solidFill>
+              <a:srgbClr val="8A97A6"/>
+            </a:solidFill>
+            <a:tailEnd type="triangle"/>
+          </a:ln>
+        </p:spPr>
+        <p:style>
+          <a:lnRef idx="2">
+            <a:schemeClr val="accent1"/>
+          </a:lnRef>
+          <a:fillRef idx="0">
+            <a:schemeClr val="accent1"/>
+          </a:fillRef>
+          <a:effectRef idx="1">
+            <a:schemeClr val="accent1"/>
+          </a:effectRef>
+          <a:fontRef idx="minor">
+            <a:schemeClr val="tx1"/>
+          </a:fontRef>
+        </p:style>
+      </p:cxnSp>
+      <p:cxnSp>
+        <p:nvCxnSpPr>
+          <p:cNvPr id="22" name="Connector 21"/>
+          <p:cNvCxnSpPr/>
+          <p:nvPr/>
+        </p:nvCxnSpPr>
+        <p:spPr>
+          <a:xfrm flipV="1">
+            <a:off x="7242048" y="2514600"/>
+            <a:ext cx="1197864" cy="548640"/>
+          </a:xfrm>
+          <a:prstGeom prst="line">
+            <a:avLst/>
+          </a:prstGeom>
+          <a:ln w="25400">
+            <a:solidFill>
+              <a:srgbClr val="8A97A6"/>
+            </a:solidFill>
+            <a:tailEnd type="triangle"/>
+          </a:ln>
+        </p:spPr>
+        <p:style>
+          <a:lnRef idx="2">
+            <a:schemeClr val="accent1"/>
+          </a:lnRef>
+          <a:fillRef idx="0">
+            <a:schemeClr val="accent1"/>
+          </a:fillRef>
+          <a:effectRef idx="1">
+            <a:schemeClr val="accent1"/>
+          </a:effectRef>
+          <a:fontRef idx="minor">
+            <a:schemeClr val="tx1"/>
+          </a:fontRef>
+        </p:style>
+      </p:cxnSp>
+      <p:cxnSp>
+        <p:nvCxnSpPr>
+          <p:cNvPr id="23" name="Connector 22"/>
+          <p:cNvCxnSpPr/>
+          <p:nvPr/>
+        </p:nvCxnSpPr>
+        <p:spPr>
+          <a:xfrm>
+            <a:off x="7242048" y="3611880"/>
+            <a:ext cx="1197864" cy="960120"/>
+          </a:xfrm>
+          <a:prstGeom prst="line">
+            <a:avLst/>
+          </a:prstGeom>
+          <a:ln w="25400">
+            <a:solidFill>
+              <a:srgbClr val="8A97A6"/>
+            </a:solidFill>
+            <a:tailEnd type="triangle"/>
+          </a:ln>
+        </p:spPr>
+        <p:style>
+          <a:lnRef idx="2">
+            <a:schemeClr val="accent1"/>
+          </a:lnRef>
+          <a:fillRef idx="0">
+            <a:schemeClr val="accent1"/>
+          </a:fillRef>
+          <a:effectRef idx="1">
+            <a:schemeClr val="accent1"/>
+          </a:effectRef>
+          <a:fontRef idx="minor">
+            <a:schemeClr val="tx1"/>
+          </a:fontRef>
+        </p:style>
+      </p:cxnSp>
+      <p:sp>
+        <p:nvSpPr>
+          <p:cNvPr id="24" name="TextBox 23"/>
+          <p:cNvSpPr txBox="1"/>
+          <p:nvPr/>
+        </p:nvSpPr>
+        <p:spPr>
+          <a:xfrm>
+            <a:off x="548640" y="5715000"/>
+            <a:ext cx="11064240" cy="548640"/>
+          </a:xfrm>
+          <a:prstGeom prst="rect">
+            <a:avLst/>
+          </a:prstGeom>
+          <a:noFill/>
+        </p:spPr>
+        <p:txBody>
+          <a:bodyPr wrap="square" lIns="0" rIns="0" tIns="0" bIns="0" anchor="t">
+            <a:spAutoFit/>
+          </a:bodyPr>
+          <a:lstStyle/>
+          <a:p>
+            <a:pPr algn="l"/>
+            <a:r>
+              <a:rPr sz="1500" b="0" i="1">
+                <a:solidFill>
+                  <a:srgbClr val="5C6C7E"/>
+                </a:solidFill>
+                <a:latin typeface="Calibri"/>
+              </a:rPr>
+              <a:t>Siblings are additive: a VM's address at the site it did not move to stays in the rules, so those mapped ranges stay reserved until the migration ends.</a:t>
+            </a:r>
+          </a:p>
+        </p:txBody>
+      </p:sp>
+      <p:sp>
+        <p:nvSpPr>
+          <p:cNvPr id="25" name="TextBox 24"/>
+          <p:cNvSpPr txBox="1"/>
+          <p:nvPr/>
+        </p:nvSpPr>
+        <p:spPr>
+          <a:xfrm>
+            <a:off x="548640" y="6400800"/>
+            <a:ext cx="5486400" cy="274320"/>
+          </a:xfrm>
+          <a:prstGeom prst="rect">
+            <a:avLst/>
+          </a:prstGeom>
+          <a:noFill/>
+        </p:spPr>
+        <p:txBody>
+          <a:bodyPr wrap="square" lIns="0" rIns="0" tIns="0" bIns="0" anchor="ctr">
+            <a:spAutoFit/>
+          </a:bodyPr>
+          <a:lstStyle/>
+          <a:p>
+            <a:pPr algn="l"/>
+            <a:r>
+              <a:rPr sz="1000" b="0" i="0">
+                <a:solidFill>
+                  <a:srgbClr val="5C6C7E"/>
+                </a:solidFill>
+                <a:latin typeface="Calibri"/>
+              </a:rPr>
+              <a:t>NSX + Palo Alto migration workflow  •  7/12</a:t>
+            </a:r>
+          </a:p>
+        </p:txBody>
+      </p:sp>
+    </p:spTree>
+  </p:cSld>
+  <p:clrMapOvr>
+    <a:masterClrMapping/>
+  </p:clrMapOvr>
+</p:sld>
+</file>
+
+<file path=ppt/slides/slide9.xml><?xml version="1.0" encoding="utf-8"?>
+<p:sld xmlns:a="http://schemas.openxmlformats.org/drawingml/2006/main" xmlns:p="http://schemas.openxmlformats.org/presentationml/2006/main" xmlns:r="http://schemas.openxmlformats.org/officeDocument/2006/relationships">
+  <p:cSld>
+    <p:bg>
+      <p:bgPr>
+        <a:solidFill>
+          <a:srgbClr val="FFFFFF"/>
+        </a:solidFill>
+        <a:effectLst/>
+      </p:bgPr>
+    </p:bg>
+    <p:spTree>
+      <p:nvGrpSpPr>
+        <p:cNvPr id="1" name=""/>
+        <p:cNvGrpSpPr/>
+        <p:nvPr/>
+      </p:nvGrpSpPr>
+      <p:grpSpPr/>
+      <p:sp>
+        <p:nvSpPr>
+          <p:cNvPr id="2" name="TextBox 1"/>
+          <p:cNvSpPr txBox="1"/>
+          <p:nvPr/>
+        </p:nvSpPr>
+        <p:spPr>
+          <a:xfrm>
+            <a:off x="548640" y="365760"/>
+            <a:ext cx="11064240" cy="731520"/>
+          </a:xfrm>
+          <a:prstGeom prst="rect">
+            <a:avLst/>
+          </a:prstGeom>
+          <a:noFill/>
+        </p:spPr>
+        <p:txBody>
+          <a:bodyPr wrap="square" lIns="0" rIns="0" tIns="0" bIns="0" anchor="t">
+            <a:spAutoFit/>
+          </a:bodyPr>
+          <a:lstStyle/>
+          <a:p>
+            <a:pPr algn="l"/>
+            <a:r>
+              <a:rPr sz="3600" b="1" i="0">
+                <a:solidFill>
+                  <a:srgbClr val="11233E"/>
+                </a:solidFill>
+                <a:latin typeface="Calibri"/>
+              </a:rPr>
+              <a:t>One map per target, one step at a time</a:t>
+            </a:r>
+          </a:p>
+        </p:txBody>
+      </p:sp>
+      <p:sp>
+        <p:nvSpPr>
+          <p:cNvPr id="3" name="TextBox 2"/>
+          <p:cNvSpPr txBox="1"/>
+          <p:nvPr/>
+        </p:nvSpPr>
+        <p:spPr>
+          <a:xfrm>
+            <a:off x="548640" y="1051560"/>
+            <a:ext cx="11064240" cy="411480"/>
+          </a:xfrm>
+          <a:prstGeom prst="rect">
+            <a:avLst/>
+          </a:prstGeom>
+          <a:noFill/>
+        </p:spPr>
+        <p:txBody>
+          <a:bodyPr wrap="square" lIns="0" rIns="0" tIns="0" bIns="0" anchor="t">
+            <a:spAutoFit/>
+          </a:bodyPr>
+          <a:lstStyle/>
+          <a:p>
+            <a:pPr algn="l"/>
+            <a:r>
+              <a:rPr sz="1700" b="0" i="0">
+                <a:solidFill>
+                  <a:srgbClr val="5C6C7E"/>
+                </a:solidFill>
+                <a:latin typeface="Calibri"/>
+              </a:rPr>
+              <a:t>Each step has its own dry run, apply, verify and rollback, and its own run folder</a:t>
+            </a:r>
+          </a:p>
+        </p:txBody>
+      </p:sp>
+      <p:sp>
+        <p:nvSpPr>
+          <p:cNvPr id="4" name="Rounded Rectangle 3"/>
+          <p:cNvSpPr/>
+          <p:nvPr/>
+        </p:nvSpPr>
+        <p:spPr>
+          <a:xfrm>
+            <a:off x="548640" y="1783080"/>
+            <a:ext cx="1920240" cy="1143000"/>
+          </a:xfrm>
+          <a:prstGeom prst="roundRect">
+            <a:avLst>
+              <a:gd name="adj" fmla="val 8333"/>
+            </a:avLst>
+          </a:prstGeom>
+          <a:solidFill>
+            <a:srgbClr val="216FBD"/>
+          </a:solidFill>
+          <a:ln w="12700">
+            <a:solidFill>
+              <a:srgbClr val="216FBD"/>
+            </a:solidFill>
+          </a:ln>
+          <a:effectLst/>
+        </p:spPr>
+        <p:style>
+          <a:lnRef idx="1">
+            <a:schemeClr val="accent1"/>
+          </a:lnRef>
+          <a:fillRef idx="3">
+            <a:schemeClr val="accent1"/>
+          </a:fillRef>
+          <a:effectRef idx="2">
+            <a:schemeClr val="accent1"/>
+          </a:effectRef>
+          <a:fontRef idx="minor">
+            <a:schemeClr val="lt1"/>
+          </a:fontRef>
+        </p:style>
+        <p:txBody>
+          <a:bodyPr rtlCol="0" anchor="ctr"/>
+          <a:lstStyle/>
+          <a:p>
+            <a:pPr algn="ctr"/>
+          </a:p>
+        </p:txBody>
+      </p:sp>
+      <p:sp>
+        <p:nvSpPr>
+          <p:cNvPr id="5" name="TextBox 4"/>
+          <p:cNvSpPr txBox="1"/>
+          <p:nvPr/>
+        </p:nvSpPr>
+        <p:spPr>
+          <a:xfrm>
+            <a:off x="685800" y="1783080"/>
+            <a:ext cx="1645920" cy="1143000"/>
+          </a:xfrm>
+          <a:prstGeom prst="rect">
+            <a:avLst/>
+          </a:prstGeom>
+          <a:noFill/>
+        </p:spPr>
+        <p:txBody>
+          <a:bodyPr wrap="square" lIns="0" rIns="0" tIns="0" bIns="0" anchor="ctr">
+            <a:spAutoFit/>
+          </a:bodyPr>
+          <a:lstStyle/>
+          <a:p>
+            <a:pPr algn="ctr"/>
+            <a:r>
+              <a:rPr sz="1900" b="1" i="0">
                 <a:solidFill>
                   <a:srgbClr val="FFFFFF"/>
                 </a:solidFill>
-                <a:latin typeface="Calibri" pitchFamily="34" charset="0"/>
-                <a:ea typeface="Calibri" pitchFamily="34" charset="-122"/>
-                <a:cs typeface="Calibri" pitchFamily="34" charset="-120"/>
-              </a:rPr>
-              <a:t>Automatic backup before every apply</a:t>
-            </a:r>
-            <a:endParaRPr lang="en-US" sz="1900" dirty="0"/>
-          </a:p>
-          <a:p>
-            <a:pPr indent="0" marL="0">
-              <a:buNone/>
-            </a:pPr>
-            <a:r>
-              <a:rPr lang="en-US" sz="1400" dirty="0">
-                <a:solidFill>
-                  <a:srgbClr val="BEDCE6"/>
-                </a:solidFill>
-                <a:latin typeface="Calibri" pitchFamily="34" charset="0"/>
-                <a:ea typeface="Calibri" pitchFamily="34" charset="-122"/>
-                <a:cs typeface="Calibri" pitchFamily="34" charset="-120"/>
-              </a:rPr>
-              <a:t>a full snapshot of the target, kept with the run</a:t>
-            </a:r>
-            <a:endParaRPr lang="en-US" sz="1900" dirty="0"/>
-          </a:p>
-        </p:txBody>
-      </p:sp>
-      <p:sp>
-        <p:nvSpPr>
-          <p:cNvPr id="9" name="Shape 7"/>
+                <a:latin typeface="Calibri"/>
+              </a:rPr>
+              <a:t>A → lm3</a:t>
+            </a:r>
+          </a:p>
+          <a:p>
+            <a:pPr algn="ctr"/>
+            <a:r>
+              <a:rPr sz="1300" b="0" i="0">
+                <a:solidFill>
+                  <a:srgbClr val="FFFFFF"/>
+                </a:solidFill>
+                <a:latin typeface="Calibri"/>
+              </a:rPr>
+              <a:t>clone the policy</a:t>
+            </a:r>
+          </a:p>
+        </p:txBody>
+      </p:sp>
+      <p:cxnSp>
+        <p:nvCxnSpPr>
+          <p:cNvPr id="6" name="Connector 5"/>
+          <p:cNvCxnSpPr/>
+          <p:nvPr/>
+        </p:nvCxnSpPr>
+        <p:spPr>
+          <a:xfrm>
+            <a:off x="2487168" y="2359152"/>
+            <a:ext cx="329184" cy="0"/>
+          </a:xfrm>
+          <a:prstGeom prst="line">
+            <a:avLst/>
+          </a:prstGeom>
+          <a:ln w="25400">
+            <a:solidFill>
+              <a:srgbClr val="8A97A6"/>
+            </a:solidFill>
+            <a:tailEnd type="triangle"/>
+          </a:ln>
+        </p:spPr>
+        <p:style>
+          <a:lnRef idx="2">
+            <a:schemeClr val="accent1"/>
+          </a:lnRef>
+          <a:fillRef idx="0">
+            <a:schemeClr val="accent1"/>
+          </a:fillRef>
+          <a:effectRef idx="1">
+            <a:schemeClr val="accent1"/>
+          </a:effectRef>
+          <a:fontRef idx="minor">
+            <a:schemeClr val="tx1"/>
+          </a:fontRef>
+        </p:style>
+      </p:cxnSp>
+      <p:sp>
+        <p:nvSpPr>
+          <p:cNvPr id="7" name="Rounded Rectangle 6"/>
           <p:cNvSpPr/>
           <p:nvPr/>
         </p:nvSpPr>
         <p:spPr>
           <a:xfrm>
-            <a:off x="548640" y="3291840"/>
-            <a:ext cx="548640" cy="548640"/>
-          </a:xfrm>
-          <a:prstGeom prst="ellipse">
-            <a:avLst/>
+            <a:off x="2834640" y="1783080"/>
+            <a:ext cx="1920240" cy="1143000"/>
+          </a:xfrm>
+          <a:prstGeom prst="roundRect">
+            <a:avLst>
+              <a:gd name="adj" fmla="val 8333"/>
+            </a:avLst>
+          </a:prstGeom>
+          <a:solidFill>
+            <a:srgbClr val="009691"/>
+          </a:solidFill>
+          <a:ln w="12700">
+            <a:solidFill>
+              <a:srgbClr val="009691"/>
+            </a:solidFill>
+          </a:ln>
+          <a:effectLst/>
+        </p:spPr>
+        <p:style>
+          <a:lnRef idx="1">
+            <a:schemeClr val="accent1"/>
+          </a:lnRef>
+          <a:fillRef idx="3">
+            <a:schemeClr val="accent1"/>
+          </a:fillRef>
+          <a:effectRef idx="2">
+            <a:schemeClr val="accent1"/>
+          </a:effectRef>
+          <a:fontRef idx="minor">
+            <a:schemeClr val="lt1"/>
+          </a:fontRef>
+        </p:style>
+        <p:txBody>
+          <a:bodyPr rtlCol="0" anchor="ctr"/>
+          <a:lstStyle/>
+          <a:p>
+            <a:pPr algn="ctr"/>
+          </a:p>
+        </p:txBody>
+      </p:sp>
+      <p:sp>
+        <p:nvSpPr>
+          <p:cNvPr id="8" name="TextBox 7"/>
+          <p:cNvSpPr txBox="1"/>
+          <p:nvPr/>
+        </p:nvSpPr>
+        <p:spPr>
+          <a:xfrm>
+            <a:off x="2971800" y="1783080"/>
+            <a:ext cx="1645920" cy="1143000"/>
+          </a:xfrm>
+          <a:prstGeom prst="rect">
+            <a:avLst/>
+          </a:prstGeom>
+          <a:noFill/>
+        </p:spPr>
+        <p:txBody>
+          <a:bodyPr wrap="square" lIns="0" rIns="0" tIns="0" bIns="0" anchor="ctr">
+            <a:spAutoFit/>
+          </a:bodyPr>
+          <a:lstStyle/>
+          <a:p>
+            <a:pPr algn="ctr"/>
+            <a:r>
+              <a:rPr sz="1900" b="1" i="0">
+                <a:solidFill>
+                  <a:srgbClr val="FFFFFF"/>
+                </a:solidFill>
+                <a:latin typeface="Calibri"/>
+              </a:rPr>
+              <a:t>C → lm3</a:t>
+            </a:r>
+          </a:p>
+          <a:p>
+            <a:pPr algn="ctr"/>
+            <a:r>
+              <a:rPr sz="1300" b="0" i="0">
+                <a:solidFill>
+                  <a:srgbClr val="FFFFFF"/>
+                </a:solidFill>
+                <a:latin typeface="Calibri"/>
+              </a:rPr>
+              <a:t>_np_ips siblings</a:t>
+            </a:r>
+          </a:p>
+        </p:txBody>
+      </p:sp>
+      <p:cxnSp>
+        <p:nvCxnSpPr>
+          <p:cNvPr id="9" name="Connector 8"/>
+          <p:cNvCxnSpPr/>
+          <p:nvPr/>
+        </p:nvCxnSpPr>
+        <p:spPr>
+          <a:xfrm>
+            <a:off x="4773168" y="2359152"/>
+            <a:ext cx="329184" cy="0"/>
+          </a:xfrm>
+          <a:prstGeom prst="line">
+            <a:avLst/>
+          </a:prstGeom>
+          <a:ln w="25400">
+            <a:solidFill>
+              <a:srgbClr val="8A97A6"/>
+            </a:solidFill>
+            <a:tailEnd type="triangle"/>
+          </a:ln>
+        </p:spPr>
+        <p:style>
+          <a:lnRef idx="2">
+            <a:schemeClr val="accent1"/>
+          </a:lnRef>
+          <a:fillRef idx="0">
+            <a:schemeClr val="accent1"/>
+          </a:fillRef>
+          <a:effectRef idx="1">
+            <a:schemeClr val="accent1"/>
+          </a:effectRef>
+          <a:fontRef idx="minor">
+            <a:schemeClr val="tx1"/>
+          </a:fontRef>
+        </p:style>
+      </p:cxnSp>
+      <p:sp>
+        <p:nvSpPr>
+          <p:cNvPr id="10" name="Rounded Rectangle 9"/>
+          <p:cNvSpPr/>
+          <p:nvPr/>
+        </p:nvSpPr>
+        <p:spPr>
+          <a:xfrm>
+            <a:off x="5120640" y="1783080"/>
+            <a:ext cx="1920240" cy="1143000"/>
+          </a:xfrm>
+          <a:prstGeom prst="roundRect">
+            <a:avLst>
+              <a:gd name="adj" fmla="val 8333"/>
+            </a:avLst>
           </a:prstGeom>
           <a:solidFill>
             <a:srgbClr val="27965B"/>
@@ -6084,238 +12441,260 @@
             <a:solidFill>
               <a:srgbClr val="27965B"/>
             </a:solidFill>
-            <a:prstDash val="solid"/>
           </a:ln>
-        </p:spPr>
-      </p:sp>
-      <p:sp>
-        <p:nvSpPr>
-          <p:cNvPr id="10" name="Text 8"/>
-          <p:cNvSpPr txBox="1"/>
-          <p:nvPr/>
-        </p:nvSpPr>
-        <p:spPr>
-          <a:xfrm>
-            <a:off x="548640" y="3291840"/>
-            <a:ext cx="548640" cy="548640"/>
-          </a:xfrm>
-          <a:prstGeom prst="rect">
-            <a:avLst/>
-          </a:prstGeom>
-          <a:noFill/>
-          <a:ln/>
-        </p:spPr>
-        <p:txBody>
-          <a:bodyPr wrap="square" lIns="0" tIns="0" rIns="0" bIns="0" rtlCol="0" anchor="ctr"/>
-          <a:lstStyle/>
-          <a:p>
-            <a:pPr algn="ctr" indent="0" marL="0">
-              <a:buNone/>
-            </a:pPr>
-            <a:r>
-              <a:rPr lang="en-US" sz="2160" b="1" dirty="0">
+          <a:effectLst/>
+        </p:spPr>
+        <p:style>
+          <a:lnRef idx="1">
+            <a:schemeClr val="accent1"/>
+          </a:lnRef>
+          <a:fillRef idx="3">
+            <a:schemeClr val="accent1"/>
+          </a:fillRef>
+          <a:effectRef idx="2">
+            <a:schemeClr val="accent1"/>
+          </a:effectRef>
+          <a:fontRef idx="minor">
+            <a:schemeClr val="lt1"/>
+          </a:fontRef>
+        </p:style>
+        <p:txBody>
+          <a:bodyPr rtlCol="0" anchor="ctr"/>
+          <a:lstStyle/>
+          <a:p>
+            <a:pPr algn="ctr"/>
+          </a:p>
+        </p:txBody>
+      </p:sp>
+      <p:sp>
+        <p:nvSpPr>
+          <p:cNvPr id="11" name="TextBox 10"/>
+          <p:cNvSpPr txBox="1"/>
+          <p:nvPr/>
+        </p:nvSpPr>
+        <p:spPr>
+          <a:xfrm>
+            <a:off x="5257800" y="1783080"/>
+            <a:ext cx="1645920" cy="1143000"/>
+          </a:xfrm>
+          <a:prstGeom prst="rect">
+            <a:avLst/>
+          </a:prstGeom>
+          <a:noFill/>
+        </p:spPr>
+        <p:txBody>
+          <a:bodyPr wrap="square" lIns="0" rIns="0" tIns="0" bIns="0" anchor="ctr">
+            <a:spAutoFit/>
+          </a:bodyPr>
+          <a:lstStyle/>
+          <a:p>
+            <a:pPr algn="ctr"/>
+            <a:r>
+              <a:rPr sz="1900" b="1" i="0">
                 <a:solidFill>
                   <a:srgbClr val="FFFFFF"/>
                 </a:solidFill>
-                <a:latin typeface="Calibri" pitchFamily="34" charset="0"/>
-                <a:ea typeface="Calibri" pitchFamily="34" charset="-122"/>
-                <a:cs typeface="Calibri" pitchFamily="34" charset="-120"/>
-              </a:rPr>
-              <a:t>3</a:t>
-            </a:r>
-            <a:endParaRPr lang="en-US" sz="2160" dirty="0"/>
-          </a:p>
-        </p:txBody>
-      </p:sp>
-      <p:sp>
-        <p:nvSpPr>
-          <p:cNvPr id="11" name="Text 9"/>
-          <p:cNvSpPr txBox="1"/>
-          <p:nvPr/>
-        </p:nvSpPr>
-        <p:spPr>
-          <a:xfrm>
-            <a:off x="1325880" y="3200400"/>
-            <a:ext cx="10058400" cy="777240"/>
-          </a:xfrm>
-          <a:prstGeom prst="rect">
-            <a:avLst/>
-          </a:prstGeom>
-          <a:noFill/>
-          <a:ln/>
-        </p:spPr>
-        <p:txBody>
-          <a:bodyPr wrap="square" lIns="0" tIns="0" rIns="0" bIns="0" rtlCol="0" anchor="ctr"/>
-          <a:lstStyle/>
-          <a:p>
-            <a:pPr indent="0" marL="0">
-              <a:buNone/>
-            </a:pPr>
-            <a:r>
-              <a:rPr lang="en-US" sz="1900" b="1" dirty="0">
+                <a:latin typeface="Calibri"/>
+              </a:rPr>
+              <a:t>lm2 → lm1</a:t>
+            </a:r>
+          </a:p>
+          <a:p>
+            <a:pPr algn="ctr"/>
+            <a:r>
+              <a:rPr sz="1300" b="0" i="0">
                 <a:solidFill>
                   <a:srgbClr val="FFFFFF"/>
                 </a:solidFill>
-                <a:latin typeface="Calibri" pitchFamily="34" charset="0"/>
-                <a:ea typeface="Calibri" pitchFamily="34" charset="-122"/>
-                <a:cs typeface="Calibri" pitchFamily="34" charset="-120"/>
-              </a:rPr>
-              <a:t>D2a ignores its own _avs_ips groups</a:t>
-            </a:r>
-            <a:endParaRPr lang="en-US" sz="1900" dirty="0"/>
-          </a:p>
-          <a:p>
-            <a:pPr indent="0" marL="0">
-              <a:buNone/>
-            </a:pPr>
-            <a:r>
-              <a:rPr lang="en-US" sz="1400" dirty="0">
-                <a:solidFill>
-                  <a:srgbClr val="BEDCE6"/>
-                </a:solidFill>
-                <a:latin typeface="Calibri" pitchFamily="34" charset="0"/>
-                <a:ea typeface="Calibri" pitchFamily="34" charset="-122"/>
-                <a:cs typeface="Calibri" pitchFamily="34" charset="-120"/>
-              </a:rPr>
-              <a:t>re-runs report 13 groups with no AVS group instead of 3</a:t>
-            </a:r>
-            <a:endParaRPr lang="en-US" sz="1900" dirty="0"/>
-          </a:p>
-        </p:txBody>
-      </p:sp>
-      <p:sp>
-        <p:nvSpPr>
-          <p:cNvPr id="12" name="Shape 10"/>
+                <a:latin typeface="Calibri"/>
+              </a:rPr>
+              <a:t>_avs_ips siblings</a:t>
+            </a:r>
+          </a:p>
+        </p:txBody>
+      </p:sp>
+      <p:cxnSp>
+        <p:nvCxnSpPr>
+          <p:cNvPr id="12" name="Connector 11"/>
+          <p:cNvCxnSpPr/>
+          <p:nvPr/>
+        </p:nvCxnSpPr>
+        <p:spPr>
+          <a:xfrm>
+            <a:off x="7059168" y="2359152"/>
+            <a:ext cx="329184" cy="0"/>
+          </a:xfrm>
+          <a:prstGeom prst="line">
+            <a:avLst/>
+          </a:prstGeom>
+          <a:ln w="25400">
+            <a:solidFill>
+              <a:srgbClr val="8A97A6"/>
+            </a:solidFill>
+            <a:tailEnd type="triangle"/>
+          </a:ln>
+        </p:spPr>
+        <p:style>
+          <a:lnRef idx="2">
+            <a:schemeClr val="accent1"/>
+          </a:lnRef>
+          <a:fillRef idx="0">
+            <a:schemeClr val="accent1"/>
+          </a:fillRef>
+          <a:effectRef idx="1">
+            <a:schemeClr val="accent1"/>
+          </a:effectRef>
+          <a:fontRef idx="minor">
+            <a:schemeClr val="tx1"/>
+          </a:fontRef>
+        </p:style>
+      </p:cxnSp>
+      <p:sp>
+        <p:nvSpPr>
+          <p:cNvPr id="13" name="Rounded Rectangle 12"/>
           <p:cNvSpPr/>
           <p:nvPr/>
         </p:nvSpPr>
         <p:spPr>
           <a:xfrm>
-            <a:off x="548640" y="4160520"/>
-            <a:ext cx="548640" cy="548640"/>
-          </a:xfrm>
-          <a:prstGeom prst="ellipse">
-            <a:avLst/>
+            <a:off x="7406640" y="1783080"/>
+            <a:ext cx="1920240" cy="1143000"/>
+          </a:xfrm>
+          <a:prstGeom prst="roundRect">
+            <a:avLst>
+              <a:gd name="adj" fmla="val 8333"/>
+            </a:avLst>
           </a:prstGeom>
           <a:solidFill>
-            <a:srgbClr val="216FBD"/>
+            <a:srgbClr val="EB852D"/>
           </a:solidFill>
           <a:ln w="12700">
             <a:solidFill>
-              <a:srgbClr val="216FBD"/>
+              <a:srgbClr val="EB852D"/>
             </a:solidFill>
-            <a:prstDash val="solid"/>
           </a:ln>
-        </p:spPr>
-      </p:sp>
-      <p:sp>
-        <p:nvSpPr>
-          <p:cNvPr id="13" name="Text 11"/>
-          <p:cNvSpPr txBox="1"/>
-          <p:nvPr/>
-        </p:nvSpPr>
-        <p:spPr>
-          <a:xfrm>
-            <a:off x="548640" y="4160520"/>
-            <a:ext cx="548640" cy="548640"/>
-          </a:xfrm>
-          <a:prstGeom prst="rect">
-            <a:avLst/>
-          </a:prstGeom>
-          <a:noFill/>
-          <a:ln/>
-        </p:spPr>
-        <p:txBody>
-          <a:bodyPr wrap="square" lIns="0" tIns="0" rIns="0" bIns="0" rtlCol="0" anchor="ctr"/>
-          <a:lstStyle/>
-          <a:p>
-            <a:pPr algn="ctr" indent="0" marL="0">
-              <a:buNone/>
-            </a:pPr>
-            <a:r>
-              <a:rPr lang="en-US" sz="2160" b="1" dirty="0">
+          <a:effectLst/>
+        </p:spPr>
+        <p:style>
+          <a:lnRef idx="1">
+            <a:schemeClr val="accent1"/>
+          </a:lnRef>
+          <a:fillRef idx="3">
+            <a:schemeClr val="accent1"/>
+          </a:fillRef>
+          <a:effectRef idx="2">
+            <a:schemeClr val="accent1"/>
+          </a:effectRef>
+          <a:fontRef idx="minor">
+            <a:schemeClr val="lt1"/>
+          </a:fontRef>
+        </p:style>
+        <p:txBody>
+          <a:bodyPr rtlCol="0" anchor="ctr"/>
+          <a:lstStyle/>
+          <a:p>
+            <a:pPr algn="ctr"/>
+          </a:p>
+        </p:txBody>
+      </p:sp>
+      <p:sp>
+        <p:nvSpPr>
+          <p:cNvPr id="14" name="TextBox 13"/>
+          <p:cNvSpPr txBox="1"/>
+          <p:nvPr/>
+        </p:nvSpPr>
+        <p:spPr>
+          <a:xfrm>
+            <a:off x="7543800" y="1783080"/>
+            <a:ext cx="1645920" cy="1143000"/>
+          </a:xfrm>
+          <a:prstGeom prst="rect">
+            <a:avLst/>
+          </a:prstGeom>
+          <a:noFill/>
+        </p:spPr>
+        <p:txBody>
+          <a:bodyPr wrap="square" lIns="0" rIns="0" tIns="0" bIns="0" anchor="ctr">
+            <a:spAutoFit/>
+          </a:bodyPr>
+          <a:lstStyle/>
+          <a:p>
+            <a:pPr algn="ctr"/>
+            <a:r>
+              <a:rPr sz="1900" b="1" i="0">
                 <a:solidFill>
                   <a:srgbClr val="FFFFFF"/>
                 </a:solidFill>
-                <a:latin typeface="Calibri" pitchFamily="34" charset="0"/>
-                <a:ea typeface="Calibri" pitchFamily="34" charset="-122"/>
-                <a:cs typeface="Calibri" pitchFamily="34" charset="-120"/>
-              </a:rPr>
-              <a:t>4</a:t>
-            </a:r>
-            <a:endParaRPr lang="en-US" sz="2160" dirty="0"/>
-          </a:p>
-        </p:txBody>
-      </p:sp>
-      <p:sp>
-        <p:nvSpPr>
-          <p:cNvPr id="14" name="Text 12"/>
-          <p:cNvSpPr txBox="1"/>
-          <p:nvPr/>
-        </p:nvSpPr>
-        <p:spPr>
-          <a:xfrm>
-            <a:off x="1325880" y="4069080"/>
-            <a:ext cx="10058400" cy="777240"/>
-          </a:xfrm>
-          <a:prstGeom prst="rect">
-            <a:avLst/>
-          </a:prstGeom>
-          <a:noFill/>
-          <a:ln/>
-        </p:spPr>
-        <p:txBody>
-          <a:bodyPr wrap="square" lIns="0" tIns="0" rIns="0" bIns="0" rtlCol="0" anchor="ctr"/>
-          <a:lstStyle/>
-          <a:p>
-            <a:pPr indent="0" marL="0">
-              <a:buNone/>
-            </a:pPr>
-            <a:r>
-              <a:rPr lang="en-US" sz="1900" b="1" dirty="0">
+                <a:latin typeface="Calibri"/>
+              </a:rPr>
+              <a:t>lm3 → lm1</a:t>
+            </a:r>
+          </a:p>
+          <a:p>
+            <a:pPr algn="ctr"/>
+            <a:r>
+              <a:rPr sz="1300" b="0" i="0">
                 <a:solidFill>
                   <a:srgbClr val="FFFFFF"/>
                 </a:solidFill>
-                <a:latin typeface="Calibri" pitchFamily="34" charset="0"/>
-                <a:ea typeface="Calibri" pitchFamily="34" charset="-122"/>
-                <a:cs typeface="Calibri" pitchFamily="34" charset="-120"/>
-              </a:rPr>
-              <a:t>D verify: fix the rule-key format</a:t>
-            </a:r>
-            <a:endParaRPr lang="en-US" sz="1900" dirty="0"/>
-          </a:p>
-          <a:p>
-            <a:pPr indent="0" marL="0">
-              <a:buNone/>
-            </a:pPr>
-            <a:r>
-              <a:rPr lang="en-US" sz="1400" dirty="0">
-                <a:solidFill>
-                  <a:srgbClr val="BEDCE6"/>
-                </a:solidFill>
-                <a:latin typeface="Calibri" pitchFamily="34" charset="0"/>
-                <a:ea typeface="Calibri" pitchFamily="34" charset="-122"/>
-                <a:cs typeface="Calibri" pitchFamily="34" charset="-120"/>
-              </a:rPr>
-              <a:t>its rule-preservation check (R2) never runs today</a:t>
-            </a:r>
-            <a:endParaRPr lang="en-US" sz="1900" dirty="0"/>
-          </a:p>
-        </p:txBody>
-      </p:sp>
-      <p:sp>
-        <p:nvSpPr>
-          <p:cNvPr id="15" name="Shape 13"/>
+                <a:latin typeface="Calibri"/>
+              </a:rPr>
+              <a:t>_lm3_ips siblings</a:t>
+            </a:r>
+          </a:p>
+        </p:txBody>
+      </p:sp>
+      <p:cxnSp>
+        <p:nvCxnSpPr>
+          <p:cNvPr id="15" name="Connector 14"/>
+          <p:cNvCxnSpPr/>
+          <p:nvPr/>
+        </p:nvCxnSpPr>
+        <p:spPr>
+          <a:xfrm>
+            <a:off x="9345167" y="2359152"/>
+            <a:ext cx="329185" cy="0"/>
+          </a:xfrm>
+          <a:prstGeom prst="line">
+            <a:avLst/>
+          </a:prstGeom>
+          <a:ln w="25400">
+            <a:solidFill>
+              <a:srgbClr val="8A97A6"/>
+            </a:solidFill>
+            <a:tailEnd type="triangle"/>
+          </a:ln>
+        </p:spPr>
+        <p:style>
+          <a:lnRef idx="2">
+            <a:schemeClr val="accent1"/>
+          </a:lnRef>
+          <a:fillRef idx="0">
+            <a:schemeClr val="accent1"/>
+          </a:fillRef>
+          <a:effectRef idx="1">
+            <a:schemeClr val="accent1"/>
+          </a:effectRef>
+          <a:fontRef idx="minor">
+            <a:schemeClr val="tx1"/>
+          </a:fontRef>
+        </p:style>
+      </p:cxnSp>
+      <p:sp>
+        <p:nvSpPr>
+          <p:cNvPr id="16" name="Rounded Rectangle 15"/>
           <p:cNvSpPr/>
           <p:nvPr/>
         </p:nvSpPr>
         <p:spPr>
           <a:xfrm>
-            <a:off x="548640" y="5029200"/>
-            <a:ext cx="548640" cy="548640"/>
-          </a:xfrm>
-          <a:prstGeom prst="ellipse">
-            <a:avLst/>
+            <a:off x="9692640" y="1783080"/>
+            <a:ext cx="1920240" cy="1143000"/>
+          </a:xfrm>
+          <a:prstGeom prst="roundRect">
+            <a:avLst>
+              <a:gd name="adj" fmla="val 8333"/>
+            </a:avLst>
           </a:prstGeom>
           <a:solidFill>
             <a:srgbClr val="5C6C7E"/>
@@ -6324,147 +12703,461 @@
             <a:solidFill>
               <a:srgbClr val="5C6C7E"/>
             </a:solidFill>
-            <a:prstDash val="solid"/>
           </a:ln>
-        </p:spPr>
-      </p:sp>
-      <p:sp>
-        <p:nvSpPr>
-          <p:cNvPr id="16" name="Text 14"/>
-          <p:cNvSpPr txBox="1"/>
-          <p:nvPr/>
-        </p:nvSpPr>
-        <p:spPr>
-          <a:xfrm>
-            <a:off x="548640" y="5029200"/>
-            <a:ext cx="548640" cy="548640"/>
-          </a:xfrm>
-          <a:prstGeom prst="rect">
-            <a:avLst/>
-          </a:prstGeom>
-          <a:noFill/>
-          <a:ln/>
-        </p:spPr>
-        <p:txBody>
-          <a:bodyPr wrap="square" lIns="0" tIns="0" rIns="0" bIns="0" rtlCol="0" anchor="ctr"/>
-          <a:lstStyle/>
-          <a:p>
-            <a:pPr algn="ctr" indent="0" marL="0">
-              <a:buNone/>
-            </a:pPr>
-            <a:r>
-              <a:rPr lang="en-US" sz="2160" b="1" dirty="0">
+          <a:effectLst/>
+        </p:spPr>
+        <p:style>
+          <a:lnRef idx="1">
+            <a:schemeClr val="accent1"/>
+          </a:lnRef>
+          <a:fillRef idx="3">
+            <a:schemeClr val="accent1"/>
+          </a:fillRef>
+          <a:effectRef idx="2">
+            <a:schemeClr val="accent1"/>
+          </a:effectRef>
+          <a:fontRef idx="minor">
+            <a:schemeClr val="lt1"/>
+          </a:fontRef>
+        </p:style>
+        <p:txBody>
+          <a:bodyPr rtlCol="0" anchor="ctr"/>
+          <a:lstStyle/>
+          <a:p>
+            <a:pPr algn="ctr"/>
+          </a:p>
+        </p:txBody>
+      </p:sp>
+      <p:sp>
+        <p:nvSpPr>
+          <p:cNvPr id="17" name="TextBox 16"/>
+          <p:cNvSpPr txBox="1"/>
+          <p:nvPr/>
+        </p:nvSpPr>
+        <p:spPr>
+          <a:xfrm>
+            <a:off x="9829800" y="1783080"/>
+            <a:ext cx="1645920" cy="1143000"/>
+          </a:xfrm>
+          <a:prstGeom prst="rect">
+            <a:avLst/>
+          </a:prstGeom>
+          <a:noFill/>
+        </p:spPr>
+        <p:txBody>
+          <a:bodyPr wrap="square" lIns="0" rIns="0" tIns="0" bIns="0" anchor="ctr">
+            <a:spAutoFit/>
+          </a:bodyPr>
+          <a:lstStyle/>
+          <a:p>
+            <a:pPr algn="ctr"/>
+            <a:r>
+              <a:rPr sz="1900" b="1" i="0">
                 <a:solidFill>
                   <a:srgbClr val="FFFFFF"/>
                 </a:solidFill>
-                <a:latin typeface="Calibri" pitchFamily="34" charset="0"/>
-                <a:ea typeface="Calibri" pitchFamily="34" charset="-122"/>
-                <a:cs typeface="Calibri" pitchFamily="34" charset="-120"/>
-              </a:rPr>
-              <a:t>5</a:t>
-            </a:r>
-            <a:endParaRPr lang="en-US" sz="2160" dirty="0"/>
-          </a:p>
-        </p:txBody>
-      </p:sp>
-      <p:sp>
-        <p:nvSpPr>
-          <p:cNvPr id="17" name="Text 15"/>
-          <p:cNvSpPr txBox="1"/>
-          <p:nvPr/>
-        </p:nvSpPr>
-        <p:spPr>
-          <a:xfrm>
-            <a:off x="1325880" y="4937760"/>
-            <a:ext cx="10058400" cy="777240"/>
-          </a:xfrm>
-          <a:prstGeom prst="rect">
-            <a:avLst/>
-          </a:prstGeom>
-          <a:noFill/>
-          <a:ln/>
-        </p:spPr>
-        <p:txBody>
-          <a:bodyPr wrap="square" lIns="0" tIns="0" rIns="0" bIns="0" rtlCol="0" anchor="ctr"/>
-          <a:lstStyle/>
-          <a:p>
-            <a:pPr indent="0" marL="0">
-              <a:buNone/>
-            </a:pPr>
-            <a:r>
-              <a:rPr lang="en-US" sz="1900" b="1" dirty="0">
+                <a:latin typeface="Calibri"/>
+              </a:rPr>
+              <a:t>lm2 ↔ lm3</a:t>
+            </a:r>
+          </a:p>
+          <a:p>
+            <a:pPr algn="ctr"/>
+            <a:r>
+              <a:rPr sz="1300" b="0" i="0">
                 <a:solidFill>
                   <a:srgbClr val="FFFFFF"/>
                 </a:solidFill>
-                <a:latin typeface="Calibri" pitchFamily="34" charset="0"/>
-                <a:ea typeface="Calibri" pitchFamily="34" charset="-122"/>
-                <a:cs typeface="Calibri" pitchFamily="34" charset="-120"/>
-              </a:rPr>
-              <a:t>Services and policies rollbacks: delete only what they created</a:t>
-            </a:r>
-            <a:endParaRPr lang="en-US" sz="1900" dirty="0"/>
-          </a:p>
-          <a:p>
-            <a:pPr indent="0" marL="0">
-              <a:buNone/>
-            </a:pPr>
-            <a:r>
-              <a:rPr lang="en-US" sz="1400" dirty="0">
-                <a:solidFill>
-                  <a:srgbClr val="BEDCE6"/>
-                </a:solidFill>
-                <a:latin typeface="Calibri" pitchFamily="34" charset="0"/>
-                <a:ea typeface="Calibri" pitchFamily="34" charset="-122"/>
-                <a:cs typeface="Calibri" pitchFamily="34" charset="-120"/>
-              </a:rPr>
-              <a:t>today they delete anything missing from their baseline</a:t>
-            </a:r>
-            <a:endParaRPr lang="en-US" sz="1900" dirty="0"/>
-          </a:p>
-        </p:txBody>
-      </p:sp>
-      <p:sp>
-        <p:nvSpPr>
-          <p:cNvPr id="18" name="Text 16"/>
-          <p:cNvSpPr txBox="1"/>
-          <p:nvPr/>
-        </p:nvSpPr>
-        <p:spPr>
-          <a:xfrm>
-            <a:off x="548640" y="5989320"/>
-            <a:ext cx="10972800" cy="320040"/>
-          </a:xfrm>
-          <a:prstGeom prst="rect">
-            <a:avLst/>
-          </a:prstGeom>
-          <a:noFill/>
-          <a:ln/>
-        </p:spPr>
-        <p:txBody>
-          <a:bodyPr wrap="square" lIns="0" tIns="0" rIns="0" bIns="0" rtlCol="0" anchor="ctr"/>
-          <a:lstStyle/>
-          <a:p>
-            <a:pPr indent="0" marL="0">
-              <a:buNone/>
-            </a:pPr>
-            <a:r>
-              <a:rPr lang="en-US" sz="1300" i="1" dirty="0">
-                <a:solidFill>
-                  <a:srgbClr val="BEDCE6"/>
-                </a:solidFill>
-                <a:latin typeface="Calibri" pitchFamily="34" charset="0"/>
-                <a:ea typeface="Calibri" pitchFamily="34" charset="-122"/>
-                <a:cs typeface="Calibri" pitchFamily="34" charset="-120"/>
-              </a:rPr>
-              <a:t>Detail: docs/nsx/RUNBOOK_WORKFLOW.md and the run reports under nsx_avs_runs/</a:t>
-            </a:r>
-            <a:endParaRPr lang="en-US" sz="1300" dirty="0"/>
-          </a:p>
-        </p:txBody>
-      </p:sp>
-      <p:sp>
-        <p:nvSpPr>
-          <p:cNvPr id="19" name="Text 17"/>
+                <a:latin typeface="Calibri"/>
+              </a:rPr>
+              <a:t>only if they talk</a:t>
+            </a:r>
+          </a:p>
+        </p:txBody>
+      </p:sp>
+      <p:sp>
+        <p:nvSpPr>
+          <p:cNvPr id="18" name="Rounded Rectangle 17"/>
+          <p:cNvSpPr/>
+          <p:nvPr/>
+        </p:nvSpPr>
+        <p:spPr>
+          <a:xfrm>
+            <a:off x="548640" y="3429000"/>
+            <a:ext cx="5440680" cy="1097280"/>
+          </a:xfrm>
+          <a:prstGeom prst="roundRect">
+            <a:avLst>
+              <a:gd name="adj" fmla="val 8333"/>
+            </a:avLst>
+          </a:prstGeom>
+          <a:solidFill>
+            <a:srgbClr val="F2F6FA"/>
+          </a:solidFill>
+          <a:ln w="12700">
+            <a:solidFill>
+              <a:srgbClr val="F2F6FA"/>
+            </a:solidFill>
+          </a:ln>
+          <a:effectLst/>
+        </p:spPr>
+        <p:style>
+          <a:lnRef idx="1">
+            <a:schemeClr val="accent1"/>
+          </a:lnRef>
+          <a:fillRef idx="3">
+            <a:schemeClr val="accent1"/>
+          </a:fillRef>
+          <a:effectRef idx="2">
+            <a:schemeClr val="accent1"/>
+          </a:effectRef>
+          <a:fontRef idx="minor">
+            <a:schemeClr val="lt1"/>
+          </a:fontRef>
+        </p:style>
+        <p:txBody>
+          <a:bodyPr rtlCol="0" anchor="ctr"/>
+          <a:lstStyle/>
+          <a:p>
+            <a:pPr algn="ctr"/>
+          </a:p>
+        </p:txBody>
+      </p:sp>
+      <p:sp>
+        <p:nvSpPr>
+          <p:cNvPr id="19" name="TextBox 18"/>
+          <p:cNvSpPr txBox="1"/>
+          <p:nvPr/>
+        </p:nvSpPr>
+        <p:spPr>
+          <a:xfrm>
+            <a:off x="685800" y="3429000"/>
+            <a:ext cx="5166360" cy="1097280"/>
+          </a:xfrm>
+          <a:prstGeom prst="rect">
+            <a:avLst/>
+          </a:prstGeom>
+          <a:noFill/>
+        </p:spPr>
+        <p:txBody>
+          <a:bodyPr wrap="square" lIns="0" rIns="0" tIns="0" bIns="0" anchor="ctr">
+            <a:spAutoFit/>
+          </a:bodyPr>
+          <a:lstStyle/>
+          <a:p>
+            <a:pPr algn="l"/>
+            <a:r>
+              <a:rPr sz="1700" b="1" i="0">
+                <a:solidFill>
+                  <a:srgbClr val="11233E"/>
+                </a:solidFill>
+                <a:latin typeface="Calibri"/>
+              </a:rPr>
+              <a:t>One plain CSV per target</a:t>
+            </a:r>
+          </a:p>
+          <a:p>
+            <a:pPr algn="l"/>
+            <a:r>
+              <a:rPr sz="1400" b="0" i="0">
+                <a:solidFill>
+                  <a:srgbClr val="5C6C7E"/>
+                </a:solidFill>
+                <a:latin typeface="Calibri"/>
+              </a:rPr>
+              <a:t>Every NSX step runs through the existing, tested workflow driver; no new NSX code in the path.</a:t>
+            </a:r>
+          </a:p>
+        </p:txBody>
+      </p:sp>
+      <p:sp>
+        <p:nvSpPr>
+          <p:cNvPr id="20" name="Rounded Rectangle 19"/>
+          <p:cNvSpPr/>
+          <p:nvPr/>
+        </p:nvSpPr>
+        <p:spPr>
+          <a:xfrm>
+            <a:off x="6172200" y="3429000"/>
+            <a:ext cx="5440680" cy="1097280"/>
+          </a:xfrm>
+          <a:prstGeom prst="roundRect">
+            <a:avLst>
+              <a:gd name="adj" fmla="val 8333"/>
+            </a:avLst>
+          </a:prstGeom>
+          <a:solidFill>
+            <a:srgbClr val="F2F6FA"/>
+          </a:solidFill>
+          <a:ln w="12700">
+            <a:solidFill>
+              <a:srgbClr val="F2F6FA"/>
+            </a:solidFill>
+          </a:ln>
+          <a:effectLst/>
+        </p:spPr>
+        <p:style>
+          <a:lnRef idx="1">
+            <a:schemeClr val="accent1"/>
+          </a:lnRef>
+          <a:fillRef idx="3">
+            <a:schemeClr val="accent1"/>
+          </a:fillRef>
+          <a:effectRef idx="2">
+            <a:schemeClr val="accent1"/>
+          </a:effectRef>
+          <a:fontRef idx="minor">
+            <a:schemeClr val="lt1"/>
+          </a:fontRef>
+        </p:style>
+        <p:txBody>
+          <a:bodyPr rtlCol="0" anchor="ctr"/>
+          <a:lstStyle/>
+          <a:p>
+            <a:pPr algn="ctr"/>
+          </a:p>
+        </p:txBody>
+      </p:sp>
+      <p:sp>
+        <p:nvSpPr>
+          <p:cNvPr id="21" name="TextBox 20"/>
+          <p:cNvSpPr txBox="1"/>
+          <p:nvPr/>
+        </p:nvSpPr>
+        <p:spPr>
+          <a:xfrm>
+            <a:off x="6309360" y="3429000"/>
+            <a:ext cx="5166360" cy="1097280"/>
+          </a:xfrm>
+          <a:prstGeom prst="rect">
+            <a:avLst/>
+          </a:prstGeom>
+          <a:noFill/>
+        </p:spPr>
+        <p:txBody>
+          <a:bodyPr wrap="square" lIns="0" rIns="0" tIns="0" bIns="0" anchor="ctr">
+            <a:spAutoFit/>
+          </a:bodyPr>
+          <a:lstStyle/>
+          <a:p>
+            <a:pPr algn="l"/>
+            <a:r>
+              <a:rPr sz="1700" b="1" i="0">
+                <a:solidFill>
+                  <a:srgbClr val="11233E"/>
+                </a:solidFill>
+                <a:latin typeface="Calibri"/>
+              </a:rPr>
+              <a:t>No shared undo files</a:t>
+            </a:r>
+          </a:p>
+          <a:p>
+            <a:pPr algn="l"/>
+            <a:r>
+              <a:rPr sz="1400" b="0" i="0">
+                <a:solidFill>
+                  <a:srgbClr val="5C6C7E"/>
+                </a:solidFill>
+                <a:latin typeface="Calibri"/>
+              </a:rPr>
+              <a:t>Each step writes to its own run folder, so no two steps share a sibling bundle or a rollback baseline.</a:t>
+            </a:r>
+          </a:p>
+        </p:txBody>
+      </p:sp>
+      <p:sp>
+        <p:nvSpPr>
+          <p:cNvPr id="22" name="Rounded Rectangle 21"/>
+          <p:cNvSpPr/>
+          <p:nvPr/>
+        </p:nvSpPr>
+        <p:spPr>
+          <a:xfrm>
+            <a:off x="548640" y="4754880"/>
+            <a:ext cx="5440680" cy="1097280"/>
+          </a:xfrm>
+          <a:prstGeom prst="roundRect">
+            <a:avLst>
+              <a:gd name="adj" fmla="val 8333"/>
+            </a:avLst>
+          </a:prstGeom>
+          <a:solidFill>
+            <a:srgbClr val="F2F6FA"/>
+          </a:solidFill>
+          <a:ln w="12700">
+            <a:solidFill>
+              <a:srgbClr val="F2F6FA"/>
+            </a:solidFill>
+          </a:ln>
+          <a:effectLst/>
+        </p:spPr>
+        <p:style>
+          <a:lnRef idx="1">
+            <a:schemeClr val="accent1"/>
+          </a:lnRef>
+          <a:fillRef idx="3">
+            <a:schemeClr val="accent1"/>
+          </a:fillRef>
+          <a:effectRef idx="2">
+            <a:schemeClr val="accent1"/>
+          </a:effectRef>
+          <a:fontRef idx="minor">
+            <a:schemeClr val="lt1"/>
+          </a:fontRef>
+        </p:style>
+        <p:txBody>
+          <a:bodyPr rtlCol="0" anchor="ctr"/>
+          <a:lstStyle/>
+          <a:p>
+            <a:pPr algn="ctr"/>
+          </a:p>
+        </p:txBody>
+      </p:sp>
+      <p:sp>
+        <p:nvSpPr>
+          <p:cNvPr id="23" name="TextBox 22"/>
+          <p:cNvSpPr txBox="1"/>
+          <p:nvPr/>
+        </p:nvSpPr>
+        <p:spPr>
+          <a:xfrm>
+            <a:off x="685800" y="4754880"/>
+            <a:ext cx="5166360" cy="1097280"/>
+          </a:xfrm>
+          <a:prstGeom prst="rect">
+            <a:avLst/>
+          </a:prstGeom>
+          <a:noFill/>
+        </p:spPr>
+        <p:txBody>
+          <a:bodyPr wrap="square" lIns="0" rIns="0" tIns="0" bIns="0" anchor="ctr">
+            <a:spAutoFit/>
+          </a:bodyPr>
+          <a:lstStyle/>
+          <a:p>
+            <a:pPr algn="l"/>
+            <a:r>
+              <a:rPr sz="1700" b="1" i="0">
+                <a:solidFill>
+                  <a:srgbClr val="11233E"/>
+                </a:solidFill>
+                <a:latin typeface="Calibri"/>
+              </a:rPr>
+              <a:t>lm2 map: data/subnet_map_lm2.csv</a:t>
+            </a:r>
+          </a:p>
+          <a:p>
+            <a:pPr algn="l"/>
+            <a:r>
+              <a:rPr sz="1400" b="0" i="0">
+                <a:solidFill>
+                  <a:srgbClr val="5C6C7E"/>
+                </a:solidFill>
+                <a:latin typeface="Calibri"/>
+              </a:rPr>
+              <a:t>10.6 → 10.7. Today's nonprod_map without its 10.8 rows (10.8 is lm3's own space now).</a:t>
+            </a:r>
+          </a:p>
+        </p:txBody>
+      </p:sp>
+      <p:sp>
+        <p:nvSpPr>
+          <p:cNvPr id="24" name="Rounded Rectangle 23"/>
+          <p:cNvSpPr/>
+          <p:nvPr/>
+        </p:nvSpPr>
+        <p:spPr>
+          <a:xfrm>
+            <a:off x="6172200" y="4754880"/>
+            <a:ext cx="5440680" cy="1097280"/>
+          </a:xfrm>
+          <a:prstGeom prst="roundRect">
+            <a:avLst>
+              <a:gd name="adj" fmla="val 8333"/>
+            </a:avLst>
+          </a:prstGeom>
+          <a:solidFill>
+            <a:srgbClr val="F2F6FA"/>
+          </a:solidFill>
+          <a:ln w="12700">
+            <a:solidFill>
+              <a:srgbClr val="F2F6FA"/>
+            </a:solidFill>
+          </a:ln>
+          <a:effectLst/>
+        </p:spPr>
+        <p:style>
+          <a:lnRef idx="1">
+            <a:schemeClr val="accent1"/>
+          </a:lnRef>
+          <a:fillRef idx="3">
+            <a:schemeClr val="accent1"/>
+          </a:fillRef>
+          <a:effectRef idx="2">
+            <a:schemeClr val="accent1"/>
+          </a:effectRef>
+          <a:fontRef idx="minor">
+            <a:schemeClr val="lt1"/>
+          </a:fontRef>
+        </p:style>
+        <p:txBody>
+          <a:bodyPr rtlCol="0" anchor="ctr"/>
+          <a:lstStyle/>
+          <a:p>
+            <a:pPr algn="ctr"/>
+          </a:p>
+        </p:txBody>
+      </p:sp>
+      <p:sp>
+        <p:nvSpPr>
+          <p:cNvPr id="25" name="TextBox 24"/>
+          <p:cNvSpPr txBox="1"/>
+          <p:nvPr/>
+        </p:nvSpPr>
+        <p:spPr>
+          <a:xfrm>
+            <a:off x="6309360" y="4754880"/>
+            <a:ext cx="5166360" cy="1097280"/>
+          </a:xfrm>
+          <a:prstGeom prst="rect">
+            <a:avLst/>
+          </a:prstGeom>
+          <a:noFill/>
+        </p:spPr>
+        <p:txBody>
+          <a:bodyPr wrap="square" lIns="0" rIns="0" tIns="0" bIns="0" anchor="ctr">
+            <a:spAutoFit/>
+          </a:bodyPr>
+          <a:lstStyle/>
+          <a:p>
+            <a:pPr algn="l"/>
+            <a:r>
+              <a:rPr sz="1700" b="1" i="0">
+                <a:solidFill>
+                  <a:srgbClr val="11233E"/>
+                </a:solidFill>
+                <a:latin typeface="Calibri"/>
+              </a:rPr>
+              <a:t>lm3 map: data/subnet_map_lm3.csv</a:t>
+            </a:r>
+          </a:p>
+          <a:p>
+            <a:pPr algn="l"/>
+            <a:r>
+              <a:rPr sz="1400" b="0" i="0">
+                <a:solidFill>
+                  <a:srgbClr val="5C6C7E"/>
+                </a:solidFill>
+                <a:latin typeface="Calibri"/>
+              </a:rPr>
+              <a:t>10.6 → 10.8, keeping the host part. Overlaps lm3's six placeholder VMs: accepted in the lab.</a:t>
+            </a:r>
+          </a:p>
+        </p:txBody>
+      </p:sp>
+      <p:sp>
+        <p:nvSpPr>
+          <p:cNvPr id="26" name="TextBox 25"/>
           <p:cNvSpPr txBox="1"/>
           <p:nvPr/>
         </p:nvSpPr>
@@ -6477,27 +13170,23 @@
             <a:avLst/>
           </a:prstGeom>
           <a:noFill/>
-          <a:ln/>
-        </p:spPr>
-        <p:txBody>
-          <a:bodyPr wrap="square" lIns="0" tIns="0" rIns="0" bIns="0" rtlCol="0" anchor="ctr"/>
-          <a:lstStyle/>
-          <a:p>
-            <a:pPr indent="0" marL="0">
-              <a:buNone/>
-            </a:pPr>
-            <a:r>
-              <a:rPr lang="en-US" sz="1000" dirty="0">
-                <a:solidFill>
-                  <a:srgbClr val="BEDCE6"/>
-                </a:solidFill>
-                <a:latin typeface="Calibri" pitchFamily="34" charset="0"/>
-                <a:ea typeface="Calibri" pitchFamily="34" charset="-122"/>
-                <a:cs typeface="Calibri" pitchFamily="34" charset="-120"/>
-              </a:rPr>
-              <a:t>NSX migration workflow  •  6/6</a:t>
-            </a:r>
-            <a:endParaRPr lang="en-US" sz="1000" dirty="0"/>
+        </p:spPr>
+        <p:txBody>
+          <a:bodyPr wrap="square" lIns="0" rIns="0" tIns="0" bIns="0" anchor="ctr">
+            <a:spAutoFit/>
+          </a:bodyPr>
+          <a:lstStyle/>
+          <a:p>
+            <a:pPr algn="l"/>
+            <a:r>
+              <a:rPr sz="1000" b="0" i="0">
+                <a:solidFill>
+                  <a:srgbClr val="5C6C7E"/>
+                </a:solidFill>
+                <a:latin typeface="Calibri"/>
+              </a:rPr>
+              <a:t>NSX + Palo Alto migration workflow  •  8/12</a:t>
+            </a:r>
           </a:p>
         </p:txBody>
       </p:sp>
